--- a/docs/MevzuAI_Sunum_Guncel.pptx
+++ b/docs/MevzuAI_Sunum_Guncel.pptx
@@ -27,6 +27,10 @@
     <p:sldId id="275" r:id="rId26"/>
     <p:sldId id="276" r:id="rId27"/>
     <p:sldId id="277" r:id="rId28"/>
+    <p:sldId id="278" r:id="rId29"/>
+    <p:sldId id="279" r:id="rId30"/>
+    <p:sldId id="280" r:id="rId31"/>
+    <p:sldId id="281" r:id="rId32"/>
   </p:sldIdLst>
   <p:sldSz cx="12192119" cy="6858000" type="screen4x3"/>
   <p:notesSz cx="6858000" cy="9144000"/>
@@ -19530,6 +19534,782 @@
 </p:sld>
 </file>
 
+<file path=ppt/slides/slide23.xml><?xml version="1.0" encoding="utf-8"?>
+<p:sld xmlns:a="http://schemas.openxmlformats.org/drawingml/2006/main" xmlns:p="http://schemas.openxmlformats.org/presentationml/2006/main" xmlns:r="http://schemas.openxmlformats.org/officeDocument/2006/relationships">
+  <p:cSld>
+    <p:bg>
+      <p:bgPr>
+        <a:solidFill>
+          <a:srgbClr val="F7F9FC"/>
+        </a:solidFill>
+        <a:effectLst/>
+      </p:bgPr>
+    </p:bg>
+    <p:spTree>
+      <p:nvGrpSpPr>
+        <p:cNvPr id="1" name=""/>
+        <p:cNvGrpSpPr/>
+        <p:nvPr/>
+      </p:nvGrpSpPr>
+      <p:grpSpPr/>
+      <p:sp>
+        <p:nvSpPr>
+          <p:cNvPr id="2" name="TextBox 1"/>
+          <p:cNvSpPr txBox="1"/>
+          <p:nvPr/>
+        </p:nvSpPr>
+        <p:spPr>
+          <a:xfrm>
+            <a:off x="594360" y="274320"/>
+            <a:ext cx="10972800" cy="228600"/>
+          </a:xfrm>
+          <a:prstGeom prst="rect">
+            <a:avLst/>
+          </a:prstGeom>
+          <a:noFill/>
+        </p:spPr>
+        <p:txBody>
+          <a:bodyPr wrap="square" lIns="73152" rIns="73152" tIns="36576" bIns="27432" anchor="ctr">
+            <a:spAutoFit/>
+          </a:bodyPr>
+          <a:lstStyle/>
+          <a:p>
+            <a:pPr>
+              <a:defRPr sz="1000" b="1">
+                <a:solidFill>
+                  <a:srgbClr val="00AFA0"/>
+                </a:solidFill>
+                <a:latin typeface="Aptos"/>
+              </a:defRPr>
+            </a:pPr>
+            <a:r>
+              <a:t>KURULUM · AŞAMA GÖRSELİ</a:t>
+            </a:r>
+          </a:p>
+        </p:txBody>
+      </p:sp>
+      <p:sp>
+        <p:nvSpPr>
+          <p:cNvPr id="3" name="TextBox 2"/>
+          <p:cNvSpPr txBox="1"/>
+          <p:nvPr/>
+        </p:nvSpPr>
+        <p:spPr>
+          <a:xfrm>
+            <a:off x="594360" y="594360"/>
+            <a:ext cx="10972800" cy="502920"/>
+          </a:xfrm>
+          <a:prstGeom prst="rect">
+            <a:avLst/>
+          </a:prstGeom>
+          <a:noFill/>
+        </p:spPr>
+        <p:txBody>
+          <a:bodyPr wrap="square" lIns="73152" rIns="73152" tIns="36576" bIns="27432" anchor="ctr">
+            <a:spAutoFit/>
+          </a:bodyPr>
+          <a:lstStyle/>
+          <a:p>
+            <a:pPr>
+              <a:defRPr sz="2400" b="1">
+                <a:solidFill>
+                  <a:srgbClr val="112240"/>
+                </a:solidFill>
+                <a:latin typeface="Aptos"/>
+              </a:defRPr>
+            </a:pPr>
+            <a:r>
+              <a:t>Kurulum aşamaları ve açık onay kapıları</a:t>
+            </a:r>
+          </a:p>
+        </p:txBody>
+      </p:sp>
+      <p:sp>
+        <p:nvSpPr>
+          <p:cNvPr id="4" name="TextBox 3"/>
+          <p:cNvSpPr txBox="1"/>
+          <p:nvPr/>
+        </p:nvSpPr>
+        <p:spPr>
+          <a:xfrm>
+            <a:off x="621792" y="1115568"/>
+            <a:ext cx="10972800" cy="384048"/>
+          </a:xfrm>
+          <a:prstGeom prst="rect">
+            <a:avLst/>
+          </a:prstGeom>
+          <a:noFill/>
+        </p:spPr>
+        <p:txBody>
+          <a:bodyPr wrap="square" lIns="73152" rIns="73152" tIns="36576" bIns="27432" anchor="ctr">
+            <a:spAutoFit/>
+          </a:bodyPr>
+          <a:lstStyle/>
+          <a:p>
+            <a:pPr>
+              <a:defRPr sz="1100" b="0">
+                <a:solidFill>
+                  <a:srgbClr val="637389"/>
+                </a:solidFill>
+                <a:latin typeface="Aptos"/>
+              </a:defRPr>
+            </a:pPr>
+            <a:r>
+              <a:t>install.sh kaynak kodundan sıralandı; bu makinede yapılmış bir kurulum kaydı olarak sunulmaz.</a:t>
+            </a:r>
+          </a:p>
+        </p:txBody>
+      </p:sp>
+      <p:pic>
+        <p:nvPicPr>
+          <p:cNvPr id="5" name="Picture 4" descr="kurulum_asamalari.png"/>
+          <p:cNvPicPr>
+            <a:picLocks noChangeAspect="1"/>
+          </p:cNvPicPr>
+          <p:nvPr/>
+        </p:nvPicPr>
+        <p:blipFill>
+          <a:blip r:embed="rId2"/>
+          <a:stretch>
+            <a:fillRect/>
+          </a:stretch>
+        </p:blipFill>
+        <p:spPr>
+          <a:xfrm>
+            <a:off x="621792" y="1664208"/>
+            <a:ext cx="10972800" cy="4507992"/>
+          </a:xfrm>
+          <a:prstGeom prst="rect">
+            <a:avLst/>
+          </a:prstGeom>
+        </p:spPr>
+      </p:pic>
+      <p:sp>
+        <p:nvSpPr>
+          <p:cNvPr id="6" name="TextBox 5"/>
+          <p:cNvSpPr txBox="1"/>
+          <p:nvPr/>
+        </p:nvSpPr>
+        <p:spPr>
+          <a:xfrm>
+            <a:off x="685800" y="6263640"/>
+            <a:ext cx="10972800" cy="256032"/>
+          </a:xfrm>
+          <a:prstGeom prst="rect">
+            <a:avLst/>
+          </a:prstGeom>
+          <a:noFill/>
+        </p:spPr>
+        <p:txBody>
+          <a:bodyPr wrap="square" lIns="73152" rIns="73152" tIns="36576" bIns="27432" anchor="ctr">
+            <a:spAutoFit/>
+          </a:bodyPr>
+          <a:lstStyle/>
+          <a:p>
+            <a:pPr>
+              <a:defRPr sz="900" b="0">
+                <a:solidFill>
+                  <a:srgbClr val="637389"/>
+                </a:solidFill>
+                <a:latin typeface="Aptos"/>
+              </a:defRPr>
+            </a:pPr>
+            <a:r>
+              <a:t>Görsel belge akışını anlatır; Ollama, model, mevzuat indirme ve klonlama adımları ayrıca onay ister.</a:t>
+            </a:r>
+          </a:p>
+        </p:txBody>
+      </p:sp>
+    </p:spTree>
+  </p:cSld>
+  <p:clrMapOvr>
+    <a:masterClrMapping/>
+  </p:clrMapOvr>
+</p:sld>
+</file>
+
+<file path=ppt/slides/slide24.xml><?xml version="1.0" encoding="utf-8"?>
+<p:sld xmlns:a="http://schemas.openxmlformats.org/drawingml/2006/main" xmlns:p="http://schemas.openxmlformats.org/presentationml/2006/main" xmlns:r="http://schemas.openxmlformats.org/officeDocument/2006/relationships">
+  <p:cSld>
+    <p:bg>
+      <p:bgPr>
+        <a:solidFill>
+          <a:srgbClr val="F7F9FC"/>
+        </a:solidFill>
+        <a:effectLst/>
+      </p:bgPr>
+    </p:bg>
+    <p:spTree>
+      <p:nvGrpSpPr>
+        <p:cNvPr id="1" name=""/>
+        <p:cNvGrpSpPr/>
+        <p:nvPr/>
+      </p:nvGrpSpPr>
+      <p:grpSpPr/>
+      <p:sp>
+        <p:nvSpPr>
+          <p:cNvPr id="2" name="TextBox 1"/>
+          <p:cNvSpPr txBox="1"/>
+          <p:nvPr/>
+        </p:nvSpPr>
+        <p:spPr>
+          <a:xfrm>
+            <a:off x="594360" y="274320"/>
+            <a:ext cx="10972800" cy="228600"/>
+          </a:xfrm>
+          <a:prstGeom prst="rect">
+            <a:avLst/>
+          </a:prstGeom>
+          <a:noFill/>
+        </p:spPr>
+        <p:txBody>
+          <a:bodyPr wrap="square" lIns="73152" rIns="73152" tIns="36576" bIns="27432" anchor="ctr">
+            <a:spAutoFit/>
+          </a:bodyPr>
+          <a:lstStyle/>
+          <a:p>
+            <a:pPr>
+              <a:defRPr sz="1000" b="1">
+                <a:solidFill>
+                  <a:srgbClr val="00AFA0"/>
+                </a:solidFill>
+                <a:latin typeface="Aptos"/>
+              </a:defRPr>
+            </a:pPr>
+            <a:r>
+              <a:t>TEST REPOSU · GERÇEK DOSYA YAPISI</a:t>
+            </a:r>
+          </a:p>
+        </p:txBody>
+      </p:sp>
+      <p:sp>
+        <p:nvSpPr>
+          <p:cNvPr id="3" name="TextBox 2"/>
+          <p:cNvSpPr txBox="1"/>
+          <p:nvPr/>
+        </p:nvSpPr>
+        <p:spPr>
+          <a:xfrm>
+            <a:off x="594360" y="594360"/>
+            <a:ext cx="10972800" cy="502920"/>
+          </a:xfrm>
+          <a:prstGeom prst="rect">
+            <a:avLst/>
+          </a:prstGeom>
+          <a:noFill/>
+        </p:spPr>
+        <p:txBody>
+          <a:bodyPr wrap="square" lIns="73152" rIns="73152" tIns="36576" bIns="27432" anchor="ctr">
+            <a:spAutoFit/>
+          </a:bodyPr>
+          <a:lstStyle/>
+          <a:p>
+            <a:pPr>
+              <a:defRPr sz="2400" b="1">
+                <a:solidFill>
+                  <a:srgbClr val="112240"/>
+                </a:solidFill>
+                <a:latin typeface="Aptos"/>
+              </a:defRPr>
+            </a:pPr>
+            <a:r>
+              <a:t>İki sentetik demo, on test bulgusu</a:t>
+            </a:r>
+          </a:p>
+        </p:txBody>
+      </p:sp>
+      <p:sp>
+        <p:nvSpPr>
+          <p:cNvPr id="4" name="TextBox 3"/>
+          <p:cNvSpPr txBox="1"/>
+          <p:nvPr/>
+        </p:nvSpPr>
+        <p:spPr>
+          <a:xfrm>
+            <a:off x="621792" y="1115568"/>
+            <a:ext cx="10972800" cy="384048"/>
+          </a:xfrm>
+          <a:prstGeom prst="rect">
+            <a:avLst/>
+          </a:prstGeom>
+          <a:noFill/>
+        </p:spPr>
+        <p:txBody>
+          <a:bodyPr wrap="square" lIns="73152" rIns="73152" tIns="36576" bIns="27432" anchor="ctr">
+            <a:spAutoFit/>
+          </a:bodyPr>
+          <a:lstStyle/>
+          <a:p>
+            <a:pPr>
+              <a:defRPr sz="1100" b="0">
+                <a:solidFill>
+                  <a:srgbClr val="637389"/>
+                </a:solidFill>
+                <a:latin typeface="Aptos"/>
+              </a:defRPr>
+            </a:pPr>
+            <a:r>
+              <a:t>Depo ağacı mevcut test fixture Git deposundan; içerik yalnızca test için hazırlanmıştır.</a:t>
+            </a:r>
+          </a:p>
+        </p:txBody>
+      </p:sp>
+      <p:pic>
+        <p:nvPicPr>
+          <p:cNvPr id="5" name="Picture 4" descr="sentetik_test_deposu.png"/>
+          <p:cNvPicPr>
+            <a:picLocks noChangeAspect="1"/>
+          </p:cNvPicPr>
+          <p:nvPr/>
+        </p:nvPicPr>
+        <p:blipFill>
+          <a:blip r:embed="rId2"/>
+          <a:stretch>
+            <a:fillRect/>
+          </a:stretch>
+        </p:blipFill>
+        <p:spPr>
+          <a:xfrm>
+            <a:off x="621792" y="1664208"/>
+            <a:ext cx="10972800" cy="4507992"/>
+          </a:xfrm>
+          <a:prstGeom prst="rect">
+            <a:avLst/>
+          </a:prstGeom>
+        </p:spPr>
+      </p:pic>
+      <p:sp>
+        <p:nvSpPr>
+          <p:cNvPr id="6" name="TextBox 5"/>
+          <p:cNvSpPr txBox="1"/>
+          <p:nvPr/>
+        </p:nvSpPr>
+        <p:spPr>
+          <a:xfrm>
+            <a:off x="685800" y="6263640"/>
+            <a:ext cx="10972800" cy="256032"/>
+          </a:xfrm>
+          <a:prstGeom prst="rect">
+            <a:avLst/>
+          </a:prstGeom>
+          <a:noFill/>
+        </p:spPr>
+        <p:txBody>
+          <a:bodyPr wrap="square" lIns="73152" rIns="73152" tIns="36576" bIns="27432" anchor="ctr">
+            <a:spAutoFit/>
+          </a:bodyPr>
+          <a:lstStyle/>
+          <a:p>
+            <a:pPr>
+              <a:defRPr sz="900" b="0">
+                <a:solidFill>
+                  <a:srgbClr val="637389"/>
+                </a:solidFill>
+                <a:latin typeface="Aptos"/>
+              </a:defRPr>
+            </a:pPr>
+            <a:r>
+              <a:t>Sentetik fixture; gerçek sistem veya gerçek mevzuat bulgusu değildir.</a:t>
+            </a:r>
+          </a:p>
+        </p:txBody>
+      </p:sp>
+    </p:spTree>
+  </p:cSld>
+  <p:clrMapOvr>
+    <a:masterClrMapping/>
+  </p:clrMapOvr>
+</p:sld>
+</file>
+
+<file path=ppt/slides/slide25.xml><?xml version="1.0" encoding="utf-8"?>
+<p:sld xmlns:a="http://schemas.openxmlformats.org/drawingml/2006/main" xmlns:p="http://schemas.openxmlformats.org/presentationml/2006/main" xmlns:r="http://schemas.openxmlformats.org/officeDocument/2006/relationships">
+  <p:cSld>
+    <p:bg>
+      <p:bgPr>
+        <a:solidFill>
+          <a:srgbClr val="F7F9FC"/>
+        </a:solidFill>
+        <a:effectLst/>
+      </p:bgPr>
+    </p:bg>
+    <p:spTree>
+      <p:nvGrpSpPr>
+        <p:cNvPr id="1" name=""/>
+        <p:cNvGrpSpPr/>
+        <p:nvPr/>
+      </p:nvGrpSpPr>
+      <p:grpSpPr/>
+      <p:sp>
+        <p:nvSpPr>
+          <p:cNvPr id="2" name="TextBox 1"/>
+          <p:cNvSpPr txBox="1"/>
+          <p:nvPr/>
+        </p:nvSpPr>
+        <p:spPr>
+          <a:xfrm>
+            <a:off x="594360" y="274320"/>
+            <a:ext cx="10972800" cy="228600"/>
+          </a:xfrm>
+          <a:prstGeom prst="rect">
+            <a:avLst/>
+          </a:prstGeom>
+          <a:noFill/>
+        </p:spPr>
+        <p:txBody>
+          <a:bodyPr wrap="square" lIns="73152" rIns="73152" tIns="36576" bIns="27432" anchor="ctr">
+            <a:spAutoFit/>
+          </a:bodyPr>
+          <a:lstStyle/>
+          <a:p>
+            <a:pPr>
+              <a:defRPr sz="1000" b="1">
+                <a:solidFill>
+                  <a:srgbClr val="00AFA0"/>
+                </a:solidFill>
+                <a:latin typeface="Aptos"/>
+              </a:defRPr>
+            </a:pPr>
+            <a:r>
+              <a:t>REMEDIATION · DIFF + TEST</a:t>
+            </a:r>
+          </a:p>
+        </p:txBody>
+      </p:sp>
+      <p:sp>
+        <p:nvSpPr>
+          <p:cNvPr id="3" name="TextBox 2"/>
+          <p:cNvSpPr txBox="1"/>
+          <p:nvPr/>
+        </p:nvSpPr>
+        <p:spPr>
+          <a:xfrm>
+            <a:off x="594360" y="594360"/>
+            <a:ext cx="10972800" cy="502920"/>
+          </a:xfrm>
+          <a:prstGeom prst="rect">
+            <a:avLst/>
+          </a:prstGeom>
+          <a:noFill/>
+        </p:spPr>
+        <p:txBody>
+          <a:bodyPr wrap="square" lIns="73152" rIns="73152" tIns="36576" bIns="27432" anchor="ctr">
+            <a:spAutoFit/>
+          </a:bodyPr>
+          <a:lstStyle/>
+          <a:p>
+            <a:pPr>
+              <a:defRPr sz="2400" b="1">
+                <a:solidFill>
+                  <a:srgbClr val="112240"/>
+                </a:solidFill>
+                <a:latin typeface="Aptos"/>
+              </a:defRPr>
+            </a:pPr>
+            <a:r>
+              <a:t>Önce / sonra farkı ve kabul testi</a:t>
+            </a:r>
+          </a:p>
+        </p:txBody>
+      </p:sp>
+      <p:sp>
+        <p:nvSpPr>
+          <p:cNvPr id="4" name="TextBox 3"/>
+          <p:cNvSpPr txBox="1"/>
+          <p:nvPr/>
+        </p:nvSpPr>
+        <p:spPr>
+          <a:xfrm>
+            <a:off x="621792" y="1115568"/>
+            <a:ext cx="10972800" cy="384048"/>
+          </a:xfrm>
+          <a:prstGeom prst="rect">
+            <a:avLst/>
+          </a:prstGeom>
+          <a:noFill/>
+        </p:spPr>
+        <p:txBody>
+          <a:bodyPr wrap="square" lIns="73152" rIns="73152" tIns="36576" bIns="27432" anchor="ctr">
+            <a:spAutoFit/>
+          </a:bodyPr>
+          <a:lstStyle/>
+          <a:p>
+            <a:pPr>
+              <a:defRPr sz="1100" b="0">
+                <a:solidFill>
+                  <a:srgbClr val="637389"/>
+                </a:solidFill>
+                <a:latin typeface="Aptos"/>
+              </a:defRPr>
+            </a:pPr>
+            <a:r>
+              <a:t>Görsel, izole remediation worktree raporundaki iki örnek değişikliği ve test raporunu gösterir.</a:t>
+            </a:r>
+          </a:p>
+        </p:txBody>
+      </p:sp>
+      <p:pic>
+        <p:nvPicPr>
+          <p:cNvPr id="5" name="Picture 4" descr="remediation_diff_ve_test.png"/>
+          <p:cNvPicPr>
+            <a:picLocks noChangeAspect="1"/>
+          </p:cNvPicPr>
+          <p:nvPr/>
+        </p:nvPicPr>
+        <p:blipFill>
+          <a:blip r:embed="rId2"/>
+          <a:stretch>
+            <a:fillRect/>
+          </a:stretch>
+        </p:blipFill>
+        <p:spPr>
+          <a:xfrm>
+            <a:off x="621792" y="1664208"/>
+            <a:ext cx="10972800" cy="4507992"/>
+          </a:xfrm>
+          <a:prstGeom prst="rect">
+            <a:avLst/>
+          </a:prstGeom>
+        </p:spPr>
+      </p:pic>
+      <p:sp>
+        <p:nvSpPr>
+          <p:cNvPr id="6" name="TextBox 5"/>
+          <p:cNvSpPr txBox="1"/>
+          <p:nvPr/>
+        </p:nvSpPr>
+        <p:spPr>
+          <a:xfrm>
+            <a:off x="685800" y="6263640"/>
+            <a:ext cx="10972800" cy="256032"/>
+          </a:xfrm>
+          <a:prstGeom prst="rect">
+            <a:avLst/>
+          </a:prstGeom>
+          <a:noFill/>
+        </p:spPr>
+        <p:txBody>
+          <a:bodyPr wrap="square" lIns="73152" rIns="73152" tIns="36576" bIns="27432" anchor="ctr">
+            <a:spAutoFit/>
+          </a:bodyPr>
+          <a:lstStyle/>
+          <a:p>
+            <a:pPr>
+              <a:defRPr sz="900" b="0">
+                <a:solidFill>
+                  <a:srgbClr val="637389"/>
+                </a:solidFill>
+                <a:latin typeface="Aptos"/>
+              </a:defRPr>
+            </a:pPr>
+            <a:r>
+              <a:t>Test raporunda 2 sentetik kabul testi geçti; hukuki uyumluluk doğrulaması değildir.</a:t>
+            </a:r>
+          </a:p>
+        </p:txBody>
+      </p:sp>
+    </p:spTree>
+  </p:cSld>
+  <p:clrMapOvr>
+    <a:masterClrMapping/>
+  </p:clrMapOvr>
+</p:sld>
+</file>
+
+<file path=ppt/slides/slide26.xml><?xml version="1.0" encoding="utf-8"?>
+<p:sld xmlns:a="http://schemas.openxmlformats.org/drawingml/2006/main" xmlns:p="http://schemas.openxmlformats.org/presentationml/2006/main" xmlns:r="http://schemas.openxmlformats.org/officeDocument/2006/relationships">
+  <p:cSld>
+    <p:bg>
+      <p:bgPr>
+        <a:solidFill>
+          <a:srgbClr val="F7F9FC"/>
+        </a:solidFill>
+        <a:effectLst/>
+      </p:bgPr>
+    </p:bg>
+    <p:spTree>
+      <p:nvGrpSpPr>
+        <p:cNvPr id="1" name=""/>
+        <p:cNvGrpSpPr/>
+        <p:nvPr/>
+      </p:nvGrpSpPr>
+      <p:grpSpPr/>
+      <p:sp>
+        <p:nvSpPr>
+          <p:cNvPr id="2" name="TextBox 1"/>
+          <p:cNvSpPr txBox="1"/>
+          <p:nvPr/>
+        </p:nvSpPr>
+        <p:spPr>
+          <a:xfrm>
+            <a:off x="594360" y="274320"/>
+            <a:ext cx="10972800" cy="228600"/>
+          </a:xfrm>
+          <a:prstGeom prst="rect">
+            <a:avLst/>
+          </a:prstGeom>
+          <a:noFill/>
+        </p:spPr>
+        <p:txBody>
+          <a:bodyPr wrap="square" lIns="73152" rIns="73152" tIns="36576" bIns="27432" anchor="ctr">
+            <a:spAutoFit/>
+          </a:bodyPr>
+          <a:lstStyle/>
+          <a:p>
+            <a:pPr>
+              <a:defRPr sz="1000" b="1">
+                <a:solidFill>
+                  <a:srgbClr val="00AFA0"/>
+                </a:solidFill>
+                <a:latin typeface="Aptos"/>
+              </a:defRPr>
+            </a:pPr>
+            <a:r>
+              <a:t>PR · YEREL ENTEGRASYON PROVASI</a:t>
+            </a:r>
+          </a:p>
+        </p:txBody>
+      </p:sp>
+      <p:sp>
+        <p:nvSpPr>
+          <p:cNvPr id="3" name="TextBox 2"/>
+          <p:cNvSpPr txBox="1"/>
+          <p:nvPr/>
+        </p:nvSpPr>
+        <p:spPr>
+          <a:xfrm>
+            <a:off x="594360" y="594360"/>
+            <a:ext cx="10972800" cy="502920"/>
+          </a:xfrm>
+          <a:prstGeom prst="rect">
+            <a:avLst/>
+          </a:prstGeom>
+          <a:noFill/>
+        </p:spPr>
+        <p:txBody>
+          <a:bodyPr wrap="square" lIns="73152" rIns="73152" tIns="36576" bIns="27432" anchor="ctr">
+            <a:spAutoFit/>
+          </a:bodyPr>
+          <a:lstStyle/>
+          <a:p>
+            <a:pPr>
+              <a:defRPr sz="2400" b="1">
+                <a:solidFill>
+                  <a:srgbClr val="112240"/>
+                </a:solidFill>
+                <a:latin typeface="Aptos"/>
+              </a:defRPr>
+            </a:pPr>
+            <a:r>
+              <a:t>Push/PR hattı güvenli test ortamında denendi</a:t>
+            </a:r>
+          </a:p>
+        </p:txBody>
+      </p:sp>
+      <p:sp>
+        <p:nvSpPr>
+          <p:cNvPr id="4" name="TextBox 3"/>
+          <p:cNvSpPr txBox="1"/>
+          <p:nvPr/>
+        </p:nvSpPr>
+        <p:spPr>
+          <a:xfrm>
+            <a:off x="621792" y="1115568"/>
+            <a:ext cx="10972800" cy="384048"/>
+          </a:xfrm>
+          <a:prstGeom prst="rect">
+            <a:avLst/>
+          </a:prstGeom>
+          <a:noFill/>
+        </p:spPr>
+        <p:txBody>
+          <a:bodyPr wrap="square" lIns="73152" rIns="73152" tIns="36576" bIns="27432" anchor="ctr">
+            <a:spAutoFit/>
+          </a:bodyPr>
+          <a:lstStyle/>
+          <a:p>
+            <a:pPr>
+              <a:defRPr sz="1100" b="0">
+                <a:solidFill>
+                  <a:srgbClr val="637389"/>
+                </a:solidFill>
+                <a:latin typeface="Aptos"/>
+              </a:defRPr>
+            </a:pPr>
+            <a:r>
+              <a:t>Yerel bare Git remote ve fake gh kullanıldı; gerçek GitHub PR açılmadı.</a:t>
+            </a:r>
+          </a:p>
+        </p:txBody>
+      </p:sp>
+      <p:pic>
+        <p:nvPicPr>
+          <p:cNvPr id="5" name="Picture 4" descr="pr_akisi_yerel_prova.png"/>
+          <p:cNvPicPr>
+            <a:picLocks noChangeAspect="1"/>
+          </p:cNvPicPr>
+          <p:nvPr/>
+        </p:nvPicPr>
+        <p:blipFill>
+          <a:blip r:embed="rId2"/>
+          <a:stretch>
+            <a:fillRect/>
+          </a:stretch>
+        </p:blipFill>
+        <p:spPr>
+          <a:xfrm>
+            <a:off x="621792" y="1664208"/>
+            <a:ext cx="10972800" cy="4507992"/>
+          </a:xfrm>
+          <a:prstGeom prst="rect">
+            <a:avLst/>
+          </a:prstGeom>
+        </p:spPr>
+      </p:pic>
+      <p:sp>
+        <p:nvSpPr>
+          <p:cNvPr id="6" name="TextBox 5"/>
+          <p:cNvSpPr txBox="1"/>
+          <p:nvPr/>
+        </p:nvSpPr>
+        <p:spPr>
+          <a:xfrm>
+            <a:off x="685800" y="6263640"/>
+            <a:ext cx="10972800" cy="256032"/>
+          </a:xfrm>
+          <a:prstGeom prst="rect">
+            <a:avLst/>
+          </a:prstGeom>
+          <a:noFill/>
+        </p:spPr>
+        <p:txBody>
+          <a:bodyPr wrap="square" lIns="73152" rIns="73152" tIns="36576" bIns="27432" anchor="ctr">
+            <a:spAutoFit/>
+          </a:bodyPr>
+          <a:lstStyle/>
+          <a:p>
+            <a:pPr>
+              <a:defRPr sz="900" b="0">
+                <a:solidFill>
+                  <a:srgbClr val="637389"/>
+                </a:solidFill>
+                <a:latin typeface="Aptos"/>
+              </a:defRPr>
+            </a:pPr>
+            <a:r>
+              <a:t>Gerçek PR ekran görüntüsü mevcut değildir; bu görsel yerel mock provayı açıkça etiketler.</a:t>
+            </a:r>
+          </a:p>
+        </p:txBody>
+      </p:sp>
+    </p:spTree>
+  </p:cSld>
+  <p:clrMapOvr>
+    <a:masterClrMapping/>
+  </p:clrMapOvr>
+</p:sld>
+</file>
+
 <file path=ppt/slides/slide3.xml><?xml version="1.0" encoding="utf-8"?>
 <p:sld xmlns:a="http://schemas.openxmlformats.org/drawingml/2006/main" xmlns:p="http://schemas.openxmlformats.org/presentationml/2006/main" xmlns:r="http://schemas.openxmlformats.org/officeDocument/2006/relationships">
   <p:cSld>

--- a/docs/MevzuAI_Sunum_Guncel.pptx
+++ b/docs/MevzuAI_Sunum_Guncel.pptx
@@ -3771,6 +3771,30 @@
           </a:p>
         </p:txBody>
       </p:sp>
+      <p:pic>
+        <p:nvPicPr>
+          <p:cNvPr id="16" name="Picture 15" descr="softtech-logo.png"/>
+          <p:cNvPicPr>
+            <a:picLocks noChangeAspect="1"/>
+          </p:cNvPicPr>
+          <p:nvPr/>
+        </p:nvPicPr>
+        <p:blipFill>
+          <a:blip r:embed="rId3"/>
+          <a:stretch>
+            <a:fillRect/>
+          </a:stretch>
+        </p:blipFill>
+        <p:spPr>
+          <a:xfrm>
+            <a:off x="9189720" y="5330952"/>
+            <a:ext cx="2148840" cy="932738"/>
+          </a:xfrm>
+          <a:prstGeom prst="rect">
+            <a:avLst/>
+          </a:prstGeom>
+        </p:spPr>
+      </p:pic>
     </p:spTree>
   </p:cSld>
   <p:clrMapOvr>
@@ -6027,6 +6051,30 @@
           </a:p>
         </p:txBody>
       </p:sp>
+      <p:pic>
+        <p:nvPicPr>
+          <p:cNvPr id="53" name="Picture 52" descr="softtech-logo.png"/>
+          <p:cNvPicPr>
+            <a:picLocks noChangeAspect="1"/>
+          </p:cNvPicPr>
+          <p:nvPr/>
+        </p:nvPicPr>
+        <p:blipFill>
+          <a:blip r:embed="rId3"/>
+          <a:stretch>
+            <a:fillRect/>
+          </a:stretch>
+        </p:blipFill>
+        <p:spPr>
+          <a:xfrm>
+            <a:off x="9985248" y="6382512"/>
+            <a:ext cx="960120" cy="416755"/>
+          </a:xfrm>
+          <a:prstGeom prst="rect">
+            <a:avLst/>
+          </a:prstGeom>
+        </p:spPr>
+      </p:pic>
     </p:spTree>
   </p:cSld>
   <p:clrMapOvr>
@@ -7286,6 +7334,30 @@
           </a:p>
         </p:txBody>
       </p:sp>
+      <p:pic>
+        <p:nvPicPr>
+          <p:cNvPr id="26" name="Picture 25" descr="softtech-logo.png"/>
+          <p:cNvPicPr>
+            <a:picLocks noChangeAspect="1"/>
+          </p:cNvPicPr>
+          <p:nvPr/>
+        </p:nvPicPr>
+        <p:blipFill>
+          <a:blip r:embed="rId3"/>
+          <a:stretch>
+            <a:fillRect/>
+          </a:stretch>
+        </p:blipFill>
+        <p:spPr>
+          <a:xfrm>
+            <a:off x="9985248" y="6382512"/>
+            <a:ext cx="960120" cy="416755"/>
+          </a:xfrm>
+          <a:prstGeom prst="rect">
+            <a:avLst/>
+          </a:prstGeom>
+        </p:spPr>
+      </p:pic>
     </p:spTree>
   </p:cSld>
   <p:clrMapOvr>
@@ -8346,6 +8418,30 @@
           </a:p>
         </p:txBody>
       </p:sp>
+      <p:pic>
+        <p:nvPicPr>
+          <p:cNvPr id="26" name="Picture 25" descr="softtech-logo.png"/>
+          <p:cNvPicPr>
+            <a:picLocks noChangeAspect="1"/>
+          </p:cNvPicPr>
+          <p:nvPr/>
+        </p:nvPicPr>
+        <p:blipFill>
+          <a:blip r:embed="rId3"/>
+          <a:stretch>
+            <a:fillRect/>
+          </a:stretch>
+        </p:blipFill>
+        <p:spPr>
+          <a:xfrm>
+            <a:off x="9985248" y="6382512"/>
+            <a:ext cx="960120" cy="416755"/>
+          </a:xfrm>
+          <a:prstGeom prst="rect">
+            <a:avLst/>
+          </a:prstGeom>
+        </p:spPr>
+      </p:pic>
     </p:spTree>
   </p:cSld>
   <p:clrMapOvr>
@@ -9621,6 +9717,30 @@
           </a:p>
         </p:txBody>
       </p:sp>
+      <p:pic>
+        <p:nvPicPr>
+          <p:cNvPr id="26" name="Picture 25" descr="softtech-logo.png"/>
+          <p:cNvPicPr>
+            <a:picLocks noChangeAspect="1"/>
+          </p:cNvPicPr>
+          <p:nvPr/>
+        </p:nvPicPr>
+        <p:blipFill>
+          <a:blip r:embed="rId3"/>
+          <a:stretch>
+            <a:fillRect/>
+          </a:stretch>
+        </p:blipFill>
+        <p:spPr>
+          <a:xfrm>
+            <a:off x="9985248" y="6382512"/>
+            <a:ext cx="960120" cy="416755"/>
+          </a:xfrm>
+          <a:prstGeom prst="rect">
+            <a:avLst/>
+          </a:prstGeom>
+        </p:spPr>
+      </p:pic>
     </p:spTree>
   </p:cSld>
   <p:clrMapOvr>
@@ -10594,6 +10714,30 @@
           </a:p>
         </p:txBody>
       </p:sp>
+      <p:pic>
+        <p:nvPicPr>
+          <p:cNvPr id="25" name="Picture 24" descr="softtech-logo.png"/>
+          <p:cNvPicPr>
+            <a:picLocks noChangeAspect="1"/>
+          </p:cNvPicPr>
+          <p:nvPr/>
+        </p:nvPicPr>
+        <p:blipFill>
+          <a:blip r:embed="rId3"/>
+          <a:stretch>
+            <a:fillRect/>
+          </a:stretch>
+        </p:blipFill>
+        <p:spPr>
+          <a:xfrm>
+            <a:off x="9985248" y="6382512"/>
+            <a:ext cx="960120" cy="416755"/>
+          </a:xfrm>
+          <a:prstGeom prst="rect">
+            <a:avLst/>
+          </a:prstGeom>
+        </p:spPr>
+      </p:pic>
     </p:spTree>
   </p:cSld>
   <p:clrMapOvr>
@@ -11138,6 +11282,30 @@
           </a:p>
         </p:txBody>
       </p:sp>
+      <p:pic>
+        <p:nvPicPr>
+          <p:cNvPr id="15" name="Picture 14" descr="softtech-logo.png"/>
+          <p:cNvPicPr>
+            <a:picLocks noChangeAspect="1"/>
+          </p:cNvPicPr>
+          <p:nvPr/>
+        </p:nvPicPr>
+        <p:blipFill>
+          <a:blip r:embed="rId5"/>
+          <a:stretch>
+            <a:fillRect/>
+          </a:stretch>
+        </p:blipFill>
+        <p:spPr>
+          <a:xfrm>
+            <a:off x="9985248" y="6382512"/>
+            <a:ext cx="960120" cy="416755"/>
+          </a:xfrm>
+          <a:prstGeom prst="rect">
+            <a:avLst/>
+          </a:prstGeom>
+        </p:spPr>
+      </p:pic>
     </p:spTree>
   </p:cSld>
   <p:clrMapOvr>
@@ -12313,6 +12481,30 @@
           </a:p>
         </p:txBody>
       </p:sp>
+      <p:pic>
+        <p:nvPicPr>
+          <p:cNvPr id="28" name="Picture 27" descr="softtech-logo.png"/>
+          <p:cNvPicPr>
+            <a:picLocks noChangeAspect="1"/>
+          </p:cNvPicPr>
+          <p:nvPr/>
+        </p:nvPicPr>
+        <p:blipFill>
+          <a:blip r:embed="rId3"/>
+          <a:stretch>
+            <a:fillRect/>
+          </a:stretch>
+        </p:blipFill>
+        <p:spPr>
+          <a:xfrm>
+            <a:off x="9985248" y="6382512"/>
+            <a:ext cx="960120" cy="416755"/>
+          </a:xfrm>
+          <a:prstGeom prst="rect">
+            <a:avLst/>
+          </a:prstGeom>
+        </p:spPr>
+      </p:pic>
     </p:spTree>
   </p:cSld>
   <p:clrMapOvr>
@@ -15259,6 +15451,30 @@
           </a:p>
         </p:txBody>
       </p:sp>
+      <p:pic>
+        <p:nvPicPr>
+          <p:cNvPr id="77" name="Picture 76" descr="softtech-logo.png"/>
+          <p:cNvPicPr>
+            <a:picLocks noChangeAspect="1"/>
+          </p:cNvPicPr>
+          <p:nvPr/>
+        </p:nvPicPr>
+        <p:blipFill>
+          <a:blip r:embed="rId3"/>
+          <a:stretch>
+            <a:fillRect/>
+          </a:stretch>
+        </p:blipFill>
+        <p:spPr>
+          <a:xfrm>
+            <a:off x="9985248" y="6382512"/>
+            <a:ext cx="960120" cy="416755"/>
+          </a:xfrm>
+          <a:prstGeom prst="rect">
+            <a:avLst/>
+          </a:prstGeom>
+        </p:spPr>
+      </p:pic>
     </p:spTree>
   </p:cSld>
   <p:clrMapOvr>
@@ -16018,6 +16234,30 @@
           </a:p>
         </p:txBody>
       </p:sp>
+      <p:pic>
+        <p:nvPicPr>
+          <p:cNvPr id="20" name="Picture 19" descr="softtech-logo.png"/>
+          <p:cNvPicPr>
+            <a:picLocks noChangeAspect="1"/>
+          </p:cNvPicPr>
+          <p:nvPr/>
+        </p:nvPicPr>
+        <p:blipFill>
+          <a:blip r:embed="rId3"/>
+          <a:stretch>
+            <a:fillRect/>
+          </a:stretch>
+        </p:blipFill>
+        <p:spPr>
+          <a:xfrm>
+            <a:off x="9985248" y="6382512"/>
+            <a:ext cx="960120" cy="416755"/>
+          </a:xfrm>
+          <a:prstGeom prst="rect">
+            <a:avLst/>
+          </a:prstGeom>
+        </p:spPr>
+      </p:pic>
     </p:spTree>
   </p:cSld>
   <p:clrMapOvr>
@@ -16425,6 +16665,30 @@
           </a:p>
         </p:txBody>
       </p:sp>
+      <p:pic>
+        <p:nvPicPr>
+          <p:cNvPr id="10" name="Picture 9" descr="softtech-logo.png"/>
+          <p:cNvPicPr>
+            <a:picLocks noChangeAspect="1"/>
+          </p:cNvPicPr>
+          <p:nvPr/>
+        </p:nvPicPr>
+        <p:blipFill>
+          <a:blip r:embed="rId3"/>
+          <a:stretch>
+            <a:fillRect/>
+          </a:stretch>
+        </p:blipFill>
+        <p:spPr>
+          <a:xfrm>
+            <a:off x="9985248" y="6382512"/>
+            <a:ext cx="960120" cy="416755"/>
+          </a:xfrm>
+          <a:prstGeom prst="rect">
+            <a:avLst/>
+          </a:prstGeom>
+        </p:spPr>
+      </p:pic>
     </p:spTree>
   </p:cSld>
   <p:clrMapOvr>
@@ -17144,6 +17408,30 @@
           </a:p>
         </p:txBody>
       </p:sp>
+      <p:pic>
+        <p:nvPicPr>
+          <p:cNvPr id="16" name="Picture 15" descr="softtech-logo.png"/>
+          <p:cNvPicPr>
+            <a:picLocks noChangeAspect="1"/>
+          </p:cNvPicPr>
+          <p:nvPr/>
+        </p:nvPicPr>
+        <p:blipFill>
+          <a:blip r:embed="rId3"/>
+          <a:stretch>
+            <a:fillRect/>
+          </a:stretch>
+        </p:blipFill>
+        <p:spPr>
+          <a:xfrm>
+            <a:off x="9985248" y="6382512"/>
+            <a:ext cx="960120" cy="416755"/>
+          </a:xfrm>
+          <a:prstGeom prst="rect">
+            <a:avLst/>
+          </a:prstGeom>
+        </p:spPr>
+      </p:pic>
     </p:spTree>
   </p:cSld>
   <p:clrMapOvr>
@@ -18123,6 +18411,30 @@
           </a:p>
         </p:txBody>
       </p:sp>
+      <p:pic>
+        <p:nvPicPr>
+          <p:cNvPr id="26" name="Picture 25" descr="softtech-logo.png"/>
+          <p:cNvPicPr>
+            <a:picLocks noChangeAspect="1"/>
+          </p:cNvPicPr>
+          <p:nvPr/>
+        </p:nvPicPr>
+        <p:blipFill>
+          <a:blip r:embed="rId2"/>
+          <a:stretch>
+            <a:fillRect/>
+          </a:stretch>
+        </p:blipFill>
+        <p:spPr>
+          <a:xfrm>
+            <a:off x="9985248" y="6382512"/>
+            <a:ext cx="960120" cy="416755"/>
+          </a:xfrm>
+          <a:prstGeom prst="rect">
+            <a:avLst/>
+          </a:prstGeom>
+        </p:spPr>
+      </p:pic>
     </p:spTree>
   </p:cSld>
   <p:clrMapOvr>
@@ -18764,6 +19076,30 @@
           </a:p>
         </p:txBody>
       </p:sp>
+      <p:pic>
+        <p:nvPicPr>
+          <p:cNvPr id="7" name="Picture 6" descr="softtech-logo.png"/>
+          <p:cNvPicPr>
+            <a:picLocks noChangeAspect="1"/>
+          </p:cNvPicPr>
+          <p:nvPr/>
+        </p:nvPicPr>
+        <p:blipFill>
+          <a:blip r:embed="rId2"/>
+          <a:stretch>
+            <a:fillRect/>
+          </a:stretch>
+        </p:blipFill>
+        <p:spPr>
+          <a:xfrm>
+            <a:off x="9985248" y="6382512"/>
+            <a:ext cx="960120" cy="416755"/>
+          </a:xfrm>
+          <a:prstGeom prst="rect">
+            <a:avLst/>
+          </a:prstGeom>
+        </p:spPr>
+      </p:pic>
     </p:spTree>
   </p:cSld>
   <p:clrMapOvr>
@@ -19526,6 +19862,30 @@
           </a:p>
         </p:txBody>
       </p:sp>
+      <p:pic>
+        <p:nvPicPr>
+          <p:cNvPr id="20" name="Picture 19" descr="softtech-logo.png"/>
+          <p:cNvPicPr>
+            <a:picLocks noChangeAspect="1"/>
+          </p:cNvPicPr>
+          <p:nvPr/>
+        </p:nvPicPr>
+        <p:blipFill>
+          <a:blip r:embed="rId2"/>
+          <a:stretch>
+            <a:fillRect/>
+          </a:stretch>
+        </p:blipFill>
+        <p:spPr>
+          <a:xfrm>
+            <a:off x="9985248" y="6382512"/>
+            <a:ext cx="960120" cy="416755"/>
+          </a:xfrm>
+          <a:prstGeom prst="rect">
+            <a:avLst/>
+          </a:prstGeom>
+        </p:spPr>
+      </p:pic>
     </p:spTree>
   </p:cSld>
   <p:clrMapOvr>
@@ -19677,7 +20037,7 @@
         <p:spPr>
           <a:xfrm>
             <a:off x="621792" y="1664208"/>
-            <a:ext cx="10972800" cy="4507992"/>
+            <a:ext cx="10972800" cy="4315968"/>
           </a:xfrm>
           <a:prstGeom prst="rect">
             <a:avLst/>
@@ -19692,8 +20052,8 @@
         </p:nvSpPr>
         <p:spPr>
           <a:xfrm>
-            <a:off x="685800" y="6263640"/>
-            <a:ext cx="10972800" cy="256032"/>
+            <a:off x="685800" y="6071616"/>
+            <a:ext cx="9235440" cy="402336"/>
           </a:xfrm>
           <a:prstGeom prst="rect">
             <a:avLst/>
@@ -19720,6 +20080,30 @@
           </a:p>
         </p:txBody>
       </p:sp>
+      <p:pic>
+        <p:nvPicPr>
+          <p:cNvPr id="7" name="Picture 6" descr="softtech-logo.png"/>
+          <p:cNvPicPr>
+            <a:picLocks noChangeAspect="1"/>
+          </p:cNvPicPr>
+          <p:nvPr/>
+        </p:nvPicPr>
+        <p:blipFill>
+          <a:blip r:embed="rId3"/>
+          <a:stretch>
+            <a:fillRect/>
+          </a:stretch>
+        </p:blipFill>
+        <p:spPr>
+          <a:xfrm>
+            <a:off x="9985248" y="6382512"/>
+            <a:ext cx="960120" cy="416755"/>
+          </a:xfrm>
+          <a:prstGeom prst="rect">
+            <a:avLst/>
+          </a:prstGeom>
+        </p:spPr>
+      </p:pic>
     </p:spTree>
   </p:cSld>
   <p:clrMapOvr>
@@ -19871,7 +20255,7 @@
         <p:spPr>
           <a:xfrm>
             <a:off x="621792" y="1664208"/>
-            <a:ext cx="10972800" cy="4507992"/>
+            <a:ext cx="10972800" cy="4315968"/>
           </a:xfrm>
           <a:prstGeom prst="rect">
             <a:avLst/>
@@ -19886,8 +20270,8 @@
         </p:nvSpPr>
         <p:spPr>
           <a:xfrm>
-            <a:off x="685800" y="6263640"/>
-            <a:ext cx="10972800" cy="256032"/>
+            <a:off x="685800" y="6071616"/>
+            <a:ext cx="9235440" cy="402336"/>
           </a:xfrm>
           <a:prstGeom prst="rect">
             <a:avLst/>
@@ -19914,6 +20298,30 @@
           </a:p>
         </p:txBody>
       </p:sp>
+      <p:pic>
+        <p:nvPicPr>
+          <p:cNvPr id="7" name="Picture 6" descr="softtech-logo.png"/>
+          <p:cNvPicPr>
+            <a:picLocks noChangeAspect="1"/>
+          </p:cNvPicPr>
+          <p:nvPr/>
+        </p:nvPicPr>
+        <p:blipFill>
+          <a:blip r:embed="rId3"/>
+          <a:stretch>
+            <a:fillRect/>
+          </a:stretch>
+        </p:blipFill>
+        <p:spPr>
+          <a:xfrm>
+            <a:off x="9985248" y="6382512"/>
+            <a:ext cx="960120" cy="416755"/>
+          </a:xfrm>
+          <a:prstGeom prst="rect">
+            <a:avLst/>
+          </a:prstGeom>
+        </p:spPr>
+      </p:pic>
     </p:spTree>
   </p:cSld>
   <p:clrMapOvr>
@@ -20065,7 +20473,7 @@
         <p:spPr>
           <a:xfrm>
             <a:off x="621792" y="1664208"/>
-            <a:ext cx="10972800" cy="4507992"/>
+            <a:ext cx="10972800" cy="4315968"/>
           </a:xfrm>
           <a:prstGeom prst="rect">
             <a:avLst/>
@@ -20080,8 +20488,8 @@
         </p:nvSpPr>
         <p:spPr>
           <a:xfrm>
-            <a:off x="685800" y="6263640"/>
-            <a:ext cx="10972800" cy="256032"/>
+            <a:off x="685800" y="6071616"/>
+            <a:ext cx="9235440" cy="402336"/>
           </a:xfrm>
           <a:prstGeom prst="rect">
             <a:avLst/>
@@ -20108,6 +20516,30 @@
           </a:p>
         </p:txBody>
       </p:sp>
+      <p:pic>
+        <p:nvPicPr>
+          <p:cNvPr id="7" name="Picture 6" descr="softtech-logo.png"/>
+          <p:cNvPicPr>
+            <a:picLocks noChangeAspect="1"/>
+          </p:cNvPicPr>
+          <p:nvPr/>
+        </p:nvPicPr>
+        <p:blipFill>
+          <a:blip r:embed="rId3"/>
+          <a:stretch>
+            <a:fillRect/>
+          </a:stretch>
+        </p:blipFill>
+        <p:spPr>
+          <a:xfrm>
+            <a:off x="9985248" y="6382512"/>
+            <a:ext cx="960120" cy="416755"/>
+          </a:xfrm>
+          <a:prstGeom prst="rect">
+            <a:avLst/>
+          </a:prstGeom>
+        </p:spPr>
+      </p:pic>
     </p:spTree>
   </p:cSld>
   <p:clrMapOvr>
@@ -20259,7 +20691,7 @@
         <p:spPr>
           <a:xfrm>
             <a:off x="621792" y="1664208"/>
-            <a:ext cx="10972800" cy="4507992"/>
+            <a:ext cx="10972800" cy="4315968"/>
           </a:xfrm>
           <a:prstGeom prst="rect">
             <a:avLst/>
@@ -20274,8 +20706,8 @@
         </p:nvSpPr>
         <p:spPr>
           <a:xfrm>
-            <a:off x="685800" y="6263640"/>
-            <a:ext cx="10972800" cy="256032"/>
+            <a:off x="685800" y="6071616"/>
+            <a:ext cx="9235440" cy="402336"/>
           </a:xfrm>
           <a:prstGeom prst="rect">
             <a:avLst/>
@@ -20298,6 +20730,66 @@
             </a:pPr>
             <a:r>
               <a:t>Gerçek PR ekran görüntüsü mevcut değildir; bu görsel yerel mock provayı açıkça etiketler.</a:t>
+            </a:r>
+          </a:p>
+        </p:txBody>
+      </p:sp>
+      <p:pic>
+        <p:nvPicPr>
+          <p:cNvPr id="7" name="Picture 6" descr="softtech-logo.png"/>
+          <p:cNvPicPr>
+            <a:picLocks noChangeAspect="1"/>
+          </p:cNvPicPr>
+          <p:nvPr/>
+        </p:nvPicPr>
+        <p:blipFill>
+          <a:blip r:embed="rId3"/>
+          <a:stretch>
+            <a:fillRect/>
+          </a:stretch>
+        </p:blipFill>
+        <p:spPr>
+          <a:xfrm>
+            <a:off x="9985248" y="6382512"/>
+            <a:ext cx="960120" cy="416755"/>
+          </a:xfrm>
+          <a:prstGeom prst="rect">
+            <a:avLst/>
+          </a:prstGeom>
+        </p:spPr>
+      </p:pic>
+      <p:sp>
+        <p:nvSpPr>
+          <p:cNvPr id="8" name="TextBox 7"/>
+          <p:cNvSpPr txBox="1"/>
+          <p:nvPr/>
+        </p:nvSpPr>
+        <p:spPr>
+          <a:xfrm>
+            <a:off x="685800" y="5742432"/>
+            <a:ext cx="9052560" cy="274320"/>
+          </a:xfrm>
+          <a:prstGeom prst="rect">
+            <a:avLst/>
+          </a:prstGeom>
+          <a:noFill/>
+        </p:spPr>
+        <p:txBody>
+          <a:bodyPr wrap="square" lIns="73152" rIns="73152" tIns="36576" bIns="27432" anchor="ctr">
+            <a:spAutoFit/>
+          </a:bodyPr>
+          <a:lstStyle/>
+          <a:p>
+            <a:pPr>
+              <a:defRPr sz="900" b="0">
+                <a:solidFill>
+                  <a:srgbClr val="637389"/>
+                </a:solidFill>
+                <a:latin typeface="Aptos"/>
+              </a:defRPr>
+            </a:pPr>
+            <a:r>
+              <a:t>Softtech logosu görsel amaçlıdır; kurumsal onay veya iş birliği beyanı değildir.</a:t>
             </a:r>
           </a:p>
         </p:txBody>
@@ -22622,6 +23114,30 @@
           </a:p>
         </p:txBody>
       </p:sp>
+      <p:pic>
+        <p:nvPicPr>
+          <p:cNvPr id="57" name="Picture 56" descr="softtech-logo.png"/>
+          <p:cNvPicPr>
+            <a:picLocks noChangeAspect="1"/>
+          </p:cNvPicPr>
+          <p:nvPr/>
+        </p:nvPicPr>
+        <p:blipFill>
+          <a:blip r:embed="rId3"/>
+          <a:stretch>
+            <a:fillRect/>
+          </a:stretch>
+        </p:blipFill>
+        <p:spPr>
+          <a:xfrm>
+            <a:off x="9985248" y="6382512"/>
+            <a:ext cx="960120" cy="416755"/>
+          </a:xfrm>
+          <a:prstGeom prst="rect">
+            <a:avLst/>
+          </a:prstGeom>
+        </p:spPr>
+      </p:pic>
     </p:spTree>
   </p:cSld>
   <p:clrMapOvr>
@@ -23474,6 +23990,30 @@
           </a:p>
         </p:txBody>
       </p:sp>
+      <p:pic>
+        <p:nvPicPr>
+          <p:cNvPr id="18" name="Picture 17" descr="softtech-logo.png"/>
+          <p:cNvPicPr>
+            <a:picLocks noChangeAspect="1"/>
+          </p:cNvPicPr>
+          <p:nvPr/>
+        </p:nvPicPr>
+        <p:blipFill>
+          <a:blip r:embed="rId3"/>
+          <a:stretch>
+            <a:fillRect/>
+          </a:stretch>
+        </p:blipFill>
+        <p:spPr>
+          <a:xfrm>
+            <a:off x="9985248" y="6382512"/>
+            <a:ext cx="960120" cy="416755"/>
+          </a:xfrm>
+          <a:prstGeom prst="rect">
+            <a:avLst/>
+          </a:prstGeom>
+        </p:spPr>
+      </p:pic>
     </p:spTree>
   </p:cSld>
   <p:clrMapOvr>
@@ -24278,6 +24818,30 @@
           </a:p>
         </p:txBody>
       </p:sp>
+      <p:pic>
+        <p:nvPicPr>
+          <p:cNvPr id="18" name="Picture 17" descr="softtech-logo.png"/>
+          <p:cNvPicPr>
+            <a:picLocks noChangeAspect="1"/>
+          </p:cNvPicPr>
+          <p:nvPr/>
+        </p:nvPicPr>
+        <p:blipFill>
+          <a:blip r:embed="rId3"/>
+          <a:stretch>
+            <a:fillRect/>
+          </a:stretch>
+        </p:blipFill>
+        <p:spPr>
+          <a:xfrm>
+            <a:off x="9985248" y="6382512"/>
+            <a:ext cx="960120" cy="416755"/>
+          </a:xfrm>
+          <a:prstGeom prst="rect">
+            <a:avLst/>
+          </a:prstGeom>
+        </p:spPr>
+      </p:pic>
     </p:spTree>
   </p:cSld>
   <p:clrMapOvr>
@@ -25755,6 +26319,30 @@
           </a:p>
         </p:txBody>
       </p:sp>
+      <p:pic>
+        <p:nvPicPr>
+          <p:cNvPr id="30" name="Picture 29" descr="softtech-logo.png"/>
+          <p:cNvPicPr>
+            <a:picLocks noChangeAspect="1"/>
+          </p:cNvPicPr>
+          <p:nvPr/>
+        </p:nvPicPr>
+        <p:blipFill>
+          <a:blip r:embed="rId3"/>
+          <a:stretch>
+            <a:fillRect/>
+          </a:stretch>
+        </p:blipFill>
+        <p:spPr>
+          <a:xfrm>
+            <a:off x="9985248" y="6382512"/>
+            <a:ext cx="960120" cy="416755"/>
+          </a:xfrm>
+          <a:prstGeom prst="rect">
+            <a:avLst/>
+          </a:prstGeom>
+        </p:spPr>
+      </p:pic>
     </p:spTree>
   </p:cSld>
   <p:clrMapOvr>
@@ -27123,6 +27711,30 @@
           </a:p>
         </p:txBody>
       </p:sp>
+      <p:pic>
+        <p:nvPicPr>
+          <p:cNvPr id="28" name="Picture 27" descr="softtech-logo.png"/>
+          <p:cNvPicPr>
+            <a:picLocks noChangeAspect="1"/>
+          </p:cNvPicPr>
+          <p:nvPr/>
+        </p:nvPicPr>
+        <p:blipFill>
+          <a:blip r:embed="rId3"/>
+          <a:stretch>
+            <a:fillRect/>
+          </a:stretch>
+        </p:blipFill>
+        <p:spPr>
+          <a:xfrm>
+            <a:off x="9985248" y="6382512"/>
+            <a:ext cx="960120" cy="416755"/>
+          </a:xfrm>
+          <a:prstGeom prst="rect">
+            <a:avLst/>
+          </a:prstGeom>
+        </p:spPr>
+      </p:pic>
     </p:spTree>
   </p:cSld>
   <p:clrMapOvr>
@@ -28475,6 +29087,30 @@
           </a:p>
         </p:txBody>
       </p:sp>
+      <p:pic>
+        <p:nvPicPr>
+          <p:cNvPr id="28" name="Picture 27" descr="softtech-logo.png"/>
+          <p:cNvPicPr>
+            <a:picLocks noChangeAspect="1"/>
+          </p:cNvPicPr>
+          <p:nvPr/>
+        </p:nvPicPr>
+        <p:blipFill>
+          <a:blip r:embed="rId3"/>
+          <a:stretch>
+            <a:fillRect/>
+          </a:stretch>
+        </p:blipFill>
+        <p:spPr>
+          <a:xfrm>
+            <a:off x="9985248" y="6382512"/>
+            <a:ext cx="960120" cy="416755"/>
+          </a:xfrm>
+          <a:prstGeom prst="rect">
+            <a:avLst/>
+          </a:prstGeom>
+        </p:spPr>
+      </p:pic>
     </p:spTree>
   </p:cSld>
   <p:clrMapOvr>
@@ -29859,6 +30495,30 @@
           </a:p>
         </p:txBody>
       </p:sp>
+      <p:pic>
+        <p:nvPicPr>
+          <p:cNvPr id="28" name="Picture 27" descr="softtech-logo.png"/>
+          <p:cNvPicPr>
+            <a:picLocks noChangeAspect="1"/>
+          </p:cNvPicPr>
+          <p:nvPr/>
+        </p:nvPicPr>
+        <p:blipFill>
+          <a:blip r:embed="rId3"/>
+          <a:stretch>
+            <a:fillRect/>
+          </a:stretch>
+        </p:blipFill>
+        <p:spPr>
+          <a:xfrm>
+            <a:off x="9985248" y="6382512"/>
+            <a:ext cx="960120" cy="416755"/>
+          </a:xfrm>
+          <a:prstGeom prst="rect">
+            <a:avLst/>
+          </a:prstGeom>
+        </p:spPr>
+      </p:pic>
     </p:spTree>
   </p:cSld>
   <p:clrMapOvr>

--- a/docs/MevzuAI_Sunum_Guncel.pptx
+++ b/docs/MevzuAI_Sunum_Guncel.pptx
@@ -6053,7 +6053,7 @@
       </p:sp>
       <p:pic>
         <p:nvPicPr>
-          <p:cNvPr id="53" name="Picture 52" descr="softtech-logo.png"/>
+          <p:cNvPr id="53" name="Picture 52" descr="softtech-logo-light-background.png"/>
           <p:cNvPicPr>
             <a:picLocks noChangeAspect="1"/>
           </p:cNvPicPr>
@@ -7336,7 +7336,7 @@
       </p:sp>
       <p:pic>
         <p:nvPicPr>
-          <p:cNvPr id="26" name="Picture 25" descr="softtech-logo.png"/>
+          <p:cNvPr id="26" name="Picture 25" descr="softtech-logo-light-background.png"/>
           <p:cNvPicPr>
             <a:picLocks noChangeAspect="1"/>
           </p:cNvPicPr>
@@ -8420,7 +8420,7 @@
       </p:sp>
       <p:pic>
         <p:nvPicPr>
-          <p:cNvPr id="26" name="Picture 25" descr="softtech-logo.png"/>
+          <p:cNvPr id="26" name="Picture 25" descr="softtech-logo-light-background.png"/>
           <p:cNvPicPr>
             <a:picLocks noChangeAspect="1"/>
           </p:cNvPicPr>
@@ -9719,7 +9719,7 @@
       </p:sp>
       <p:pic>
         <p:nvPicPr>
-          <p:cNvPr id="26" name="Picture 25" descr="softtech-logo.png"/>
+          <p:cNvPr id="26" name="Picture 25" descr="softtech-logo-light-background.png"/>
           <p:cNvPicPr>
             <a:picLocks noChangeAspect="1"/>
           </p:cNvPicPr>
@@ -10716,7 +10716,7 @@
       </p:sp>
       <p:pic>
         <p:nvPicPr>
-          <p:cNvPr id="25" name="Picture 24" descr="softtech-logo.png"/>
+          <p:cNvPr id="25" name="Picture 24" descr="softtech-logo-light-background.png"/>
           <p:cNvPicPr>
             <a:picLocks noChangeAspect="1"/>
           </p:cNvPicPr>
@@ -11284,7 +11284,7 @@
       </p:sp>
       <p:pic>
         <p:nvPicPr>
-          <p:cNvPr id="15" name="Picture 14" descr="softtech-logo.png"/>
+          <p:cNvPr id="15" name="Picture 14" descr="softtech-logo-light-background.png"/>
           <p:cNvPicPr>
             <a:picLocks noChangeAspect="1"/>
           </p:cNvPicPr>
@@ -12483,7 +12483,7 @@
       </p:sp>
       <p:pic>
         <p:nvPicPr>
-          <p:cNvPr id="28" name="Picture 27" descr="softtech-logo.png"/>
+          <p:cNvPr id="28" name="Picture 27" descr="softtech-logo-light-background.png"/>
           <p:cNvPicPr>
             <a:picLocks noChangeAspect="1"/>
           </p:cNvPicPr>
@@ -15453,7 +15453,7 @@
       </p:sp>
       <p:pic>
         <p:nvPicPr>
-          <p:cNvPr id="77" name="Picture 76" descr="softtech-logo.png"/>
+          <p:cNvPr id="77" name="Picture 76" descr="softtech-logo-light-background.png"/>
           <p:cNvPicPr>
             <a:picLocks noChangeAspect="1"/>
           </p:cNvPicPr>
@@ -16236,7 +16236,7 @@
       </p:sp>
       <p:pic>
         <p:nvPicPr>
-          <p:cNvPr id="20" name="Picture 19" descr="softtech-logo.png"/>
+          <p:cNvPr id="20" name="Picture 19" descr="softtech-logo-light-background.png"/>
           <p:cNvPicPr>
             <a:picLocks noChangeAspect="1"/>
           </p:cNvPicPr>
@@ -16667,7 +16667,7 @@
       </p:sp>
       <p:pic>
         <p:nvPicPr>
-          <p:cNvPr id="10" name="Picture 9" descr="softtech-logo.png"/>
+          <p:cNvPr id="10" name="Picture 9" descr="softtech-logo-light-background.png"/>
           <p:cNvPicPr>
             <a:picLocks noChangeAspect="1"/>
           </p:cNvPicPr>
@@ -17410,7 +17410,7 @@
       </p:sp>
       <p:pic>
         <p:nvPicPr>
-          <p:cNvPr id="16" name="Picture 15" descr="softtech-logo.png"/>
+          <p:cNvPr id="16" name="Picture 15" descr="softtech-logo-light-background.png"/>
           <p:cNvPicPr>
             <a:picLocks noChangeAspect="1"/>
           </p:cNvPicPr>
@@ -18413,7 +18413,7 @@
       </p:sp>
       <p:pic>
         <p:nvPicPr>
-          <p:cNvPr id="26" name="Picture 25" descr="softtech-logo.png"/>
+          <p:cNvPr id="26" name="Picture 25" descr="softtech-logo-light-background.png"/>
           <p:cNvPicPr>
             <a:picLocks noChangeAspect="1"/>
           </p:cNvPicPr>
@@ -19078,7 +19078,7 @@
       </p:sp>
       <p:pic>
         <p:nvPicPr>
-          <p:cNvPr id="7" name="Picture 6" descr="softtech-logo.png"/>
+          <p:cNvPr id="7" name="Picture 6" descr="softtech-logo-light-background.png"/>
           <p:cNvPicPr>
             <a:picLocks noChangeAspect="1"/>
           </p:cNvPicPr>
@@ -19864,7 +19864,7 @@
       </p:sp>
       <p:pic>
         <p:nvPicPr>
-          <p:cNvPr id="20" name="Picture 19" descr="softtech-logo.png"/>
+          <p:cNvPr id="20" name="Picture 19" descr="softtech-logo-light-background.png"/>
           <p:cNvPicPr>
             <a:picLocks noChangeAspect="1"/>
           </p:cNvPicPr>
@@ -20082,7 +20082,7 @@
       </p:sp>
       <p:pic>
         <p:nvPicPr>
-          <p:cNvPr id="7" name="Picture 6" descr="softtech-logo.png"/>
+          <p:cNvPr id="7" name="Picture 6" descr="softtech-logo-light-background.png"/>
           <p:cNvPicPr>
             <a:picLocks noChangeAspect="1"/>
           </p:cNvPicPr>
@@ -20300,7 +20300,7 @@
       </p:sp>
       <p:pic>
         <p:nvPicPr>
-          <p:cNvPr id="7" name="Picture 6" descr="softtech-logo.png"/>
+          <p:cNvPr id="7" name="Picture 6" descr="softtech-logo-light-background.png"/>
           <p:cNvPicPr>
             <a:picLocks noChangeAspect="1"/>
           </p:cNvPicPr>
@@ -20518,7 +20518,7 @@
       </p:sp>
       <p:pic>
         <p:nvPicPr>
-          <p:cNvPr id="7" name="Picture 6" descr="softtech-logo.png"/>
+          <p:cNvPr id="7" name="Picture 6" descr="softtech-logo-light-background.png"/>
           <p:cNvPicPr>
             <a:picLocks noChangeAspect="1"/>
           </p:cNvPicPr>
@@ -20736,7 +20736,7 @@
       </p:sp>
       <p:pic>
         <p:nvPicPr>
-          <p:cNvPr id="7" name="Picture 6" descr="softtech-logo.png"/>
+          <p:cNvPr id="7" name="Picture 6" descr="softtech-logo-light-background.png"/>
           <p:cNvPicPr>
             <a:picLocks noChangeAspect="1"/>
           </p:cNvPicPr>
@@ -23116,7 +23116,7 @@
       </p:sp>
       <p:pic>
         <p:nvPicPr>
-          <p:cNvPr id="57" name="Picture 56" descr="softtech-logo.png"/>
+          <p:cNvPr id="57" name="Picture 56" descr="softtech-logo-light-background.png"/>
           <p:cNvPicPr>
             <a:picLocks noChangeAspect="1"/>
           </p:cNvPicPr>
@@ -23992,7 +23992,7 @@
       </p:sp>
       <p:pic>
         <p:nvPicPr>
-          <p:cNvPr id="18" name="Picture 17" descr="softtech-logo.png"/>
+          <p:cNvPr id="18" name="Picture 17" descr="softtech-logo-light-background.png"/>
           <p:cNvPicPr>
             <a:picLocks noChangeAspect="1"/>
           </p:cNvPicPr>
@@ -24820,7 +24820,7 @@
       </p:sp>
       <p:pic>
         <p:nvPicPr>
-          <p:cNvPr id="18" name="Picture 17" descr="softtech-logo.png"/>
+          <p:cNvPr id="18" name="Picture 17" descr="softtech-logo-light-background.png"/>
           <p:cNvPicPr>
             <a:picLocks noChangeAspect="1"/>
           </p:cNvPicPr>
@@ -26321,7 +26321,7 @@
       </p:sp>
       <p:pic>
         <p:nvPicPr>
-          <p:cNvPr id="30" name="Picture 29" descr="softtech-logo.png"/>
+          <p:cNvPr id="30" name="Picture 29" descr="softtech-logo-light-background.png"/>
           <p:cNvPicPr>
             <a:picLocks noChangeAspect="1"/>
           </p:cNvPicPr>
@@ -27713,7 +27713,7 @@
       </p:sp>
       <p:pic>
         <p:nvPicPr>
-          <p:cNvPr id="28" name="Picture 27" descr="softtech-logo.png"/>
+          <p:cNvPr id="28" name="Picture 27" descr="softtech-logo-light-background.png"/>
           <p:cNvPicPr>
             <a:picLocks noChangeAspect="1"/>
           </p:cNvPicPr>
@@ -29089,7 +29089,7 @@
       </p:sp>
       <p:pic>
         <p:nvPicPr>
-          <p:cNvPr id="28" name="Picture 27" descr="softtech-logo.png"/>
+          <p:cNvPr id="28" name="Picture 27" descr="softtech-logo-light-background.png"/>
           <p:cNvPicPr>
             <a:picLocks noChangeAspect="1"/>
           </p:cNvPicPr>
@@ -30497,7 +30497,7 @@
       </p:sp>
       <p:pic>
         <p:nvPicPr>
-          <p:cNvPr id="28" name="Picture 27" descr="softtech-logo.png"/>
+          <p:cNvPr id="28" name="Picture 27" descr="softtech-logo-light-background.png"/>
           <p:cNvPicPr>
             <a:picLocks noChangeAspect="1"/>
           </p:cNvPicPr>

--- a/docs/MevzuAI_Sunum_Guncel.pptx
+++ b/docs/MevzuAI_Sunum_Guncel.pptx
@@ -31,6 +31,11 @@
     <p:sldId id="279" r:id="rId30"/>
     <p:sldId id="280" r:id="rId31"/>
     <p:sldId id="281" r:id="rId32"/>
+    <p:sldId id="282" r:id="rId33"/>
+    <p:sldId id="283" r:id="rId34"/>
+    <p:sldId id="284" r:id="rId35"/>
+    <p:sldId id="285" r:id="rId36"/>
+    <p:sldId id="286" r:id="rId37"/>
   </p:sldIdLst>
   <p:sldSz cx="12192119" cy="6858000" type="screen4x3"/>
   <p:notesSz cx="6858000" cy="9144000"/>
@@ -3394,7 +3399,7 @@
                 </a:solidFill>
                 <a:latin typeface="Segoe UI"/>
               </a:rPr>
-              <a:t>Analizinizi kanıta dayandıran iş analisti ajanı</a:t>
+              <a:t>Kartlı ödeme sistemleri için mevzuat uyumu ve kod tarama ajanı</a:t>
             </a:r>
           </a:p>
         </p:txBody>
@@ -3448,7 +3453,7 @@
                   <a:srgbClr val="FFFFFF"/>
                 </a:solidFill>
               </a:rPr>
-              <a:t>Repo Risk Raporu</a:t>
+              <a:t>Mevzuat RAG</a:t>
             </a:r>
           </a:p>
         </p:txBody>
@@ -3502,7 +3507,7 @@
                   <a:srgbClr val="FFFFFF"/>
                 </a:solidFill>
               </a:rPr>
-              <a:t>Bülten Etki Analizi</a:t>
+              <a:t>Ödeme Kodu Tarama</a:t>
             </a:r>
           </a:p>
         </p:txBody>
@@ -3556,7 +3561,7 @@
                   <a:srgbClr val="FFFFFF"/>
                 </a:solidFill>
               </a:rPr>
-              <a:t>Mevzuat Uyum Analizi</a:t>
+              <a:t>Kanıtlı Rapor</a:t>
             </a:r>
           </a:p>
         </p:txBody>
@@ -3610,7 +3615,7 @@
                   <a:srgbClr val="FFFFFF"/>
                 </a:solidFill>
               </a:rPr>
-              <a:t>İş-Kod-Çözüm Analizi</a:t>
+              <a:t>Onaylı Düzeltme</a:t>
             </a:r>
           </a:p>
         </p:txBody>
@@ -3695,7 +3700,7 @@
                 </a:solidFill>
                 <a:latin typeface="Segoe UI"/>
               </a:rPr>
-              <a:t>+ Bulgu Düzeltme: analiz sonlarında önerilen seçenek; daha önce üretilmiş raporlardan da çalışır.</a:t>
+              <a:t>+ Remediation: en fazla iki öncelikli bulgu; izole worktree, ayrı test ve PR onayları.</a:t>
             </a:r>
           </a:p>
         </p:txBody>
@@ -3750,7 +3755,7 @@
                 </a:solidFill>
                 <a:latin typeface="Segoe UI"/>
               </a:rPr>
-              <a:t>Hassas veriler (kart numarası, şifre, token) rapora yazılmadan otomatik gizlenir.</a:t>
+              <a:t>Gerçek kart verisi kullanmayın; otomatik maskeleme garantisi yoktur.</a:t>
             </a:r>
           </a:p>
           <a:p>
@@ -3766,7 +3771,7 @@
                 </a:solidFill>
                 <a:latin typeface="Segoe UI"/>
               </a:rPr>
-              <a:t>Kararlar sizin: ajan her adımda sorar, onaysız işlem yapmaz  ·  v25.10.2026</a:t>
+              <a:t>Kararlar sizin: ajan her adımda sorar, onaysız işlem yapmaz  ·  v29.10.2026</a:t>
             </a:r>
           </a:p>
         </p:txBody>
@@ -6493,7 +6498,7 @@
                 </a:solidFill>
                 <a:latin typeface="Segoe UI"/>
               </a:rPr>
-              <a:t>1) Raporu verirsiniz — az önce üretilmiş olsun ya da haftalar önce kaydedilmiş olsun; fark etmez, kaynak rapor dosyasıdır.</a:t>
+              <a:t>1) Tarama raporundaki kanıtlı bulgular listelenir; en yüksek öncelikli en fazla iki bulgu seçilir.</a:t>
             </a:r>
           </a:p>
           <a:p>
@@ -6509,7 +6514,7 @@
                 </a:solidFill>
                 <a:latin typeface="Segoe UI"/>
               </a:rPr>
-              <a:t>2) Ajan kanıtlı bulguları sıralar; 'kaç tanesini düzeltelim?' diye sorar (önerilen: en kritik 5).</a:t>
+              <a:t>2) Kanıt ve öneri gösterilir; kullanıcı kod değişikliğinin uygulanmasını ayrıca onaylar.</a:t>
             </a:r>
           </a:p>
           <a:p>
@@ -6525,7 +6530,7 @@
                 </a:solidFill>
                 <a:latin typeface="Segoe UI"/>
               </a:rPr>
-              <a:t>3) Her bulgu için bugünkü kod okunur, düzeltme tasarlanır, fark raporu hazırlanır: öncesi/sonrası ve satır farkı.</a:t>
+              <a:t>3) Onaylı değişiklikler kaynak daldan ayrı bir Git worktree/branch içinde uygulanır.</a:t>
             </a:r>
           </a:p>
           <a:p>
@@ -6541,7 +6546,7 @@
                 </a:solidFill>
                 <a:latin typeface="Segoe UI"/>
               </a:rPr>
-              <a:t>4) Fark raporunu görürsünüz; 'Pull Request açmayı onaylıyor musunuz?' sorusuna 'evet' demeden hiçbir kod alanına yazılmaz.</a:t>
+              <a:t>4) Test çalıştırmak için yeniden onay alınır; test çıktısı ayrı Markdown ve HTML raporlanır.</a:t>
             </a:r>
           </a:p>
         </p:txBody>
@@ -6709,7 +6714,7 @@
                 </a:solidFill>
                 <a:latin typeface="Segoe UI"/>
               </a:rPr>
-              <a:t>Onayla: düzeltmeler ayrı bir düzeltme dalına uygulanır → kayıt → gönderim → Pull Request; adresi size bildirilir.</a:t>
+              <a:t>Test başarılıysa diff ve test sonucu sunulur; kullanıcı son onayı verirse GitHub PR oluşturulur.</a:t>
             </a:r>
           </a:p>
           <a:p>
@@ -6725,7 +6730,7 @@
                 </a:solidFill>
                 <a:latin typeface="Segoe UI"/>
               </a:rPr>
-              <a:t>Onaysız: ajan yalnız prova yapar — koda dokunulmaz.</a:t>
+              <a:t>Kaynak dal değiştirilmez; otomatik commit, merge veya zorla-gönderim yapılmaz.</a:t>
             </a:r>
           </a:p>
           <a:p>
@@ -6741,7 +6746,7 @@
                 </a:solidFill>
                 <a:latin typeface="Segoe UI"/>
               </a:rPr>
-              <a:t>'Aynı bulgulara ikinci PR' engellenir: açılan her PR kayda geçer.</a:t>
+              <a:t>Değişiklik dosyaları seçilen öncelikli bulgularla eşleşmelidir; kaynak repo temiz olmalıdır.</a:t>
             </a:r>
           </a:p>
           <a:p>
@@ -6757,7 +6762,7 @@
                 </a:solidFill>
                 <a:latin typeface="Segoe UI"/>
               </a:rPr>
-              <a:t>Sınırlar: ana dala doğrudan yazma yok, zorla-gönderim yok, birleştirme yok.</a:t>
+              <a:t>Test başarısız veya zaman aşımına uğrarsa PR akışı başarılı sayılmaz.</a:t>
             </a:r>
           </a:p>
           <a:p>
@@ -6773,7 +6778,7 @@
                 </a:solidFill>
                 <a:latin typeface="Segoe UI"/>
               </a:rPr>
-              <a:t>Kanıtı olmayan bulgulara düzeltme üretilmez — 'elle düzeltme' listesine geçer.</a:t>
+              <a:t>PR için GitHub CLI (`gh`), yetki ve açık son kullanıcı onayı gerekir.</a:t>
             </a:r>
           </a:p>
           <a:p>
@@ -6789,7 +6794,7 @@
                 </a:solidFill>
                 <a:latin typeface="Segoe UI"/>
               </a:rPr>
-              <a:t>Mekanik güvence: kod yazma onayı betik içinde zorunludur — ajanın sözü değil, aracın kuralı.</a:t>
+              <a:t>Kod değişikliği, test ve PR ayrı onay kapılarıdır; biri diğerine izin vermez.</a:t>
             </a:r>
           </a:p>
         </p:txBody>
@@ -7002,7 +7007,7 @@
                   <a:srgbClr val="0F2A43"/>
                 </a:solidFill>
               </a:rPr>
-              <a:t>Bulgu sayısı</a:t>
+              <a:t>Bulgu seç</a:t>
             </a:r>
           </a:p>
         </p:txBody>
@@ -7111,7 +7116,7 @@
                   <a:srgbClr val="0F2A43"/>
                 </a:solidFill>
               </a:rPr>
-              <a:t>Fark raporu</a:t>
+              <a:t>Uygula onayı</a:t>
             </a:r>
           </a:p>
         </p:txBody>
@@ -7220,7 +7225,7 @@
                   <a:srgbClr val="0F2A43"/>
                 </a:solidFill>
               </a:rPr>
-              <a:t>PR onayı</a:t>
+              <a:t>Test onayı</a:t>
             </a:r>
           </a:p>
         </p:txBody>
@@ -7329,7 +7334,7 @@
                   <a:srgbClr val="0F2A43"/>
                 </a:solidFill>
               </a:rPr>
-              <a:t>Uygula + PR</a:t>
+              <a:t>PR onayı</a:t>
             </a:r>
           </a:p>
         </p:txBody>
@@ -8590,7 +8595,7 @@
                 </a:solidFill>
                 <a:latin typeface="Segoe UI"/>
               </a:rPr>
-              <a:t>Temiz Başlangıç — Sıfırla ve Yeniden Tara</a:t>
+              <a:t>Ayrı Onay Kapıları — Tarama, Remediation, Test, PR</a:t>
             </a:r>
           </a:p>
         </p:txBody>
@@ -8629,7 +8634,7 @@
                 </a:solidFill>
                 <a:latin typeface="Segoe UI"/>
               </a:rPr>
-              <a:t>Ortamı sıfırlamak işleri bozmaz; döngü güvenli ve ölçülüdür</a:t>
+              <a:t>Her adım ayrı onay ister; bir aşamadaki onay sonraki işlemlere aktarılmaz.</a:t>
             </a:r>
           </a:p>
         </p:txBody>
@@ -8821,7 +8826,7 @@
                 </a:solidFill>
                 <a:latin typeface="Segoe UI"/>
               </a:rPr>
-              <a:t>Sıfırlama akışı (plan → onay → çalıştırma)</a:t>
+              <a:t>Tarama ve düzeltme için onay akışı</a:t>
             </a:r>
           </a:p>
         </p:txBody>
@@ -8860,7 +8865,7 @@
                 </a:solidFill>
                 <a:latin typeface="Segoe UI"/>
               </a:rPr>
-              <a:t>1) 'Sıfırla' derseniz ajan ÖNCE neyin silineceğini listeler: doküman hafızası, raporlar, geçici kopyalar, kayıtlar — hiçbir şey silmez.</a:t>
+              <a:t>1) Tarama: depo, branch/commit, dosya sınırı, tahmin ve model kullanıcıya gösterilir.</a:t>
             </a:r>
           </a:p>
           <a:p>
@@ -8876,7 +8881,7 @@
                 </a:solidFill>
                 <a:latin typeface="Segoe UI"/>
               </a:rPr>
-              <a:t>2) Planı okursunuz; onayınız olmadan silme başlamaz.</a:t>
+              <a:t>2) Remediation: en fazla iki bulgu ve değişiklik diff'i kullanıcıya sunulur.</a:t>
             </a:r>
           </a:p>
           <a:p>
@@ -8892,7 +8897,7 @@
                 </a:solidFill>
                 <a:latin typeface="Segoe UI"/>
               </a:rPr>
-              <a:t>3) Onayla: ajanın ürettiği her şey temizlenir; kod deponuz, şablonlar, araçlar ve depo kayıtları korunur.</a:t>
+              <a:t>3) Kullanıcı kod yazma izni verirse değişiklik ayrı Git worktree/branch içinde uygulanır.</a:t>
             </a:r>
           </a:p>
           <a:p>
@@ -8908,7 +8913,7 @@
                 </a:solidFill>
                 <a:latin typeface="Segoe UI"/>
               </a:rPr>
-              <a:t>4) Ortam hazır — yeni tarama güncel koddan, sıfırdan yürür.</a:t>
+              <a:t>4) Test ve ardından GitHub PR için ayrı onay kapıları bulunur.</a:t>
             </a:r>
           </a:p>
           <a:p>
@@ -8940,7 +8945,7 @@
                 </a:solidFill>
                 <a:latin typeface="Segoe UI"/>
               </a:rPr>
-              <a:t>Son ölçüm: ~430 MB üretilmiş veri, 20 kalem, tek onayla temizlendi.</a:t>
+              <a:t>Onay reddedilirse adım durur; hata, başarısız test veya zaman aşımı gizlenmez.</a:t>
             </a:r>
           </a:p>
         </p:txBody>
@@ -9069,7 +9074,7 @@
                 </a:solidFill>
                 <a:latin typeface="Segoe UI"/>
               </a:rPr>
-              <a:t>Sıfırlama sonrası pilot tarama (gerçek)</a:t>
+              <a:t>Üretim sınırları ve kullanıcı sorumluluğu</a:t>
             </a:r>
           </a:p>
         </p:txBody>
@@ -9108,7 +9113,7 @@
                 </a:solidFill>
                 <a:latin typeface="Segoe UI"/>
               </a:rPr>
-              <a:t>Depo yeniden çalışma kopyası alındı: güncel sürüm dalı, en yeni iş kaydı.</a:t>
+              <a:t>Tarama kaynak kodunu ve eşleşen mevzuat parçalarını yerel Ollama servisine gönderir.</a:t>
             </a:r>
           </a:p>
           <a:p>
@@ -9124,7 +9129,7 @@
                 </a:solidFill>
                 <a:latin typeface="Segoe UI"/>
               </a:rPr>
-              <a:t>Tahmin sunuldu: 178 dosya · 15.051 satır · 66 desen · ~1 sn tarama.</a:t>
+              <a:t>Kodda gerçek kart verisi, CVV/PIN, kimlik bilgisi veya sır bulunmamalıdır.</a:t>
             </a:r>
           </a:p>
           <a:p>
@@ -9140,7 +9145,7 @@
                 </a:solidFill>
                 <a:latin typeface="Segoe UI"/>
               </a:rPr>
-              <a:t>Tarama sonucu: bilinen desenlerde temiz — önceki turda düzeltilmiş noktalar yayında olarak doğrulandı.</a:t>
+              <a:t>Uygulama canlı ödeme sistemini çağırmaz; runtime davranışı ve konfigürasyon eksik kalabilir.</a:t>
             </a:r>
           </a:p>
           <a:p>
@@ -9156,7 +9161,7 @@
                 </a:solidFill>
                 <a:latin typeface="Segoe UI"/>
               </a:rPr>
-              <a:t>Yapılandırmada 1 sinyal: gizli-değer benzeri satır — 'Doğrulanmalı' etiketiyle rapora girdi (ajan karar vermedi, kanıtı bildirdi).</a:t>
+              <a:t>Kısmi tarama veya bulgu çıkmaması tam uyumluluk kararı değildir.</a:t>
             </a:r>
           </a:p>
           <a:p>
@@ -9172,7 +9177,7 @@
                 </a:solidFill>
                 <a:latin typeface="Segoe UI"/>
               </a:rPr>
-              <a:t>Bu döngü, düzeltmelerin gerçekten yayında olduğunu kanıtlar: temiz tarama = başarılı düzeltme.</a:t>
+              <a:t>Uzman incelemesi, test ve PR onayları insan sorumluluğundadır.</a:t>
             </a:r>
           </a:p>
         </p:txBody>
@@ -9276,7 +9281,7 @@
                   <a:srgbClr val="0F2A43"/>
                 </a:solidFill>
               </a:rPr>
-              <a:t>Sıfırla</a:t>
+              <a:t>Kapsam</a:t>
             </a:r>
           </a:p>
         </p:txBody>
@@ -9385,7 +9390,7 @@
                   <a:srgbClr val="0F2A43"/>
                 </a:solidFill>
               </a:rPr>
-              <a:t>Plan gör</a:t>
+              <a:t>Tahmin</a:t>
             </a:r>
           </a:p>
         </p:txBody>
@@ -9494,7 +9499,7 @@
                   <a:srgbClr val="0F2A43"/>
                 </a:solidFill>
               </a:rPr>
-              <a:t>Onayla</a:t>
+              <a:t>Remediate</a:t>
             </a:r>
           </a:p>
         </p:txBody>
@@ -9603,7 +9608,7 @@
                   <a:srgbClr val="0F2A43"/>
                 </a:solidFill>
               </a:rPr>
-              <a:t>Temiz ortam</a:t>
+              <a:t>Test</a:t>
             </a:r>
           </a:p>
         </p:txBody>
@@ -9712,7 +9717,7 @@
                   <a:srgbClr val="0F2A43"/>
                 </a:solidFill>
               </a:rPr>
-              <a:t>Taze tarama</a:t>
+              <a:t>PR onayı</a:t>
             </a:r>
           </a:p>
         </p:txBody>
@@ -10886,7 +10891,7 @@
                 </a:solidFill>
                 <a:latin typeface="Segoe UI"/>
               </a:rPr>
-              <a:t>Çıktılar — Kurumsal Format, Çift Dosya</a:t>
+              <a:t>Çıktılar — Tarama ve remediation için ayrı raporlar</a:t>
             </a:r>
           </a:p>
         </p:txBody>
@@ -10925,7 +10930,7 @@
                 </a:solidFill>
                 <a:latin typeface="Segoe UI"/>
               </a:rPr>
-              <a:t>Her rapor bilgi (yazılabilir) + HTML (sunulabilir) olarak kaydedilir</a:t>
+              <a:t>Tarama ve remediation sonuçları Markdown + HTML biçiminde üretilir</a:t>
             </a:r>
           </a:p>
         </p:txBody>
@@ -11097,7 +11102,7 @@
                 </a:solidFill>
                 <a:latin typeface="Segoe UI"/>
               </a:rPr>
-              <a:t>Uyum + Risk Birleşik Raporu</a:t>
+              <a:t>Tarama Raporu</a:t>
             </a:r>
           </a:p>
           <a:p>
@@ -11113,7 +11118,7 @@
                 </a:solidFill>
                 <a:latin typeface="Segoe UI"/>
               </a:rPr>
-              <a:t>Üst bant ve özet rozetleri sabittir: her rapor aynı kalıpta üretilir — 35 repo, 24 kritik bulgu örneği.</a:t>
+              <a:t>Depo/commit, model, kapsam, dosya-satır kanıtı, mevzuat atfı ve sınırlamalar.</a:t>
             </a:r>
           </a:p>
         </p:txBody>
@@ -11222,7 +11227,7 @@
                 </a:solidFill>
                 <a:latin typeface="Segoe UI"/>
               </a:rPr>
-              <a:t>Düzeltme Fark Raporu</a:t>
+              <a:t>Remediation Raporu</a:t>
             </a:r>
           </a:p>
           <a:p>
@@ -11238,7 +11243,7 @@
                 </a:solidFill>
                 <a:latin typeface="Segoe UI"/>
               </a:rPr>
-              <a:t>Bulgu başına öncesi/sonrası ve renkli satır farkı — 5 bulguluk gerçek üretim, onaya hazır.</a:t>
+              <a:t>En fazla iki bulgunun izole worktree diff'i; test ve PR sonucu ayrı raporlanır.</a:t>
             </a:r>
           </a:p>
         </p:txBody>
@@ -11277,7 +11282,7 @@
                 </a:solidFill>
                 <a:latin typeface="Segoe UI"/>
               </a:rPr>
-              <a:t>HTML, bilgi dosyasından yalnız görünüm üretir: içerik değişmez. Rapor adı deseni sabittir — &lt;konu&gt;_&lt;tür&gt;_raporu_&lt;tarih_saat&gt;.</a:t>
+              <a:t>Tarama, diff ve test raporları ayrı HTML/Markdown dosyalarıdır; yalnızca gerçekten çalıştırılan adımlar raporlanır.</a:t>
             </a:r>
           </a:p>
         </p:txBody>
@@ -11454,7 +11459,7 @@
                 </a:solidFill>
                 <a:latin typeface="Segoe UI"/>
               </a:rPr>
-              <a:t>Nasıl Kullanılır? — Örnek Talepler</a:t>
+              <a:t>Nasıl Kullanılır? — Menüyle Uçtan Uca Akış</a:t>
             </a:r>
           </a:p>
         </p:txBody>
@@ -11646,7 +11651,7 @@
                 </a:solidFill>
                 <a:latin typeface="Segoe UI"/>
               </a:rPr>
-              <a:t>Repo Risk Raporu</a:t>
+              <a:t>1 · Mevzuat RAG</a:t>
             </a:r>
           </a:p>
         </p:txBody>
@@ -11685,7 +11690,7 @@
                 </a:solidFill>
                 <a:latin typeface="Segoe UI"/>
               </a:rPr>
-              <a:t>"C:\repos\odeme-gateway için risk raporu çıkar"</a:t>
+              <a:t>`mevzuat_link.json` içindeki PDF'leri indirip RAG indeksini kurun.</a:t>
             </a:r>
           </a:p>
           <a:p>
@@ -11701,7 +11706,7 @@
                 </a:solidFill>
                 <a:latin typeface="Segoe UI"/>
               </a:rPr>
-              <a:t>"şu repoyu tara: https://.../repo.git"</a:t>
+              <a:t>`manifest.json` içinde kaynak, sayfa ve indeksleme uyarılarını inceleyin.</a:t>
             </a:r>
           </a:p>
         </p:txBody>
@@ -11830,7 +11835,7 @@
                 </a:solidFill>
                 <a:latin typeface="Segoe UI"/>
               </a:rPr>
-              <a:t>Bülten Etki Analizi</a:t>
+              <a:t>2 · Depo</a:t>
             </a:r>
           </a:p>
         </p:txBody>
@@ -11869,7 +11874,7 @@
                 </a:solidFill>
                 <a:latin typeface="Segoe UI"/>
               </a:rPr>
-              <a:t>"bultenler klasöründeki yeni duyuruyu analiz et"</a:t>
+              <a:t>`repo_link.json` depolarını gözden geçirin; klonlama için kullanıcı onayı verin.</a:t>
             </a:r>
           </a:p>
           <a:p>
@@ -11885,7 +11890,7 @@
                 </a:solidFill>
                 <a:latin typeface="Segoe UI"/>
               </a:rPr>
-              <a:t>"bu dokümanın etkisini odeme reposuna bakarak çıkar"</a:t>
+              <a:t>Yerel depoda branch/commit ve Git çalışma ağacını kontrol edin.</a:t>
             </a:r>
           </a:p>
         </p:txBody>
@@ -12014,7 +12019,7 @@
                 </a:solidFill>
                 <a:latin typeface="Segoe UI"/>
               </a:rPr>
-              <a:t>Mevzuat Uyum Analizi</a:t>
+              <a:t>3 · Tahmin ve tarama</a:t>
             </a:r>
           </a:p>
         </p:txBody>
@@ -12053,7 +12058,7 @@
                 </a:solidFill>
                 <a:latin typeface="Segoe UI"/>
               </a:rPr>
-              <a:t>"mevzuat klasöründeki yönetmeliğe göre odeme-gateway reposunu denetle"</a:t>
+              <a:t>Tarama menüsünde depo ve dosya sınırını seçin; model başına tahmini görün.</a:t>
             </a:r>
           </a:p>
           <a:p>
@@ -12069,7 +12074,7 @@
                 </a:solidFill>
                 <a:latin typeface="Segoe UI"/>
               </a:rPr>
-              <a:t>"bu kanunun metnini repoyla karşılaştır"</a:t>
+              <a:t>Kapsamı ve modeli onayladıktan sonra taramayı başlatın.</a:t>
             </a:r>
           </a:p>
         </p:txBody>
@@ -12198,7 +12203,7 @@
                 </a:solidFill>
                 <a:latin typeface="Segoe UI"/>
               </a:rPr>
-              <a:t>İş-Kod-Çözüm</a:t>
+              <a:t>4 · HTML/Markdown rapor</a:t>
             </a:r>
           </a:p>
         </p:txBody>
@@ -12237,7 +12242,7 @@
                 </a:solidFill>
                 <a:latin typeface="Segoe UI"/>
               </a:rPr>
-              <a:t>"business/log altındaki hatayı incele, kök nedeni bul"</a:t>
+              <a:t>Bulguları dosya/satır, kod kanıtı ve mevzuat kaynak/sayfa ile inceleyin.</a:t>
             </a:r>
           </a:p>
           <a:p>
@@ -12253,7 +12258,7 @@
                 </a:solidFill>
                 <a:latin typeface="Segoe UI"/>
               </a:rPr>
-              <a:t>"SISP-1234 kaydını incele, çözüm öner"</a:t>
+              <a:t>Sınırlamaları okuyun; bulgu yokluğu tam uyumluluk değildir.</a:t>
             </a:r>
           </a:p>
         </p:txBody>
@@ -12382,7 +12387,7 @@
                 </a:solidFill>
                 <a:latin typeface="Segoe UI"/>
               </a:rPr>
-              <a:t>Bulgu Düzeltme</a:t>
+              <a:t>5 · Remediation ve PR</a:t>
             </a:r>
           </a:p>
         </p:txBody>
@@ -12421,7 +12426,7 @@
                 </a:solidFill>
                 <a:latin typeface="Segoe UI"/>
               </a:rPr>
-              <a:t>"bu raporun en kritik 5 bulgusunu düzelt, PR aç"</a:t>
+              <a:t>En fazla iki öncelikli bulguyu seçip kod değişikliğini ayrıca onaylayın.</a:t>
             </a:r>
           </a:p>
           <a:p>
@@ -12437,7 +12442,7 @@
                 </a:solidFill>
                 <a:latin typeface="Segoe UI"/>
               </a:rPr>
-              <a:t>"raporları listele, geçen haftakinden düzeltme başlat"</a:t>
+              <a:t>Test ve GitHub PR için ayrı onay verin; sonucu HTML raporlardan doğrulayın.</a:t>
             </a:r>
           </a:p>
         </p:txBody>
@@ -12476,7 +12481,7 @@
                 </a:solidFill>
                 <a:latin typeface="Segoe UI"/>
               </a:rPr>
-              <a:t>Talebiniz kapsam dışıysa ajan size dört işten uygun olana yön verir.</a:t>
+              <a:t>Uygulama Türkçe terminal menüsüdür; serbest biçimli sohbet arayüzü sunmaz.</a:t>
             </a:r>
           </a:p>
         </p:txBody>
@@ -12653,7 +12658,7 @@
                 </a:solidFill>
                 <a:latin typeface="Segoe UI"/>
               </a:rPr>
-              <a:t>Yardımcı Araçlar — 17 Yardımcı, Tek Disiplin</a:t>
+              <a:t>Uygulama Bileşenleri — LangChain, Yerel Ollama, HTML/Markdown</a:t>
             </a:r>
           </a:p>
         </p:txBody>
@@ -12692,7 +12697,7 @@
                 </a:solidFill>
                 <a:latin typeface="Segoe UI"/>
               </a:rPr>
-              <a:t>Her araç yalnız ölçer, tarar, düzenler veya biçimlendirir; hiçbiri karar vermez</a:t>
+              <a:t>İndirme, tarama, dosya değişikliği, test ve PR ayrı kullanıcı onaylarına bağlıdır.</a:t>
             </a:r>
           </a:p>
         </p:txBody>
@@ -12877,7 +12882,7 @@
                 </a:solidFill>
                 <a:latin typeface="Segoe UI"/>
               </a:rPr>
-              <a:t>Belge Girişi</a:t>
+              <a:t>Yapılandırma</a:t>
             </a:r>
           </a:p>
         </p:txBody>
@@ -12911,7 +12916,7 @@
                 </a:solidFill>
                 <a:latin typeface="Segoe UI"/>
               </a:rPr>
-              <a:t>PDF ve belge dosyalarını ilgili klasörden alır; tarih damgalı benzersiz kopya üretir, üzerine yazar mı diye sormaz.</a:t>
+              <a:t>`mevzuat_link.json` ve `repo_link.json` içeriğini doğrular.</a:t>
             </a:r>
           </a:p>
         </p:txBody>
@@ -13033,7 +13038,7 @@
                 </a:solidFill>
                 <a:latin typeface="Segoe UI"/>
               </a:rPr>
-              <a:t>Belge Okuyucu</a:t>
+              <a:t>PDF İndirme</a:t>
             </a:r>
           </a:p>
         </p:txBody>
@@ -13067,7 +13072,7 @@
                 </a:solidFill>
                 <a:latin typeface="Segoe UI"/>
               </a:rPr>
-              <a:t>PDF/DOCX belgelerini okunabilir metne çevirir; taranmış görüntü sayfalarda 'elle aktarım gerekli' uyarısı verir.</a:t>
+              <a:t>Kullanıcının seçtiği mevzuat bağlantılarındaki PDF'leri indirir.</a:t>
             </a:r>
           </a:p>
         </p:txBody>
@@ -13189,7 +13194,7 @@
                 </a:solidFill>
                 <a:latin typeface="Segoe UI"/>
               </a:rPr>
-              <a:t>Mevzuat Girişi</a:t>
+              <a:t>RAG Parçalama</a:t>
             </a:r>
           </a:p>
         </p:txBody>
@@ -13223,7 +13228,7 @@
                 </a:solidFill>
                 <a:latin typeface="Segoe UI"/>
               </a:rPr>
-              <a:t>Kanun ve yönetmelik ekleme, indirme ve sayfa tarama işlemlerinin tek kapısı; kurumsal ağ ayarlarıyla güvenli çalışır.</a:t>
+              <a:t>PDF sayfalarını örtüşen chunk'lara böler; kaynak/sayfa metadata'sını korur.</a:t>
             </a:r>
           </a:p>
         </p:txBody>
@@ -13345,7 +13350,7 @@
                 </a:solidFill>
                 <a:latin typeface="Segoe UI"/>
               </a:rPr>
-              <a:t>İş Kaydı</a:t>
+              <a:t>BM25 Arama</a:t>
             </a:r>
           </a:p>
         </p:txBody>
@@ -13379,7 +13384,7 @@
                 </a:solidFill>
                 <a:latin typeface="Segoe UI"/>
               </a:rPr>
-              <a:t>Olay kaydı, Jira kaydı ve log çıktılarını düzenli klasörlere yerleştirir; işlenen belgeleri deftere geçirir.</a:t>
+              <a:t>Mevzuat parçalarını leksikal olarak arar; embedding veya OCR kullanmaz.</a:t>
             </a:r>
           </a:p>
         </p:txBody>
@@ -13501,7 +13506,7 @@
                 </a:solidFill>
                 <a:latin typeface="Segoe UI"/>
               </a:rPr>
-              <a:t>Kayıt Yöneticisi</a:t>
+              <a:t>Depo Klonlama</a:t>
             </a:r>
           </a:p>
         </p:txBody>
@@ -13535,7 +13540,7 @@
                 </a:solidFill>
                 <a:latin typeface="Segoe UI"/>
               </a:rPr>
-              <a:t>Analiz ve işlenen defterlerini JSON olarak tutar; defter yalnız bilgilendirmedir, akışı asla engellemez.</a:t>
+              <a:t>Depoları yalnız açık kullanıcı onayından sonra yerel çalışma alanına alır.</a:t>
             </a:r>
           </a:p>
         </p:txBody>
@@ -13657,7 +13662,7 @@
                 </a:solidFill>
                 <a:latin typeface="Segoe UI"/>
               </a:rPr>
-              <a:t>Depo Yöneticisi</a:t>
+              <a:t>Model Havuzu</a:t>
             </a:r>
           </a:p>
         </p:txBody>
@@ -13691,7 +13696,7 @@
                 </a:solidFill>
                 <a:latin typeface="Segoe UI"/>
               </a:rPr>
-              <a:t>Depo keşfi ve onaylı indirme/güncelleme yazışması; commit'lenmemiş değişiklikli depoda yazma işlemi kendiliğinden durur.</a:t>
+              <a:t>Yerel Ollama'da kurulu modelleri listeler ve kısa throughput ölçümü yapar.</a:t>
             </a:r>
           </a:p>
         </p:txBody>
@@ -13813,7 +13818,7 @@
                 </a:solidFill>
                 <a:latin typeface="Segoe UI"/>
               </a:rPr>
-              <a:t>Depo Envanteri</a:t>
+              <a:t>Tarama Tahmini</a:t>
             </a:r>
           </a:p>
         </p:txBody>
@@ -13847,7 +13852,7 @@
                 </a:solidFill>
                 <a:latin typeface="Segoe UI"/>
               </a:rPr>
-              <a:t>Hangi dosyalar, kaç satır, hangi yapılandırma ayarları açık — tarama kapsamının ölçülebilir dayanağını üretir.</a:t>
+              <a:t>Dosya ve bağlam için yaklaşık token miktarı ile model hızından süre tahmini çıkarır.</a:t>
             </a:r>
           </a:p>
         </p:txBody>
@@ -13969,7 +13974,7 @@
                 </a:solidFill>
                 <a:latin typeface="Segoe UI"/>
               </a:rPr>
-              <a:t>Desen Taraması</a:t>
+              <a:t>Kod Tarama</a:t>
             </a:r>
           </a:p>
         </p:txBody>
@@ -14003,7 +14008,7 @@
                 </a:solidFill>
                 <a:latin typeface="Segoe UI"/>
               </a:rPr>
-              <a:t>Bilinen risk kalıplarını dosya ve satır etiketiyle bulur; ajandaki doğrulama bu ön taramanın üstüne kurulur.</a:t>
+              <a:t>Seçilen kod ve mevzuat parçalarını yerel Ollama modeline gönderir.</a:t>
             </a:r>
           </a:p>
         </p:txBody>
@@ -14125,7 +14130,7 @@
                 </a:solidFill>
                 <a:latin typeface="Segoe UI"/>
               </a:rPr>
-              <a:t>Tahmin Aracı</a:t>
+              <a:t>Kanıt Doğrulama</a:t>
             </a:r>
           </a:p>
         </p:txBody>
@@ -14159,7 +14164,7 @@
                 </a:solidFill>
                 <a:latin typeface="Segoe UI"/>
               </a:rPr>
-              <a:t>Tarama öncesi dosya/satır/süre/maliyet ölçümü yapar; 'onayınız olmadan tarama yok' kuralının ölçülebilir temelidir.</a:t>
+              <a:t>Kod alıntısı ve mevzuat sayfa atfı doğrulanmayan bulguları reddeder.</a:t>
             </a:r>
           </a:p>
         </p:txBody>
@@ -14281,7 +14286,7 @@
                 </a:solidFill>
                 <a:latin typeface="Segoe UI"/>
               </a:rPr>
-              <a:t>Veri Gizleyici</a:t>
+              <a:t>Tarama Raporu</a:t>
             </a:r>
           </a:p>
         </p:txBody>
@@ -14315,7 +14320,7 @@
                 </a:solidFill>
                 <a:latin typeface="Segoe UI"/>
               </a:rPr>
-              <a:t>Kart numarası, şifre ve benzeri görünümleri rapor yazılmadan önce maskeler; gerçek değer rapora hiç girmez.</a:t>
+              <a:t>Tarama JSON'u, Markdown ve HTML; kapsam, dosya sonuçları ve bulguları içerir.</a:t>
             </a:r>
           </a:p>
         </p:txBody>
@@ -14437,7 +14442,7 @@
                 </a:solidFill>
                 <a:latin typeface="Segoe UI"/>
               </a:rPr>
-              <a:t>Belge Hafızası Kurulumu</a:t>
+              <a:t>Remediation Planı</a:t>
             </a:r>
           </a:p>
         </p:txBody>
@@ -14471,7 +14476,7 @@
                 </a:solidFill>
                 <a:latin typeface="Segoe UI"/>
               </a:rPr>
-              <a:t>Her belgeyi konu bölümlerine ayırıp kimlikli hafızaya yerleştirir; bölümler orta boyutta tutulur.</a:t>
+              <a:t>En fazla iki yüksek öncelikli bulgu için değişiklik planı hazırlar.</a:t>
             </a:r>
           </a:p>
         </p:txBody>
@@ -14593,7 +14598,7 @@
                 </a:solidFill>
                 <a:latin typeface="Segoe UI"/>
               </a:rPr>
-              <a:t>Belge Hafızası Sorgu</a:t>
+              <a:t>Remediation Önerisi</a:t>
             </a:r>
           </a:p>
         </p:txBody>
@@ -14627,7 +14632,7 @@
                 </a:solidFill>
                 <a:latin typeface="Segoe UI"/>
               </a:rPr>
-              <a:t>Hafıza içinde konu bazlı arama yapar; her sonuç belge + bölüm kimliğiyle döner — dayanaksız alıntı yoktur.</a:t>
+              <a:t>Yerel modelden sınırlı dosya değişikliği önerisi alır; otomatik uygulamaz.</a:t>
             </a:r>
           </a:p>
         </p:txBody>
@@ -14749,7 +14754,7 @@
                 </a:solidFill>
                 <a:latin typeface="Segoe UI"/>
               </a:rPr>
-              <a:t>Veritabanı Tanım Arama</a:t>
+              <a:t>İzole Uygulama</a:t>
             </a:r>
           </a:p>
         </p:txBody>
@@ -14783,7 +14788,7 @@
                 </a:solidFill>
                 <a:latin typeface="Segoe UI"/>
               </a:rPr>
-              <a:t>Prosedür/paket tanımlarını statik metin içinde arar; veritabanına bağlanmaz, SQL çalıştırmaz.</a:t>
+              <a:t>Açık onayla yalnız seçilen bulguların dosyalarını ayrı branch/worktree'de değiştirir.</a:t>
             </a:r>
           </a:p>
         </p:txBody>
@@ -14905,7 +14910,7 @@
                 </a:solidFill>
                 <a:latin typeface="Segoe UI"/>
               </a:rPr>
-              <a:t>Rapor Biçimlendirici</a:t>
+              <a:t>Test Doğrulama</a:t>
             </a:r>
           </a:p>
         </p:txBody>
@@ -14939,7 +14944,7 @@
                 </a:solidFill>
                 <a:latin typeface="Segoe UI"/>
               </a:rPr>
-              <a:t>Bilgi dosyasından kurumsal HTML görünüm üretir; içeriği değiştirmez — md kaynak, html yalnız sunum katmanıdır.</a:t>
+              <a:t>Kullanıcı onayıyla desteklenen test komutlarını çalıştırır; sonucu HTML/Markdown raporlar.</a:t>
             </a:r>
           </a:p>
         </p:txBody>
@@ -15061,7 +15066,7 @@
                 </a:solidFill>
                 <a:latin typeface="Segoe UI"/>
               </a:rPr>
-              <a:t>Düzeltme / PR Aracı</a:t>
+              <a:t>GitHub PR</a:t>
             </a:r>
           </a:p>
         </p:txBody>
@@ -15095,7 +15100,7 @@
                 </a:solidFill>
                 <a:latin typeface="Segoe UI"/>
               </a:rPr>
-              <a:t>Onaylı düzeltmede ayrı dal açar, farkı uygular, PR açar; korunan dallara yazma ve zorla-gönderim yoktur.</a:t>
+              <a:t>Başarılı test ve son kullanıcı onayından sonra `gh` ile PR açar.</a:t>
             </a:r>
           </a:p>
         </p:txBody>
@@ -15217,7 +15222,7 @@
                 </a:solidFill>
                 <a:latin typeface="Segoe UI"/>
               </a:rPr>
-              <a:t>Sıfırlama Aracı</a:t>
+              <a:t>LangChain İş Akışı</a:t>
             </a:r>
           </a:p>
         </p:txBody>
@@ -15251,7 +15256,7 @@
                 </a:solidFill>
                 <a:latin typeface="Segoe UI"/>
               </a:rPr>
-              <a:t>'Sıfırla' komutunda önce plan gösterir, onaydan sonra ürettiği veriyi temizler; şablonlar, araçlar ve kayıtlar korunur.</a:t>
+              <a:t>Tahmin → onay → tarama → rapor adımlarını Python `Runnable` zincirinde bağlar.</a:t>
             </a:r>
           </a:p>
         </p:txBody>
@@ -15373,7 +15378,7 @@
                 </a:solidFill>
                 <a:latin typeface="Segoe UI"/>
               </a:rPr>
-              <a:t>Sunum Üretici</a:t>
+              <a:t>Türkçe CLI</a:t>
             </a:r>
           </a:p>
         </p:txBody>
@@ -15407,7 +15412,7 @@
                 </a:solidFill>
                 <a:latin typeface="Segoe UI"/>
               </a:rPr>
-              <a:t>Bu tanıtım sunumunu tek komutla üretir; slayt sablonları ve kurum logosu yerleşik gelir.</a:t>
+              <a:t>Kullanıcıya belge, depo, tarama ve remediation menülerini sunar.</a:t>
             </a:r>
           </a:p>
         </p:txBody>
@@ -15446,7 +15451,7 @@
                 </a:solidFill>
                 <a:latin typeface="Segoe UI"/>
               </a:rPr>
-              <a:t>Tüm araçlar yerel çalışır: dışa veri göndermez, ağ çağrısı yapmaz, kendisi karar vermez — karar ve onay daima sizdedir.</a:t>
+              <a:t>Kod yerel Ollama servisine gönderilir; PDF indirme ve GitHub PR aşamaları ağ kullanır. Gerçek kart verisi kullanmayın.</a:t>
             </a:r>
           </a:p>
         </p:txBody>
@@ -15854,7 +15859,7 @@
                 </a:solidFill>
                 <a:latin typeface="Segoe UI"/>
               </a:rPr>
-              <a:t>Bir repo seçin; ajan tahmini sunduktan sonra tarama yapıp yapılandırılmış rapor üretir. Raporu ekiple paylaşıp geri bildirim toplayın.</a:t>
+              <a:t>Sentetik ödeme deposuyla pilot yapın; dosya kapsamı ve tahmini süreyi onaylayıp HTML raporunu inceleyin.</a:t>
             </a:r>
           </a:p>
         </p:txBody>
@@ -15983,7 +15988,7 @@
                 </a:solidFill>
                 <a:latin typeface="Segoe UI"/>
               </a:rPr>
-              <a:t>2. Doküman havuzu</a:t>
+              <a:t>2. Mevzuat kaynakları</a:t>
             </a:r>
           </a:p>
         </p:txBody>
@@ -16022,7 +16027,7 @@
                 </a:solidFill>
                 <a:latin typeface="Segoe UI"/>
               </a:rPr>
-              <a:t>Bülten ve mevzuat belgelerini ilgili klasörlere girin; ajan her biri için etki ve uyum analizi üretir, yaklaşan geçerlilik tarihlerini öne çıkarır.</a:t>
+              <a:t>`mevzuat_link.json` kaynaklarını seçin; indirilen PDF'leri, manifest uyarılarını ve RAG atıflarını kontrol edin.</a:t>
             </a:r>
           </a:p>
         </p:txBody>
@@ -16190,7 +16195,7 @@
                 </a:solidFill>
                 <a:latin typeface="Segoe UI"/>
               </a:rPr>
-              <a:t>Risk raporundaki en kritik bulguları seçin; fark raporunu inceleyip onaylayın — düzeltme dalı hazır, Pull Request adresi elinizde.</a:t>
+              <a:t>En fazla iki bulgu için diff'i gözden geçirin; test ve PR onaylarını ayrı verin.</a:t>
             </a:r>
           </a:p>
         </p:txBody>
@@ -16229,7 +16234,7 @@
                 </a:solidFill>
                 <a:latin typeface="Segoe UI"/>
               </a:rPr>
-              <a:t>Her adımda aynı güvenceler geçerli: kanıt, gizlilik, tazelik, onay.</a:t>
+              <a:t>Yalnız sentetik/hassas veriden arındırılmış kod kullanın; hukuki kararı uzman verir.</a:t>
             </a:r>
           </a:p>
         </p:txBody>
@@ -16557,7 +16562,7 @@
                 </a:solidFill>
                 <a:latin typeface="Segoe UI"/>
               </a:rPr>
-              <a:t>Dört analiz akışı + bulgu düzeltme seçeneği — hepsi kanıt disipliniyle.</a:t>
+              <a:t>Mevzuat PDF'leri yerel BM25 RAG indeksine alınır; kaynak ve sayfa bilgisi korunur.</a:t>
             </a:r>
           </a:p>
           <a:p>
@@ -16573,7 +16578,7 @@
                 </a:solidFill>
                 <a:latin typeface="Segoe UI"/>
               </a:rPr>
-              <a:t>Tarama öncesi maliyet tahmini: ne kadar kod, ne kadar süre, ne kadar maliyet — önceden bilirsiniz.</a:t>
+              <a:t>Tarama tahmini yaklaşık token ve süre sunar; yerel model için parasal maliyet çıkarılmaz.</a:t>
             </a:r>
           </a:p>
           <a:p>
@@ -16589,7 +16594,7 @@
                 </a:solidFill>
                 <a:latin typeface="Segoe UI"/>
               </a:rPr>
-              <a:t>Temiz başlangıç: 'sıfırla' derseniz ortam güvenli temizlenir; analiz hep güncel koddan yürür.</a:t>
+              <a:t>Kod taraması kullanıcı onaylı depo/kapsam/model ile çalışır; sınırlı veya eksik sonuçlar raporlanır.</a:t>
             </a:r>
           </a:p>
           <a:p>
@@ -16605,7 +16610,7 @@
                 </a:solidFill>
                 <a:latin typeface="Segoe UI"/>
               </a:rPr>
-              <a:t>Hassas veriler otomatik gizlenir; doğrulanamayan bilgi 'Doğrulanmalı' yazar, tahmin üretmez.</a:t>
+              <a:t>Gerçek kart sahibi verisi kullanmayın; otomatik veri maskeleme garantisi yoktur.</a:t>
             </a:r>
           </a:p>
           <a:p>
@@ -16621,7 +16626,7 @@
                 </a:solidFill>
                 <a:latin typeface="Segoe UI"/>
               </a:rPr>
-              <a:t>Kod yazma onayınız olmadan hiçbir adım ilerlemez; her rapor bilgi + HTML çift dosyada, sabit kurumsal biçimde teslim edilir.</a:t>
+              <a:t>En fazla iki bulgu izole worktree'de düzeltilir; test ve GitHub PR ayrı onay ve HTML/Markdown raporları gerektirir.</a:t>
             </a:r>
           </a:p>
         </p:txBody>
@@ -16660,7 +16665,7 @@
                 </a:solidFill>
                 <a:latin typeface="Segoe UI"/>
               </a:rPr>
-              <a:t>Başlamak için: 'bir repo için risk raporu çıkar' yazın — gerisini ajan sıralar.</a:t>
+              <a:t>Başlamak için `mevzuat-agent` terminal menüsünü açın; RAG, depo, tahminli tarama ve remediation adımlarını seçin.</a:t>
             </a:r>
           </a:p>
         </p:txBody>
@@ -16837,7 +16842,7 @@
                 </a:solidFill>
                 <a:latin typeface="Segoe UI"/>
               </a:rPr>
-              <a:t>Neden MevzuAI?</a:t>
+              <a:t>Neden ödeme sistemlerinde MevzuAI?</a:t>
             </a:r>
           </a:p>
         </p:txBody>
@@ -17068,7 +17073,7 @@
                 </a:solidFill>
                 <a:latin typeface="Segoe UI"/>
               </a:rPr>
-              <a:t>Doküman ve mevzuat yükü artıyor: her yeni duyuru, her kanun değişikliği kod üzerinde etki analizi istiyor.</a:t>
+              <a:t>Ödeme mevzuatı ve teknik gereksinimler değişir: kod üzerindeki etkiyi izlemek gerekir.</a:t>
             </a:r>
           </a:p>
           <a:p>
@@ -17084,7 +17089,7 @@
                 </a:solidFill>
                 <a:latin typeface="Segoe UI"/>
               </a:rPr>
-              <a:t>Etkisini kodda bulmak zaman alıyor: elle aramak uzun sürer, atlanan nokta bırakır.</a:t>
+              <a:t>Yetkilendirme, iade ve mutabakat akışları farklı servislerde olduğundan manuel arama eksik kalabilir.</a:t>
             </a:r>
           </a:p>
           <a:p>
@@ -17100,7 +17105,7 @@
                 </a:solidFill>
                 <a:latin typeface="Segoe UI"/>
               </a:rPr>
-              <a:t>Raporlar kanıtsız olabiliyor: 'muhtemelen burada' cümlesi doğrulanabilir değil.</a:t>
+              <a:t>Bulgular dosya/satır kanıtı ve mevzuat kaynak/sayfa atfıyla doğrulanabilir olmalıdır.</a:t>
             </a:r>
           </a:p>
           <a:p>
@@ -17116,7 +17121,7 @@
                 </a:solidFill>
                 <a:latin typeface="Segoe UI"/>
               </a:rPr>
-              <a:t>Hassas veri riski: analiz sırasında kart numarası veya şifre rapora sızabilir — bu ayrı bir güvenlik olayıdır.</a:t>
+              <a:t>Kart verisinin analiz girdisine veya rapora sızması ciddi bir risktir.</a:t>
             </a:r>
           </a:p>
           <a:p>
@@ -17132,7 +17137,7 @@
                 </a:solidFill>
                 <a:latin typeface="Segoe UI"/>
               </a:rPr>
-              <a:t>Düzeltme süreci uzuyor: bulgudan Pull Request'a giden yol elle işliyor.</a:t>
+              <a:t>Bulgu, düzeltme, test ve PR adımları kontrollü ve ayrı onaylı ilerlemelidir.</a:t>
             </a:r>
           </a:p>
         </p:txBody>
@@ -17300,7 +17305,7 @@
                 </a:solidFill>
                 <a:latin typeface="Segoe UI"/>
               </a:rPr>
-              <a:t>Dokümanı, mevzuatı veya olay kaydını verirsiniz — ajan kod üzerinde etkiyi uçtan uca çıkarır.</a:t>
+              <a:t>Mevzuat PDF'lerini yerel RAG indeksine hazırlar; seçilen depoyu onaydan sonra inceler.</a:t>
             </a:r>
           </a:p>
           <a:p>
@@ -17316,7 +17321,7 @@
                 </a:solidFill>
                 <a:latin typeface="Segoe UI"/>
               </a:rPr>
-              <a:t>Tarama önce otomatik araçlarla yapılır; ajan her eşleşmeyi kod bağlamında tek tek doğrular.</a:t>
+              <a:t>Tarama tahmini dosya kapsamı, bağlam tokenları ve ölçülen model hızından yaklaşık süre çıkarır.</a:t>
             </a:r>
           </a:p>
           <a:p>
@@ -17332,7 +17337,7 @@
                 </a:solidFill>
                 <a:latin typeface="Segoe UI"/>
               </a:rPr>
-              <a:t>Her sonuç kanıtlıdır: hangi dosyanın hangi satırı, hangi doküman bölümü dayanak gösterilir.</a:t>
+              <a:t>Bulguda dosya/satır kanıtı ve modele sunulmuş mevzuat kaynak/sayfa atfı gösterilir.</a:t>
             </a:r>
           </a:p>
           <a:p>
@@ -17348,7 +17353,7 @@
                 </a:solidFill>
                 <a:latin typeface="Segoe UI"/>
               </a:rPr>
-              <a:t>Hassas veriler rapor yazılmadan önce otomatik gizlenir — ayrı çaba istemez.</a:t>
+              <a:t>Gerçek kart verisi içeren depolarda kullanmayın; otomatik veri maskeleme garantisi yoktur.</a:t>
             </a:r>
           </a:p>
           <a:p>
@@ -17364,7 +17369,7 @@
                 </a:solidFill>
                 <a:latin typeface="Segoe UI"/>
               </a:rPr>
-              <a:t>Dilerseniz düzeltmeye de geçer: kritik bulgulara kod farkı üretir, onayınızla Pull Request açar.</a:t>
+              <a:t>En fazla iki öncelikli bulgu izole dalda düzeltilir; test ve PR için ayrıca onay gerekir.</a:t>
             </a:r>
           </a:p>
         </p:txBody>
@@ -17403,7 +17408,7 @@
                 </a:solidFill>
                 <a:latin typeface="Segoe UI"/>
               </a:rPr>
-              <a:t>Kısacası: ajan analizi hızlandırır, kanıtla dayandırır ve gizliliği korur — karar her zaman sizde kalır.</a:t>
+              <a:t>MevzuatAgent ödeme işleyen ürün değil; yerel kod incelemesi ve kullanıcı kontrollü remediation aracıdır.</a:t>
             </a:r>
           </a:p>
         </p:txBody>
@@ -19943,7 +19948,7 @@
               </a:defRPr>
             </a:pPr>
             <a:r>
-              <a:t>KURULUM · AŞAMA GÖRSELİ</a:t>
+              <a:t>PROJE ODAĞI · KARTLI ÖDEME SİSTEMLERİ</a:t>
             </a:r>
           </a:p>
         </p:txBody>
@@ -19979,7 +19984,7 @@
               </a:defRPr>
             </a:pPr>
             <a:r>
-              <a:t>Kurulum aşamaları ve açık onay kapıları</a:t>
+              <a:t>Ödeme yazılımını mevzuat bağlamında, kod kanıtıyla incelemek</a:t>
             </a:r>
           </a:p>
         </p:txBody>
@@ -20015,14 +20020,1027 @@
               </a:defRPr>
             </a:pPr>
             <a:r>
-              <a:t>install.sh kaynak kodundan sıralandı; bu makinede yapılmış bir kurulum kaydı olarak sunulmaz.</a:t>
+              <a:t>MevzuatAgent ödeme almaz veya canlı işlem sistemine bağlanmaz; seçilen depo ve mevzuat belgelerini analiz eder.</a:t>
+            </a:r>
+          </a:p>
+        </p:txBody>
+      </p:sp>
+      <p:sp>
+        <p:nvSpPr>
+          <p:cNvPr id="5" name="Rectangle 4"/>
+          <p:cNvSpPr/>
+          <p:nvPr/>
+        </p:nvSpPr>
+        <p:spPr>
+          <a:xfrm>
+            <a:off x="621792" y="1755648"/>
+            <a:ext cx="2039112" cy="987552"/>
+          </a:xfrm>
+          <a:prstGeom prst="rect">
+            <a:avLst/>
+          </a:prstGeom>
+          <a:solidFill>
+            <a:srgbClr val="FFFFFF"/>
+          </a:solidFill>
+          <a:ln>
+            <a:noFill/>
+          </a:ln>
+        </p:spPr>
+        <p:style>
+          <a:lnRef idx="1">
+            <a:schemeClr val="accent1"/>
+          </a:lnRef>
+          <a:fillRef idx="3">
+            <a:schemeClr val="accent1"/>
+          </a:fillRef>
+          <a:effectRef idx="2">
+            <a:schemeClr val="accent1"/>
+          </a:effectRef>
+          <a:fontRef idx="minor">
+            <a:schemeClr val="lt1"/>
+          </a:fontRef>
+        </p:style>
+        <p:txBody>
+          <a:bodyPr rtlCol="0" anchor="ctr"/>
+          <a:lstStyle/>
+          <a:p>
+            <a:pPr algn="ctr"/>
+          </a:p>
+        </p:txBody>
+      </p:sp>
+      <p:sp>
+        <p:nvSpPr>
+          <p:cNvPr id="6" name="Rectangle 5"/>
+          <p:cNvSpPr/>
+          <p:nvPr/>
+        </p:nvSpPr>
+        <p:spPr>
+          <a:xfrm>
+            <a:off x="621792" y="1755648"/>
+            <a:ext cx="64008" cy="987552"/>
+          </a:xfrm>
+          <a:prstGeom prst="rect">
+            <a:avLst/>
+          </a:prstGeom>
+          <a:solidFill>
+            <a:srgbClr val="00AFA0"/>
+          </a:solidFill>
+          <a:ln>
+            <a:noFill/>
+          </a:ln>
+        </p:spPr>
+        <p:style>
+          <a:lnRef idx="1">
+            <a:schemeClr val="accent1"/>
+          </a:lnRef>
+          <a:fillRef idx="3">
+            <a:schemeClr val="accent1"/>
+          </a:fillRef>
+          <a:effectRef idx="2">
+            <a:schemeClr val="accent1"/>
+          </a:effectRef>
+          <a:fontRef idx="minor">
+            <a:schemeClr val="lt1"/>
+          </a:fontRef>
+        </p:style>
+        <p:txBody>
+          <a:bodyPr rtlCol="0" anchor="ctr"/>
+          <a:lstStyle/>
+          <a:p>
+            <a:pPr algn="ctr"/>
+          </a:p>
+        </p:txBody>
+      </p:sp>
+      <p:sp>
+        <p:nvSpPr>
+          <p:cNvPr id="7" name="TextBox 6"/>
+          <p:cNvSpPr txBox="1"/>
+          <p:nvPr/>
+        </p:nvSpPr>
+        <p:spPr>
+          <a:xfrm>
+            <a:off x="758952" y="1901952"/>
+            <a:ext cx="1810512" cy="292608"/>
+          </a:xfrm>
+          <a:prstGeom prst="rect">
+            <a:avLst/>
+          </a:prstGeom>
+          <a:noFill/>
+        </p:spPr>
+        <p:txBody>
+          <a:bodyPr wrap="square" lIns="73152" rIns="73152" tIns="36576" bIns="27432" anchor="ctr">
+            <a:spAutoFit/>
+          </a:bodyPr>
+          <a:lstStyle/>
+          <a:p>
+            <a:pPr>
+              <a:defRPr sz="1300" b="1">
+                <a:solidFill>
+                  <a:srgbClr val="112240"/>
+                </a:solidFill>
+                <a:latin typeface="Aptos"/>
+              </a:defRPr>
+            </a:pPr>
+            <a:r>
+              <a:t>Kart sahibi</a:t>
+            </a:r>
+          </a:p>
+        </p:txBody>
+      </p:sp>
+      <p:sp>
+        <p:nvSpPr>
+          <p:cNvPr id="8" name="TextBox 7"/>
+          <p:cNvSpPr txBox="1"/>
+          <p:nvPr/>
+        </p:nvSpPr>
+        <p:spPr>
+          <a:xfrm>
+            <a:off x="758952" y="2267712"/>
+            <a:ext cx="1810512" cy="320040"/>
+          </a:xfrm>
+          <a:prstGeom prst="rect">
+            <a:avLst/>
+          </a:prstGeom>
+          <a:noFill/>
+        </p:spPr>
+        <p:txBody>
+          <a:bodyPr wrap="square" lIns="73152" rIns="73152" tIns="36576" bIns="27432" anchor="ctr">
+            <a:spAutoFit/>
+          </a:bodyPr>
+          <a:lstStyle/>
+          <a:p>
+            <a:pPr>
+              <a:defRPr sz="1000" b="0">
+                <a:solidFill>
+                  <a:srgbClr val="637389"/>
+                </a:solidFill>
+                <a:latin typeface="Aptos"/>
+              </a:defRPr>
+            </a:pPr>
+            <a:r>
+              <a:t>Kartı / dijital cüzdanı kullanır</a:t>
+            </a:r>
+          </a:p>
+        </p:txBody>
+      </p:sp>
+      <p:sp>
+        <p:nvSpPr>
+          <p:cNvPr id="9" name="Rectangle 8"/>
+          <p:cNvSpPr/>
+          <p:nvPr/>
+        </p:nvSpPr>
+        <p:spPr>
+          <a:xfrm>
+            <a:off x="2843784" y="1755648"/>
+            <a:ext cx="2039112" cy="987552"/>
+          </a:xfrm>
+          <a:prstGeom prst="rect">
+            <a:avLst/>
+          </a:prstGeom>
+          <a:solidFill>
+            <a:srgbClr val="FFFFFF"/>
+          </a:solidFill>
+          <a:ln>
+            <a:noFill/>
+          </a:ln>
+        </p:spPr>
+        <p:style>
+          <a:lnRef idx="1">
+            <a:schemeClr val="accent1"/>
+          </a:lnRef>
+          <a:fillRef idx="3">
+            <a:schemeClr val="accent1"/>
+          </a:fillRef>
+          <a:effectRef idx="2">
+            <a:schemeClr val="accent1"/>
+          </a:effectRef>
+          <a:fontRef idx="minor">
+            <a:schemeClr val="lt1"/>
+          </a:fontRef>
+        </p:style>
+        <p:txBody>
+          <a:bodyPr rtlCol="0" anchor="ctr"/>
+          <a:lstStyle/>
+          <a:p>
+            <a:pPr algn="ctr"/>
+          </a:p>
+        </p:txBody>
+      </p:sp>
+      <p:sp>
+        <p:nvSpPr>
+          <p:cNvPr id="10" name="Rectangle 9"/>
+          <p:cNvSpPr/>
+          <p:nvPr/>
+        </p:nvSpPr>
+        <p:spPr>
+          <a:xfrm>
+            <a:off x="2843784" y="1755648"/>
+            <a:ext cx="64008" cy="987552"/>
+          </a:xfrm>
+          <a:prstGeom prst="rect">
+            <a:avLst/>
+          </a:prstGeom>
+          <a:solidFill>
+            <a:srgbClr val="35BED7"/>
+          </a:solidFill>
+          <a:ln>
+            <a:noFill/>
+          </a:ln>
+        </p:spPr>
+        <p:style>
+          <a:lnRef idx="1">
+            <a:schemeClr val="accent1"/>
+          </a:lnRef>
+          <a:fillRef idx="3">
+            <a:schemeClr val="accent1"/>
+          </a:fillRef>
+          <a:effectRef idx="2">
+            <a:schemeClr val="accent1"/>
+          </a:effectRef>
+          <a:fontRef idx="minor">
+            <a:schemeClr val="lt1"/>
+          </a:fontRef>
+        </p:style>
+        <p:txBody>
+          <a:bodyPr rtlCol="0" anchor="ctr"/>
+          <a:lstStyle/>
+          <a:p>
+            <a:pPr algn="ctr"/>
+          </a:p>
+        </p:txBody>
+      </p:sp>
+      <p:sp>
+        <p:nvSpPr>
+          <p:cNvPr id="11" name="TextBox 10"/>
+          <p:cNvSpPr txBox="1"/>
+          <p:nvPr/>
+        </p:nvSpPr>
+        <p:spPr>
+          <a:xfrm>
+            <a:off x="2980944" y="1901952"/>
+            <a:ext cx="1810512" cy="292608"/>
+          </a:xfrm>
+          <a:prstGeom prst="rect">
+            <a:avLst/>
+          </a:prstGeom>
+          <a:noFill/>
+        </p:spPr>
+        <p:txBody>
+          <a:bodyPr wrap="square" lIns="73152" rIns="73152" tIns="36576" bIns="27432" anchor="ctr">
+            <a:spAutoFit/>
+          </a:bodyPr>
+          <a:lstStyle/>
+          <a:p>
+            <a:pPr>
+              <a:defRPr sz="1300" b="1">
+                <a:solidFill>
+                  <a:srgbClr val="112240"/>
+                </a:solidFill>
+                <a:latin typeface="Aptos"/>
+              </a:defRPr>
+            </a:pPr>
+            <a:r>
+              <a:t>İş yeri · POS</a:t>
+            </a:r>
+          </a:p>
+        </p:txBody>
+      </p:sp>
+      <p:sp>
+        <p:nvSpPr>
+          <p:cNvPr id="12" name="TextBox 11"/>
+          <p:cNvSpPr txBox="1"/>
+          <p:nvPr/>
+        </p:nvSpPr>
+        <p:spPr>
+          <a:xfrm>
+            <a:off x="2980944" y="2267712"/>
+            <a:ext cx="1810512" cy="320040"/>
+          </a:xfrm>
+          <a:prstGeom prst="rect">
+            <a:avLst/>
+          </a:prstGeom>
+          <a:noFill/>
+        </p:spPr>
+        <p:txBody>
+          <a:bodyPr wrap="square" lIns="73152" rIns="73152" tIns="36576" bIns="27432" anchor="ctr">
+            <a:spAutoFit/>
+          </a:bodyPr>
+          <a:lstStyle/>
+          <a:p>
+            <a:pPr>
+              <a:defRPr sz="1000" b="0">
+                <a:solidFill>
+                  <a:srgbClr val="637389"/>
+                </a:solidFill>
+                <a:latin typeface="Aptos"/>
+              </a:defRPr>
+            </a:pPr>
+            <a:r>
+              <a:t>Ödemeyi başlatır</a:t>
+            </a:r>
+          </a:p>
+        </p:txBody>
+      </p:sp>
+      <p:sp>
+        <p:nvSpPr>
+          <p:cNvPr id="13" name="Rectangle 12"/>
+          <p:cNvSpPr/>
+          <p:nvPr/>
+        </p:nvSpPr>
+        <p:spPr>
+          <a:xfrm>
+            <a:off x="5065776" y="1755648"/>
+            <a:ext cx="2039112" cy="987552"/>
+          </a:xfrm>
+          <a:prstGeom prst="rect">
+            <a:avLst/>
+          </a:prstGeom>
+          <a:solidFill>
+            <a:srgbClr val="FFFFFF"/>
+          </a:solidFill>
+          <a:ln>
+            <a:noFill/>
+          </a:ln>
+        </p:spPr>
+        <p:style>
+          <a:lnRef idx="1">
+            <a:schemeClr val="accent1"/>
+          </a:lnRef>
+          <a:fillRef idx="3">
+            <a:schemeClr val="accent1"/>
+          </a:fillRef>
+          <a:effectRef idx="2">
+            <a:schemeClr val="accent1"/>
+          </a:effectRef>
+          <a:fontRef idx="minor">
+            <a:schemeClr val="lt1"/>
+          </a:fontRef>
+        </p:style>
+        <p:txBody>
+          <a:bodyPr rtlCol="0" anchor="ctr"/>
+          <a:lstStyle/>
+          <a:p>
+            <a:pPr algn="ctr"/>
+          </a:p>
+        </p:txBody>
+      </p:sp>
+      <p:sp>
+        <p:nvSpPr>
+          <p:cNvPr id="14" name="Rectangle 13"/>
+          <p:cNvSpPr/>
+          <p:nvPr/>
+        </p:nvSpPr>
+        <p:spPr>
+          <a:xfrm>
+            <a:off x="5065776" y="1755648"/>
+            <a:ext cx="64008" cy="987552"/>
+          </a:xfrm>
+          <a:prstGeom prst="rect">
+            <a:avLst/>
+          </a:prstGeom>
+          <a:solidFill>
+            <a:srgbClr val="F8BC4A"/>
+          </a:solidFill>
+          <a:ln>
+            <a:noFill/>
+          </a:ln>
+        </p:spPr>
+        <p:style>
+          <a:lnRef idx="1">
+            <a:schemeClr val="accent1"/>
+          </a:lnRef>
+          <a:fillRef idx="3">
+            <a:schemeClr val="accent1"/>
+          </a:fillRef>
+          <a:effectRef idx="2">
+            <a:schemeClr val="accent1"/>
+          </a:effectRef>
+          <a:fontRef idx="minor">
+            <a:schemeClr val="lt1"/>
+          </a:fontRef>
+        </p:style>
+        <p:txBody>
+          <a:bodyPr rtlCol="0" anchor="ctr"/>
+          <a:lstStyle/>
+          <a:p>
+            <a:pPr algn="ctr"/>
+          </a:p>
+        </p:txBody>
+      </p:sp>
+      <p:sp>
+        <p:nvSpPr>
+          <p:cNvPr id="15" name="TextBox 14"/>
+          <p:cNvSpPr txBox="1"/>
+          <p:nvPr/>
+        </p:nvSpPr>
+        <p:spPr>
+          <a:xfrm>
+            <a:off x="5202936" y="1901952"/>
+            <a:ext cx="1810512" cy="292608"/>
+          </a:xfrm>
+          <a:prstGeom prst="rect">
+            <a:avLst/>
+          </a:prstGeom>
+          <a:noFill/>
+        </p:spPr>
+        <p:txBody>
+          <a:bodyPr wrap="square" lIns="73152" rIns="73152" tIns="36576" bIns="27432" anchor="ctr">
+            <a:spAutoFit/>
+          </a:bodyPr>
+          <a:lstStyle/>
+          <a:p>
+            <a:pPr>
+              <a:defRPr sz="1300" b="1">
+                <a:solidFill>
+                  <a:srgbClr val="112240"/>
+                </a:solidFill>
+                <a:latin typeface="Aptos"/>
+              </a:defRPr>
+            </a:pPr>
+            <a:r>
+              <a:t>Gateway · Acquirer</a:t>
+            </a:r>
+          </a:p>
+        </p:txBody>
+      </p:sp>
+      <p:sp>
+        <p:nvSpPr>
+          <p:cNvPr id="16" name="TextBox 15"/>
+          <p:cNvSpPr txBox="1"/>
+          <p:nvPr/>
+        </p:nvSpPr>
+        <p:spPr>
+          <a:xfrm>
+            <a:off x="5202936" y="2267712"/>
+            <a:ext cx="1810512" cy="320040"/>
+          </a:xfrm>
+          <a:prstGeom prst="rect">
+            <a:avLst/>
+          </a:prstGeom>
+          <a:noFill/>
+        </p:spPr>
+        <p:txBody>
+          <a:bodyPr wrap="square" lIns="73152" rIns="73152" tIns="36576" bIns="27432" anchor="ctr">
+            <a:spAutoFit/>
+          </a:bodyPr>
+          <a:lstStyle/>
+          <a:p>
+            <a:pPr>
+              <a:defRPr sz="1000" b="0">
+                <a:solidFill>
+                  <a:srgbClr val="637389"/>
+                </a:solidFill>
+                <a:latin typeface="Aptos"/>
+              </a:defRPr>
+            </a:pPr>
+            <a:r>
+              <a:t>İsteği yönlendirir</a:t>
+            </a:r>
+          </a:p>
+        </p:txBody>
+      </p:sp>
+      <p:sp>
+        <p:nvSpPr>
+          <p:cNvPr id="17" name="Rectangle 16"/>
+          <p:cNvSpPr/>
+          <p:nvPr/>
+        </p:nvSpPr>
+        <p:spPr>
+          <a:xfrm>
+            <a:off x="7287768" y="1755648"/>
+            <a:ext cx="2039112" cy="987552"/>
+          </a:xfrm>
+          <a:prstGeom prst="rect">
+            <a:avLst/>
+          </a:prstGeom>
+          <a:solidFill>
+            <a:srgbClr val="FFFFFF"/>
+          </a:solidFill>
+          <a:ln>
+            <a:noFill/>
+          </a:ln>
+        </p:spPr>
+        <p:style>
+          <a:lnRef idx="1">
+            <a:schemeClr val="accent1"/>
+          </a:lnRef>
+          <a:fillRef idx="3">
+            <a:schemeClr val="accent1"/>
+          </a:fillRef>
+          <a:effectRef idx="2">
+            <a:schemeClr val="accent1"/>
+          </a:effectRef>
+          <a:fontRef idx="minor">
+            <a:schemeClr val="lt1"/>
+          </a:fontRef>
+        </p:style>
+        <p:txBody>
+          <a:bodyPr rtlCol="0" anchor="ctr"/>
+          <a:lstStyle/>
+          <a:p>
+            <a:pPr algn="ctr"/>
+          </a:p>
+        </p:txBody>
+      </p:sp>
+      <p:sp>
+        <p:nvSpPr>
+          <p:cNvPr id="18" name="Rectangle 17"/>
+          <p:cNvSpPr/>
+          <p:nvPr/>
+        </p:nvSpPr>
+        <p:spPr>
+          <a:xfrm>
+            <a:off x="7287768" y="1755648"/>
+            <a:ext cx="64008" cy="987552"/>
+          </a:xfrm>
+          <a:prstGeom prst="rect">
+            <a:avLst/>
+          </a:prstGeom>
+          <a:solidFill>
+            <a:srgbClr val="00AFA0"/>
+          </a:solidFill>
+          <a:ln>
+            <a:noFill/>
+          </a:ln>
+        </p:spPr>
+        <p:style>
+          <a:lnRef idx="1">
+            <a:schemeClr val="accent1"/>
+          </a:lnRef>
+          <a:fillRef idx="3">
+            <a:schemeClr val="accent1"/>
+          </a:fillRef>
+          <a:effectRef idx="2">
+            <a:schemeClr val="accent1"/>
+          </a:effectRef>
+          <a:fontRef idx="minor">
+            <a:schemeClr val="lt1"/>
+          </a:fontRef>
+        </p:style>
+        <p:txBody>
+          <a:bodyPr rtlCol="0" anchor="ctr"/>
+          <a:lstStyle/>
+          <a:p>
+            <a:pPr algn="ctr"/>
+          </a:p>
+        </p:txBody>
+      </p:sp>
+      <p:sp>
+        <p:nvSpPr>
+          <p:cNvPr id="19" name="TextBox 18"/>
+          <p:cNvSpPr txBox="1"/>
+          <p:nvPr/>
+        </p:nvSpPr>
+        <p:spPr>
+          <a:xfrm>
+            <a:off x="7424928" y="1901952"/>
+            <a:ext cx="1810512" cy="292608"/>
+          </a:xfrm>
+          <a:prstGeom prst="rect">
+            <a:avLst/>
+          </a:prstGeom>
+          <a:noFill/>
+        </p:spPr>
+        <p:txBody>
+          <a:bodyPr wrap="square" lIns="73152" rIns="73152" tIns="36576" bIns="27432" anchor="ctr">
+            <a:spAutoFit/>
+          </a:bodyPr>
+          <a:lstStyle/>
+          <a:p>
+            <a:pPr>
+              <a:defRPr sz="1300" b="1">
+                <a:solidFill>
+                  <a:srgbClr val="112240"/>
+                </a:solidFill>
+                <a:latin typeface="Aptos"/>
+              </a:defRPr>
+            </a:pPr>
+            <a:r>
+              <a:t>Kart ağı</a:t>
+            </a:r>
+          </a:p>
+        </p:txBody>
+      </p:sp>
+      <p:sp>
+        <p:nvSpPr>
+          <p:cNvPr id="20" name="TextBox 19"/>
+          <p:cNvSpPr txBox="1"/>
+          <p:nvPr/>
+        </p:nvSpPr>
+        <p:spPr>
+          <a:xfrm>
+            <a:off x="7424928" y="2267712"/>
+            <a:ext cx="1810512" cy="320040"/>
+          </a:xfrm>
+          <a:prstGeom prst="rect">
+            <a:avLst/>
+          </a:prstGeom>
+          <a:noFill/>
+        </p:spPr>
+        <p:txBody>
+          <a:bodyPr wrap="square" lIns="73152" rIns="73152" tIns="36576" bIns="27432" anchor="ctr">
+            <a:spAutoFit/>
+          </a:bodyPr>
+          <a:lstStyle/>
+          <a:p>
+            <a:pPr>
+              <a:defRPr sz="1000" b="0">
+                <a:solidFill>
+                  <a:srgbClr val="637389"/>
+                </a:solidFill>
+                <a:latin typeface="Aptos"/>
+              </a:defRPr>
+            </a:pPr>
+            <a:r>
+              <a:t>İşlemi ilgili tarafa taşır</a:t>
+            </a:r>
+          </a:p>
+        </p:txBody>
+      </p:sp>
+      <p:sp>
+        <p:nvSpPr>
+          <p:cNvPr id="21" name="Rectangle 20"/>
+          <p:cNvSpPr/>
+          <p:nvPr/>
+        </p:nvSpPr>
+        <p:spPr>
+          <a:xfrm>
+            <a:off x="9509760" y="1755648"/>
+            <a:ext cx="2039112" cy="987552"/>
+          </a:xfrm>
+          <a:prstGeom prst="rect">
+            <a:avLst/>
+          </a:prstGeom>
+          <a:solidFill>
+            <a:srgbClr val="FFFFFF"/>
+          </a:solidFill>
+          <a:ln>
+            <a:noFill/>
+          </a:ln>
+        </p:spPr>
+        <p:style>
+          <a:lnRef idx="1">
+            <a:schemeClr val="accent1"/>
+          </a:lnRef>
+          <a:fillRef idx="3">
+            <a:schemeClr val="accent1"/>
+          </a:fillRef>
+          <a:effectRef idx="2">
+            <a:schemeClr val="accent1"/>
+          </a:effectRef>
+          <a:fontRef idx="minor">
+            <a:schemeClr val="lt1"/>
+          </a:fontRef>
+        </p:style>
+        <p:txBody>
+          <a:bodyPr rtlCol="0" anchor="ctr"/>
+          <a:lstStyle/>
+          <a:p>
+            <a:pPr algn="ctr"/>
+          </a:p>
+        </p:txBody>
+      </p:sp>
+      <p:sp>
+        <p:nvSpPr>
+          <p:cNvPr id="22" name="Rectangle 21"/>
+          <p:cNvSpPr/>
+          <p:nvPr/>
+        </p:nvSpPr>
+        <p:spPr>
+          <a:xfrm>
+            <a:off x="9509760" y="1755648"/>
+            <a:ext cx="64008" cy="987552"/>
+          </a:xfrm>
+          <a:prstGeom prst="rect">
+            <a:avLst/>
+          </a:prstGeom>
+          <a:solidFill>
+            <a:srgbClr val="D6575E"/>
+          </a:solidFill>
+          <a:ln>
+            <a:noFill/>
+          </a:ln>
+        </p:spPr>
+        <p:style>
+          <a:lnRef idx="1">
+            <a:schemeClr val="accent1"/>
+          </a:lnRef>
+          <a:fillRef idx="3">
+            <a:schemeClr val="accent1"/>
+          </a:fillRef>
+          <a:effectRef idx="2">
+            <a:schemeClr val="accent1"/>
+          </a:effectRef>
+          <a:fontRef idx="minor">
+            <a:schemeClr val="lt1"/>
+          </a:fontRef>
+        </p:style>
+        <p:txBody>
+          <a:bodyPr rtlCol="0" anchor="ctr"/>
+          <a:lstStyle/>
+          <a:p>
+            <a:pPr algn="ctr"/>
+          </a:p>
+        </p:txBody>
+      </p:sp>
+      <p:sp>
+        <p:nvSpPr>
+          <p:cNvPr id="23" name="TextBox 22"/>
+          <p:cNvSpPr txBox="1"/>
+          <p:nvPr/>
+        </p:nvSpPr>
+        <p:spPr>
+          <a:xfrm>
+            <a:off x="9646920" y="1901952"/>
+            <a:ext cx="1810512" cy="292608"/>
+          </a:xfrm>
+          <a:prstGeom prst="rect">
+            <a:avLst/>
+          </a:prstGeom>
+          <a:noFill/>
+        </p:spPr>
+        <p:txBody>
+          <a:bodyPr wrap="square" lIns="73152" rIns="73152" tIns="36576" bIns="27432" anchor="ctr">
+            <a:spAutoFit/>
+          </a:bodyPr>
+          <a:lstStyle/>
+          <a:p>
+            <a:pPr>
+              <a:defRPr sz="1300" b="1">
+                <a:solidFill>
+                  <a:srgbClr val="112240"/>
+                </a:solidFill>
+                <a:latin typeface="Aptos"/>
+              </a:defRPr>
+            </a:pPr>
+            <a:r>
+              <a:t>Issuer</a:t>
+            </a:r>
+          </a:p>
+        </p:txBody>
+      </p:sp>
+      <p:sp>
+        <p:nvSpPr>
+          <p:cNvPr id="24" name="TextBox 23"/>
+          <p:cNvSpPr txBox="1"/>
+          <p:nvPr/>
+        </p:nvSpPr>
+        <p:spPr>
+          <a:xfrm>
+            <a:off x="9646920" y="2267712"/>
+            <a:ext cx="1810512" cy="320040"/>
+          </a:xfrm>
+          <a:prstGeom prst="rect">
+            <a:avLst/>
+          </a:prstGeom>
+          <a:noFill/>
+        </p:spPr>
+        <p:txBody>
+          <a:bodyPr wrap="square" lIns="73152" rIns="73152" tIns="36576" bIns="27432" anchor="ctr">
+            <a:spAutoFit/>
+          </a:bodyPr>
+          <a:lstStyle/>
+          <a:p>
+            <a:pPr>
+              <a:defRPr sz="1000" b="0">
+                <a:solidFill>
+                  <a:srgbClr val="637389"/>
+                </a:solidFill>
+                <a:latin typeface="Aptos"/>
+              </a:defRPr>
+            </a:pPr>
+            <a:r>
+              <a:t>Yetkilendirir veya reddeder</a:t>
+            </a:r>
+          </a:p>
+        </p:txBody>
+      </p:sp>
+      <p:sp>
+        <p:nvSpPr>
+          <p:cNvPr id="25" name="TextBox 24"/>
+          <p:cNvSpPr txBox="1"/>
+          <p:nvPr/>
+        </p:nvSpPr>
+        <p:spPr>
+          <a:xfrm>
+            <a:off x="713232" y="3035808"/>
+            <a:ext cx="2926080" cy="292608"/>
+          </a:xfrm>
+          <a:prstGeom prst="rect">
+            <a:avLst/>
+          </a:prstGeom>
+          <a:noFill/>
+        </p:spPr>
+        <p:txBody>
+          <a:bodyPr wrap="square" lIns="73152" rIns="73152" tIns="36576" bIns="27432" anchor="ctr">
+            <a:spAutoFit/>
+          </a:bodyPr>
+          <a:lstStyle/>
+          <a:p>
+            <a:pPr>
+              <a:defRPr sz="1500" b="1">
+                <a:solidFill>
+                  <a:srgbClr val="112240"/>
+                </a:solidFill>
+                <a:latin typeface="Aptos"/>
+              </a:defRPr>
+            </a:pPr>
+            <a:r>
+              <a:t>İşlem yaşam döngüsü</a:t>
+            </a:r>
+          </a:p>
+        </p:txBody>
+      </p:sp>
+      <p:sp>
+        <p:nvSpPr>
+          <p:cNvPr id="26" name="TextBox 25"/>
+          <p:cNvSpPr txBox="1"/>
+          <p:nvPr/>
+        </p:nvSpPr>
+        <p:spPr>
+          <a:xfrm>
+            <a:off x="713232" y="3401568"/>
+            <a:ext cx="10698480" cy="502920"/>
+          </a:xfrm>
+          <a:prstGeom prst="rect">
+            <a:avLst/>
+          </a:prstGeom>
+          <a:noFill/>
+        </p:spPr>
+        <p:txBody>
+          <a:bodyPr wrap="square" lIns="73152" rIns="73152" tIns="36576" bIns="27432" anchor="ctr">
+            <a:spAutoFit/>
+          </a:bodyPr>
+          <a:lstStyle/>
+          <a:p>
+            <a:pPr>
+              <a:defRPr sz="1300" b="1">
+                <a:solidFill>
+                  <a:srgbClr val="223045"/>
+                </a:solidFill>
+                <a:latin typeface="Aptos"/>
+              </a:defRPr>
+            </a:pPr>
+            <a:r>
+              <a:t>Ödeme başlatma  →  doğrulama / 3-D Secure  →  yetkilendirme  →  capture ve mutabakat  →  iade / ters ibraz</a:t>
+            </a:r>
+          </a:p>
+        </p:txBody>
+      </p:sp>
+      <p:sp>
+        <p:nvSpPr>
+          <p:cNvPr id="27" name="Rectangle 26"/>
+          <p:cNvSpPr/>
+          <p:nvPr/>
+        </p:nvSpPr>
+        <p:spPr>
+          <a:xfrm>
+            <a:off x="621792" y="4160520"/>
+            <a:ext cx="10972800" cy="1170432"/>
+          </a:xfrm>
+          <a:prstGeom prst="rect">
+            <a:avLst/>
+          </a:prstGeom>
+          <a:solidFill>
+            <a:srgbClr val="E7F0FA"/>
+          </a:solidFill>
+          <a:ln>
+            <a:noFill/>
+          </a:ln>
+        </p:spPr>
+        <p:style>
+          <a:lnRef idx="1">
+            <a:schemeClr val="accent1"/>
+          </a:lnRef>
+          <a:fillRef idx="3">
+            <a:schemeClr val="accent1"/>
+          </a:fillRef>
+          <a:effectRef idx="2">
+            <a:schemeClr val="accent1"/>
+          </a:effectRef>
+          <a:fontRef idx="minor">
+            <a:schemeClr val="lt1"/>
+          </a:fontRef>
+        </p:style>
+        <p:txBody>
+          <a:bodyPr rtlCol="0" anchor="ctr"/>
+          <a:lstStyle/>
+          <a:p>
+            <a:pPr algn="ctr"/>
+          </a:p>
+        </p:txBody>
+      </p:sp>
+      <p:sp>
+        <p:nvSpPr>
+          <p:cNvPr id="28" name="TextBox 27"/>
+          <p:cNvSpPr txBox="1"/>
+          <p:nvPr/>
+        </p:nvSpPr>
+        <p:spPr>
+          <a:xfrm>
+            <a:off x="822960" y="4325112"/>
+            <a:ext cx="2560320" cy="292608"/>
+          </a:xfrm>
+          <a:prstGeom prst="rect">
+            <a:avLst/>
+          </a:prstGeom>
+          <a:noFill/>
+        </p:spPr>
+        <p:txBody>
+          <a:bodyPr wrap="square" lIns="73152" rIns="73152" tIns="36576" bIns="27432" anchor="ctr">
+            <a:spAutoFit/>
+          </a:bodyPr>
+          <a:lstStyle/>
+          <a:p>
+            <a:pPr>
+              <a:defRPr sz="1400" b="1">
+                <a:solidFill>
+                  <a:srgbClr val="112240"/>
+                </a:solidFill>
+                <a:latin typeface="Aptos"/>
+              </a:defRPr>
+            </a:pPr>
+            <a:r>
+              <a:t>İncelenebilecek kod alanları</a:t>
+            </a:r>
+          </a:p>
+        </p:txBody>
+      </p:sp>
+      <p:sp>
+        <p:nvSpPr>
+          <p:cNvPr id="29" name="TextBox 28"/>
+          <p:cNvSpPr txBox="1"/>
+          <p:nvPr/>
+        </p:nvSpPr>
+        <p:spPr>
+          <a:xfrm>
+            <a:off x="2834640" y="4279392"/>
+            <a:ext cx="8321040" cy="621792"/>
+          </a:xfrm>
+          <a:prstGeom prst="rect">
+            <a:avLst/>
+          </a:prstGeom>
+          <a:noFill/>
+        </p:spPr>
+        <p:txBody>
+          <a:bodyPr wrap="square" lIns="73152" rIns="73152" tIns="36576" bIns="27432" anchor="ctr">
+            <a:spAutoFit/>
+          </a:bodyPr>
+          <a:lstStyle/>
+          <a:p>
+            <a:pPr>
+              <a:defRPr sz="1100" b="0">
+                <a:solidFill>
+                  <a:srgbClr val="223045"/>
+                </a:solidFill>
+                <a:latin typeface="Aptos"/>
+              </a:defRPr>
+            </a:pPr>
+            <a:r>
+              <a:t>Ödeme API'leri · tutar/para birimi doğrulama · tekrar denemeler ve idempotency · token/PAN maskeleme ve loglar · 3DS/issuer entegrasyonları · RRN/STAN ve mutabakat · iade, iptal ve ters ibraz akışları</a:t>
+            </a:r>
+          </a:p>
+        </p:txBody>
+      </p:sp>
+      <p:sp>
+        <p:nvSpPr>
+          <p:cNvPr id="30" name="TextBox 29"/>
+          <p:cNvSpPr txBox="1"/>
+          <p:nvPr/>
+        </p:nvSpPr>
+        <p:spPr>
+          <a:xfrm>
+            <a:off x="713232" y="5605272"/>
+            <a:ext cx="10698480" cy="329184"/>
+          </a:xfrm>
+          <a:prstGeom prst="rect">
+            <a:avLst/>
+          </a:prstGeom>
+          <a:noFill/>
+        </p:spPr>
+        <p:txBody>
+          <a:bodyPr wrap="square" lIns="73152" rIns="73152" tIns="36576" bIns="27432" anchor="ctr">
+            <a:spAutoFit/>
+          </a:bodyPr>
+          <a:lstStyle/>
+          <a:p>
+            <a:pPr>
+              <a:defRPr sz="1000" b="0">
+                <a:solidFill>
+                  <a:srgbClr val="637389"/>
+                </a:solidFill>
+                <a:latin typeface="Aptos"/>
+              </a:defRPr>
+            </a:pPr>
+            <a:r>
+              <a:t>Bunlar ödeme alanına özgü inceleme başlıklarıdır; tek başına mevzuat hükmü veya doğrulanmış bulgu değildir.</a:t>
             </a:r>
           </a:p>
         </p:txBody>
       </p:sp>
       <p:pic>
         <p:nvPicPr>
-          <p:cNvPr id="5" name="Picture 4" descr="kurulum_asamalari.png"/>
+          <p:cNvPr id="31" name="Picture 30" descr="softtech-logo-light-background.png"/>
           <p:cNvPicPr>
             <a:picLocks noChangeAspect="1"/>
           </p:cNvPicPr>
@@ -20030,66 +21048,6 @@
         </p:nvPicPr>
         <p:blipFill>
           <a:blip r:embed="rId2"/>
-          <a:stretch>
-            <a:fillRect/>
-          </a:stretch>
-        </p:blipFill>
-        <p:spPr>
-          <a:xfrm>
-            <a:off x="621792" y="1664208"/>
-            <a:ext cx="10972800" cy="4315968"/>
-          </a:xfrm>
-          <a:prstGeom prst="rect">
-            <a:avLst/>
-          </a:prstGeom>
-        </p:spPr>
-      </p:pic>
-      <p:sp>
-        <p:nvSpPr>
-          <p:cNvPr id="6" name="TextBox 5"/>
-          <p:cNvSpPr txBox="1"/>
-          <p:nvPr/>
-        </p:nvSpPr>
-        <p:spPr>
-          <a:xfrm>
-            <a:off x="685800" y="6071616"/>
-            <a:ext cx="9235440" cy="402336"/>
-          </a:xfrm>
-          <a:prstGeom prst="rect">
-            <a:avLst/>
-          </a:prstGeom>
-          <a:noFill/>
-        </p:spPr>
-        <p:txBody>
-          <a:bodyPr wrap="square" lIns="73152" rIns="73152" tIns="36576" bIns="27432" anchor="ctr">
-            <a:spAutoFit/>
-          </a:bodyPr>
-          <a:lstStyle/>
-          <a:p>
-            <a:pPr>
-              <a:defRPr sz="900" b="0">
-                <a:solidFill>
-                  <a:srgbClr val="637389"/>
-                </a:solidFill>
-                <a:latin typeface="Aptos"/>
-              </a:defRPr>
-            </a:pPr>
-            <a:r>
-              <a:t>Görsel belge akışını anlatır; Ollama, model, mevzuat indirme ve klonlama adımları ayrıca onay ister.</a:t>
-            </a:r>
-          </a:p>
-        </p:txBody>
-      </p:sp>
-      <p:pic>
-        <p:nvPicPr>
-          <p:cNvPr id="7" name="Picture 6" descr="softtech-logo-light-background.png"/>
-          <p:cNvPicPr>
-            <a:picLocks noChangeAspect="1"/>
-          </p:cNvPicPr>
-          <p:nvPr/>
-        </p:nvPicPr>
-        <p:blipFill>
-          <a:blip r:embed="rId3"/>
           <a:stretch>
             <a:fillRect/>
           </a:stretch>
@@ -20161,7 +21119,7 @@
               </a:defRPr>
             </a:pPr>
             <a:r>
-              <a:t>TEST REPOSU · GERÇEK DOSYA YAPISI</a:t>
+              <a:t>İNCELEME YÖNTEMİ · MEVZUATTAN KOD KANITINA</a:t>
             </a:r>
           </a:p>
         </p:txBody>
@@ -20197,7 +21155,7 @@
               </a:defRPr>
             </a:pPr>
             <a:r>
-              <a:t>İki sentetik demo, on test bulgusu</a:t>
+              <a:t>Her ödeme riski için izlenebilir bir kanıt zinciri</a:t>
             </a:r>
           </a:p>
         </p:txBody>
@@ -20233,14 +21191,797 @@
               </a:defRPr>
             </a:pPr>
             <a:r>
-              <a:t>Depo ağacı mevcut test fixture Git deposundan; içerik yalnızca test için hazırlanmıştır.</a:t>
+              <a:t>Kural, yalnızca seçilen mevzuat kaynağı ve depodaki somut kanıtla eşleştirildiğinde değerlendirilir.</a:t>
+            </a:r>
+          </a:p>
+        </p:txBody>
+      </p:sp>
+      <p:sp>
+        <p:nvSpPr>
+          <p:cNvPr id="5" name="Rectangle 4"/>
+          <p:cNvSpPr/>
+          <p:nvPr/>
+        </p:nvSpPr>
+        <p:spPr>
+          <a:xfrm>
+            <a:off x="621792" y="1828800"/>
+            <a:ext cx="2542032" cy="1371600"/>
+          </a:xfrm>
+          <a:prstGeom prst="rect">
+            <a:avLst/>
+          </a:prstGeom>
+          <a:solidFill>
+            <a:srgbClr val="FFFFFF"/>
+          </a:solidFill>
+          <a:ln>
+            <a:noFill/>
+          </a:ln>
+        </p:spPr>
+        <p:style>
+          <a:lnRef idx="1">
+            <a:schemeClr val="accent1"/>
+          </a:lnRef>
+          <a:fillRef idx="3">
+            <a:schemeClr val="accent1"/>
+          </a:fillRef>
+          <a:effectRef idx="2">
+            <a:schemeClr val="accent1"/>
+          </a:effectRef>
+          <a:fontRef idx="minor">
+            <a:schemeClr val="lt1"/>
+          </a:fontRef>
+        </p:style>
+        <p:txBody>
+          <a:bodyPr rtlCol="0" anchor="ctr"/>
+          <a:lstStyle/>
+          <a:p>
+            <a:pPr algn="ctr"/>
+          </a:p>
+        </p:txBody>
+      </p:sp>
+      <p:sp>
+        <p:nvSpPr>
+          <p:cNvPr id="6" name="Rectangle 5"/>
+          <p:cNvSpPr/>
+          <p:nvPr/>
+        </p:nvSpPr>
+        <p:spPr>
+          <a:xfrm>
+            <a:off x="621792" y="1828800"/>
+            <a:ext cx="2542032" cy="82296"/>
+          </a:xfrm>
+          <a:prstGeom prst="rect">
+            <a:avLst/>
+          </a:prstGeom>
+          <a:solidFill>
+            <a:srgbClr val="00AFA0"/>
+          </a:solidFill>
+          <a:ln>
+            <a:noFill/>
+          </a:ln>
+        </p:spPr>
+        <p:style>
+          <a:lnRef idx="1">
+            <a:schemeClr val="accent1"/>
+          </a:lnRef>
+          <a:fillRef idx="3">
+            <a:schemeClr val="accent1"/>
+          </a:fillRef>
+          <a:effectRef idx="2">
+            <a:schemeClr val="accent1"/>
+          </a:effectRef>
+          <a:fontRef idx="minor">
+            <a:schemeClr val="lt1"/>
+          </a:fontRef>
+        </p:style>
+        <p:txBody>
+          <a:bodyPr rtlCol="0" anchor="ctr"/>
+          <a:lstStyle/>
+          <a:p>
+            <a:pPr algn="ctr"/>
+          </a:p>
+        </p:txBody>
+      </p:sp>
+      <p:sp>
+        <p:nvSpPr>
+          <p:cNvPr id="7" name="TextBox 6"/>
+          <p:cNvSpPr txBox="1"/>
+          <p:nvPr/>
+        </p:nvSpPr>
+        <p:spPr>
+          <a:xfrm>
+            <a:off x="768096" y="2039112"/>
+            <a:ext cx="2249424" cy="310896"/>
+          </a:xfrm>
+          <a:prstGeom prst="rect">
+            <a:avLst/>
+          </a:prstGeom>
+          <a:noFill/>
+        </p:spPr>
+        <p:txBody>
+          <a:bodyPr wrap="square" lIns="73152" rIns="73152" tIns="36576" bIns="27432" anchor="ctr">
+            <a:spAutoFit/>
+          </a:bodyPr>
+          <a:lstStyle/>
+          <a:p>
+            <a:pPr>
+              <a:defRPr sz="1500" b="1">
+                <a:solidFill>
+                  <a:srgbClr val="112240"/>
+                </a:solidFill>
+                <a:latin typeface="Aptos"/>
+              </a:defRPr>
+            </a:pPr>
+            <a:r>
+              <a:t>1 · Kaynak</a:t>
+            </a:r>
+          </a:p>
+        </p:txBody>
+      </p:sp>
+      <p:sp>
+        <p:nvSpPr>
+          <p:cNvPr id="8" name="TextBox 7"/>
+          <p:cNvSpPr txBox="1"/>
+          <p:nvPr/>
+        </p:nvSpPr>
+        <p:spPr>
+          <a:xfrm>
+            <a:off x="768096" y="2487168"/>
+            <a:ext cx="2249424" cy="530352"/>
+          </a:xfrm>
+          <a:prstGeom prst="rect">
+            <a:avLst/>
+          </a:prstGeom>
+          <a:noFill/>
+        </p:spPr>
+        <p:txBody>
+          <a:bodyPr wrap="square" lIns="73152" rIns="73152" tIns="36576" bIns="27432" anchor="ctr">
+            <a:spAutoFit/>
+          </a:bodyPr>
+          <a:lstStyle/>
+          <a:p>
+            <a:pPr>
+              <a:defRPr sz="1100" b="0">
+                <a:solidFill>
+                  <a:srgbClr val="223045"/>
+                </a:solidFill>
+                <a:latin typeface="Aptos"/>
+              </a:defRPr>
+            </a:pPr>
+            <a:r>
+              <a:t>Kullanıcı mevzuat belgesini ve kapsamı seçer.</a:t>
+            </a:r>
+          </a:p>
+        </p:txBody>
+      </p:sp>
+      <p:sp>
+        <p:nvSpPr>
+          <p:cNvPr id="9" name="Rectangle 8"/>
+          <p:cNvSpPr/>
+          <p:nvPr/>
+        </p:nvSpPr>
+        <p:spPr>
+          <a:xfrm>
+            <a:off x="3410712" y="1828800"/>
+            <a:ext cx="2542032" cy="1371600"/>
+          </a:xfrm>
+          <a:prstGeom prst="rect">
+            <a:avLst/>
+          </a:prstGeom>
+          <a:solidFill>
+            <a:srgbClr val="FFFFFF"/>
+          </a:solidFill>
+          <a:ln>
+            <a:noFill/>
+          </a:ln>
+        </p:spPr>
+        <p:style>
+          <a:lnRef idx="1">
+            <a:schemeClr val="accent1"/>
+          </a:lnRef>
+          <a:fillRef idx="3">
+            <a:schemeClr val="accent1"/>
+          </a:fillRef>
+          <a:effectRef idx="2">
+            <a:schemeClr val="accent1"/>
+          </a:effectRef>
+          <a:fontRef idx="minor">
+            <a:schemeClr val="lt1"/>
+          </a:fontRef>
+        </p:style>
+        <p:txBody>
+          <a:bodyPr rtlCol="0" anchor="ctr"/>
+          <a:lstStyle/>
+          <a:p>
+            <a:pPr algn="ctr"/>
+          </a:p>
+        </p:txBody>
+      </p:sp>
+      <p:sp>
+        <p:nvSpPr>
+          <p:cNvPr id="10" name="Rectangle 9"/>
+          <p:cNvSpPr/>
+          <p:nvPr/>
+        </p:nvSpPr>
+        <p:spPr>
+          <a:xfrm>
+            <a:off x="3410712" y="1828800"/>
+            <a:ext cx="2542032" cy="82296"/>
+          </a:xfrm>
+          <a:prstGeom prst="rect">
+            <a:avLst/>
+          </a:prstGeom>
+          <a:solidFill>
+            <a:srgbClr val="35BED7"/>
+          </a:solidFill>
+          <a:ln>
+            <a:noFill/>
+          </a:ln>
+        </p:spPr>
+        <p:style>
+          <a:lnRef idx="1">
+            <a:schemeClr val="accent1"/>
+          </a:lnRef>
+          <a:fillRef idx="3">
+            <a:schemeClr val="accent1"/>
+          </a:fillRef>
+          <a:effectRef idx="2">
+            <a:schemeClr val="accent1"/>
+          </a:effectRef>
+          <a:fontRef idx="minor">
+            <a:schemeClr val="lt1"/>
+          </a:fontRef>
+        </p:style>
+        <p:txBody>
+          <a:bodyPr rtlCol="0" anchor="ctr"/>
+          <a:lstStyle/>
+          <a:p>
+            <a:pPr algn="ctr"/>
+          </a:p>
+        </p:txBody>
+      </p:sp>
+      <p:sp>
+        <p:nvSpPr>
+          <p:cNvPr id="11" name="TextBox 10"/>
+          <p:cNvSpPr txBox="1"/>
+          <p:nvPr/>
+        </p:nvSpPr>
+        <p:spPr>
+          <a:xfrm>
+            <a:off x="3557016" y="2039112"/>
+            <a:ext cx="2249424" cy="310896"/>
+          </a:xfrm>
+          <a:prstGeom prst="rect">
+            <a:avLst/>
+          </a:prstGeom>
+          <a:noFill/>
+        </p:spPr>
+        <p:txBody>
+          <a:bodyPr wrap="square" lIns="73152" rIns="73152" tIns="36576" bIns="27432" anchor="ctr">
+            <a:spAutoFit/>
+          </a:bodyPr>
+          <a:lstStyle/>
+          <a:p>
+            <a:pPr>
+              <a:defRPr sz="1500" b="1">
+                <a:solidFill>
+                  <a:srgbClr val="112240"/>
+                </a:solidFill>
+                <a:latin typeface="Aptos"/>
+              </a:defRPr>
+            </a:pPr>
+            <a:r>
+              <a:t>2 · RAG</a:t>
+            </a:r>
+          </a:p>
+        </p:txBody>
+      </p:sp>
+      <p:sp>
+        <p:nvSpPr>
+          <p:cNvPr id="12" name="TextBox 11"/>
+          <p:cNvSpPr txBox="1"/>
+          <p:nvPr/>
+        </p:nvSpPr>
+        <p:spPr>
+          <a:xfrm>
+            <a:off x="3557016" y="2487168"/>
+            <a:ext cx="2249424" cy="530352"/>
+          </a:xfrm>
+          <a:prstGeom prst="rect">
+            <a:avLst/>
+          </a:prstGeom>
+          <a:noFill/>
+        </p:spPr>
+        <p:txBody>
+          <a:bodyPr wrap="square" lIns="73152" rIns="73152" tIns="36576" bIns="27432" anchor="ctr">
+            <a:spAutoFit/>
+          </a:bodyPr>
+          <a:lstStyle/>
+          <a:p>
+            <a:pPr>
+              <a:defRPr sz="1100" b="0">
+                <a:solidFill>
+                  <a:srgbClr val="223045"/>
+                </a:solidFill>
+                <a:latin typeface="Aptos"/>
+              </a:defRPr>
+            </a:pPr>
+            <a:r>
+              <a:t>Metin parçaları kaynak, sayfa ve konum bilgisiyle aranır.</a:t>
+            </a:r>
+          </a:p>
+        </p:txBody>
+      </p:sp>
+      <p:sp>
+        <p:nvSpPr>
+          <p:cNvPr id="13" name="Rectangle 12"/>
+          <p:cNvSpPr/>
+          <p:nvPr/>
+        </p:nvSpPr>
+        <p:spPr>
+          <a:xfrm>
+            <a:off x="6199631" y="1828800"/>
+            <a:ext cx="2542032" cy="1371600"/>
+          </a:xfrm>
+          <a:prstGeom prst="rect">
+            <a:avLst/>
+          </a:prstGeom>
+          <a:solidFill>
+            <a:srgbClr val="FFFFFF"/>
+          </a:solidFill>
+          <a:ln>
+            <a:noFill/>
+          </a:ln>
+        </p:spPr>
+        <p:style>
+          <a:lnRef idx="1">
+            <a:schemeClr val="accent1"/>
+          </a:lnRef>
+          <a:fillRef idx="3">
+            <a:schemeClr val="accent1"/>
+          </a:fillRef>
+          <a:effectRef idx="2">
+            <a:schemeClr val="accent1"/>
+          </a:effectRef>
+          <a:fontRef idx="minor">
+            <a:schemeClr val="lt1"/>
+          </a:fontRef>
+        </p:style>
+        <p:txBody>
+          <a:bodyPr rtlCol="0" anchor="ctr"/>
+          <a:lstStyle/>
+          <a:p>
+            <a:pPr algn="ctr"/>
+          </a:p>
+        </p:txBody>
+      </p:sp>
+      <p:sp>
+        <p:nvSpPr>
+          <p:cNvPr id="14" name="Rectangle 13"/>
+          <p:cNvSpPr/>
+          <p:nvPr/>
+        </p:nvSpPr>
+        <p:spPr>
+          <a:xfrm>
+            <a:off x="6199631" y="1828800"/>
+            <a:ext cx="2542032" cy="82296"/>
+          </a:xfrm>
+          <a:prstGeom prst="rect">
+            <a:avLst/>
+          </a:prstGeom>
+          <a:solidFill>
+            <a:srgbClr val="F8BC4A"/>
+          </a:solidFill>
+          <a:ln>
+            <a:noFill/>
+          </a:ln>
+        </p:spPr>
+        <p:style>
+          <a:lnRef idx="1">
+            <a:schemeClr val="accent1"/>
+          </a:lnRef>
+          <a:fillRef idx="3">
+            <a:schemeClr val="accent1"/>
+          </a:fillRef>
+          <a:effectRef idx="2">
+            <a:schemeClr val="accent1"/>
+          </a:effectRef>
+          <a:fontRef idx="minor">
+            <a:schemeClr val="lt1"/>
+          </a:fontRef>
+        </p:style>
+        <p:txBody>
+          <a:bodyPr rtlCol="0" anchor="ctr"/>
+          <a:lstStyle/>
+          <a:p>
+            <a:pPr algn="ctr"/>
+          </a:p>
+        </p:txBody>
+      </p:sp>
+      <p:sp>
+        <p:nvSpPr>
+          <p:cNvPr id="15" name="TextBox 14"/>
+          <p:cNvSpPr txBox="1"/>
+          <p:nvPr/>
+        </p:nvSpPr>
+        <p:spPr>
+          <a:xfrm>
+            <a:off x="6345936" y="2039112"/>
+            <a:ext cx="2249424" cy="310896"/>
+          </a:xfrm>
+          <a:prstGeom prst="rect">
+            <a:avLst/>
+          </a:prstGeom>
+          <a:noFill/>
+        </p:spPr>
+        <p:txBody>
+          <a:bodyPr wrap="square" lIns="73152" rIns="73152" tIns="36576" bIns="27432" anchor="ctr">
+            <a:spAutoFit/>
+          </a:bodyPr>
+          <a:lstStyle/>
+          <a:p>
+            <a:pPr>
+              <a:defRPr sz="1500" b="1">
+                <a:solidFill>
+                  <a:srgbClr val="112240"/>
+                </a:solidFill>
+                <a:latin typeface="Aptos"/>
+              </a:defRPr>
+            </a:pPr>
+            <a:r>
+              <a:t>3 · Kod</a:t>
+            </a:r>
+          </a:p>
+        </p:txBody>
+      </p:sp>
+      <p:sp>
+        <p:nvSpPr>
+          <p:cNvPr id="16" name="TextBox 15"/>
+          <p:cNvSpPr txBox="1"/>
+          <p:nvPr/>
+        </p:nvSpPr>
+        <p:spPr>
+          <a:xfrm>
+            <a:off x="6345936" y="2487168"/>
+            <a:ext cx="2249424" cy="530352"/>
+          </a:xfrm>
+          <a:prstGeom prst="rect">
+            <a:avLst/>
+          </a:prstGeom>
+          <a:noFill/>
+        </p:spPr>
+        <p:txBody>
+          <a:bodyPr wrap="square" lIns="73152" rIns="73152" tIns="36576" bIns="27432" anchor="ctr">
+            <a:spAutoFit/>
+          </a:bodyPr>
+          <a:lstStyle/>
+          <a:p>
+            <a:pPr>
+              <a:defRPr sz="1100" b="0">
+                <a:solidFill>
+                  <a:srgbClr val="223045"/>
+                </a:solidFill>
+                <a:latin typeface="Aptos"/>
+              </a:defRPr>
+            </a:pPr>
+            <a:r>
+              <a:t>Ödeme akışındaki dosya/satır, ilgili parçayla karşılaştırılır.</a:t>
+            </a:r>
+          </a:p>
+        </p:txBody>
+      </p:sp>
+      <p:sp>
+        <p:nvSpPr>
+          <p:cNvPr id="17" name="Rectangle 16"/>
+          <p:cNvSpPr/>
+          <p:nvPr/>
+        </p:nvSpPr>
+        <p:spPr>
+          <a:xfrm>
+            <a:off x="8988551" y="1828800"/>
+            <a:ext cx="2542032" cy="1371600"/>
+          </a:xfrm>
+          <a:prstGeom prst="rect">
+            <a:avLst/>
+          </a:prstGeom>
+          <a:solidFill>
+            <a:srgbClr val="FFFFFF"/>
+          </a:solidFill>
+          <a:ln>
+            <a:noFill/>
+          </a:ln>
+        </p:spPr>
+        <p:style>
+          <a:lnRef idx="1">
+            <a:schemeClr val="accent1"/>
+          </a:lnRef>
+          <a:fillRef idx="3">
+            <a:schemeClr val="accent1"/>
+          </a:fillRef>
+          <a:effectRef idx="2">
+            <a:schemeClr val="accent1"/>
+          </a:effectRef>
+          <a:fontRef idx="minor">
+            <a:schemeClr val="lt1"/>
+          </a:fontRef>
+        </p:style>
+        <p:txBody>
+          <a:bodyPr rtlCol="0" anchor="ctr"/>
+          <a:lstStyle/>
+          <a:p>
+            <a:pPr algn="ctr"/>
+          </a:p>
+        </p:txBody>
+      </p:sp>
+      <p:sp>
+        <p:nvSpPr>
+          <p:cNvPr id="18" name="Rectangle 17"/>
+          <p:cNvSpPr/>
+          <p:nvPr/>
+        </p:nvSpPr>
+        <p:spPr>
+          <a:xfrm>
+            <a:off x="8988551" y="1828800"/>
+            <a:ext cx="2542032" cy="82296"/>
+          </a:xfrm>
+          <a:prstGeom prst="rect">
+            <a:avLst/>
+          </a:prstGeom>
+          <a:solidFill>
+            <a:srgbClr val="D6575E"/>
+          </a:solidFill>
+          <a:ln>
+            <a:noFill/>
+          </a:ln>
+        </p:spPr>
+        <p:style>
+          <a:lnRef idx="1">
+            <a:schemeClr val="accent1"/>
+          </a:lnRef>
+          <a:fillRef idx="3">
+            <a:schemeClr val="accent1"/>
+          </a:fillRef>
+          <a:effectRef idx="2">
+            <a:schemeClr val="accent1"/>
+          </a:effectRef>
+          <a:fontRef idx="minor">
+            <a:schemeClr val="lt1"/>
+          </a:fontRef>
+        </p:style>
+        <p:txBody>
+          <a:bodyPr rtlCol="0" anchor="ctr"/>
+          <a:lstStyle/>
+          <a:p>
+            <a:pPr algn="ctr"/>
+          </a:p>
+        </p:txBody>
+      </p:sp>
+      <p:sp>
+        <p:nvSpPr>
+          <p:cNvPr id="19" name="TextBox 18"/>
+          <p:cNvSpPr txBox="1"/>
+          <p:nvPr/>
+        </p:nvSpPr>
+        <p:spPr>
+          <a:xfrm>
+            <a:off x="9134855" y="2039112"/>
+            <a:ext cx="2249424" cy="310896"/>
+          </a:xfrm>
+          <a:prstGeom prst="rect">
+            <a:avLst/>
+          </a:prstGeom>
+          <a:noFill/>
+        </p:spPr>
+        <p:txBody>
+          <a:bodyPr wrap="square" lIns="73152" rIns="73152" tIns="36576" bIns="27432" anchor="ctr">
+            <a:spAutoFit/>
+          </a:bodyPr>
+          <a:lstStyle/>
+          <a:p>
+            <a:pPr>
+              <a:defRPr sz="1500" b="1">
+                <a:solidFill>
+                  <a:srgbClr val="112240"/>
+                </a:solidFill>
+                <a:latin typeface="Aptos"/>
+              </a:defRPr>
+            </a:pPr>
+            <a:r>
+              <a:t>4 · Rapor</a:t>
+            </a:r>
+          </a:p>
+        </p:txBody>
+      </p:sp>
+      <p:sp>
+        <p:nvSpPr>
+          <p:cNvPr id="20" name="TextBox 19"/>
+          <p:cNvSpPr txBox="1"/>
+          <p:nvPr/>
+        </p:nvSpPr>
+        <p:spPr>
+          <a:xfrm>
+            <a:off x="9134855" y="2487168"/>
+            <a:ext cx="2249424" cy="530352"/>
+          </a:xfrm>
+          <a:prstGeom prst="rect">
+            <a:avLst/>
+          </a:prstGeom>
+          <a:noFill/>
+        </p:spPr>
+        <p:txBody>
+          <a:bodyPr wrap="square" lIns="73152" rIns="73152" tIns="36576" bIns="27432" anchor="ctr">
+            <a:spAutoFit/>
+          </a:bodyPr>
+          <a:lstStyle/>
+          <a:p>
+            <a:pPr>
+              <a:defRPr sz="1100" b="0">
+                <a:solidFill>
+                  <a:srgbClr val="223045"/>
+                </a:solidFill>
+                <a:latin typeface="Aptos"/>
+              </a:defRPr>
+            </a:pPr>
+            <a:r>
+              <a:t>Kanıt, atıf, önem ve sınırlama kullanıcıya sunulur.</a:t>
+            </a:r>
+          </a:p>
+        </p:txBody>
+      </p:sp>
+      <p:sp>
+        <p:nvSpPr>
+          <p:cNvPr id="21" name="Rectangle 20"/>
+          <p:cNvSpPr/>
+          <p:nvPr/>
+        </p:nvSpPr>
+        <p:spPr>
+          <a:xfrm>
+            <a:off x="621792" y="3685032"/>
+            <a:ext cx="10972800" cy="1234440"/>
+          </a:xfrm>
+          <a:prstGeom prst="rect">
+            <a:avLst/>
+          </a:prstGeom>
+          <a:solidFill>
+            <a:srgbClr val="FFF6DF"/>
+          </a:solidFill>
+          <a:ln>
+            <a:noFill/>
+          </a:ln>
+        </p:spPr>
+        <p:style>
+          <a:lnRef idx="1">
+            <a:schemeClr val="accent1"/>
+          </a:lnRef>
+          <a:fillRef idx="3">
+            <a:schemeClr val="accent1"/>
+          </a:fillRef>
+          <a:effectRef idx="2">
+            <a:schemeClr val="accent1"/>
+          </a:effectRef>
+          <a:fontRef idx="minor">
+            <a:schemeClr val="lt1"/>
+          </a:fontRef>
+        </p:style>
+        <p:txBody>
+          <a:bodyPr rtlCol="0" anchor="ctr"/>
+          <a:lstStyle/>
+          <a:p>
+            <a:pPr algn="ctr"/>
+          </a:p>
+        </p:txBody>
+      </p:sp>
+      <p:sp>
+        <p:nvSpPr>
+          <p:cNvPr id="22" name="TextBox 21"/>
+          <p:cNvSpPr txBox="1"/>
+          <p:nvPr/>
+        </p:nvSpPr>
+        <p:spPr>
+          <a:xfrm>
+            <a:off x="841248" y="3858768"/>
+            <a:ext cx="3291840" cy="310896"/>
+          </a:xfrm>
+          <a:prstGeom prst="rect">
+            <a:avLst/>
+          </a:prstGeom>
+          <a:noFill/>
+        </p:spPr>
+        <p:txBody>
+          <a:bodyPr wrap="square" lIns="73152" rIns="73152" tIns="36576" bIns="27432" anchor="ctr">
+            <a:spAutoFit/>
+          </a:bodyPr>
+          <a:lstStyle/>
+          <a:p>
+            <a:pPr>
+              <a:defRPr sz="1400" b="1">
+                <a:solidFill>
+                  <a:srgbClr val="112240"/>
+                </a:solidFill>
+                <a:latin typeface="Aptos"/>
+              </a:defRPr>
+            </a:pPr>
+            <a:r>
+              <a:t>Ödeme alanındaki örnek kontrol soruları</a:t>
+            </a:r>
+          </a:p>
+        </p:txBody>
+      </p:sp>
+      <p:sp>
+        <p:nvSpPr>
+          <p:cNvPr id="23" name="TextBox 22"/>
+          <p:cNvSpPr txBox="1"/>
+          <p:nvPr/>
+        </p:nvSpPr>
+        <p:spPr>
+          <a:xfrm>
+            <a:off x="3794760" y="3822191"/>
+            <a:ext cx="7452360" cy="658368"/>
+          </a:xfrm>
+          <a:prstGeom prst="rect">
+            <a:avLst/>
+          </a:prstGeom>
+          <a:noFill/>
+        </p:spPr>
+        <p:txBody>
+          <a:bodyPr wrap="square" lIns="73152" rIns="73152" tIns="36576" bIns="27432" anchor="ctr">
+            <a:spAutoFit/>
+          </a:bodyPr>
+          <a:lstStyle/>
+          <a:p>
+            <a:pPr>
+              <a:defRPr sz="1100" b="0">
+                <a:solidFill>
+                  <a:srgbClr val="223045"/>
+                </a:solidFill>
+                <a:latin typeface="Aptos"/>
+              </a:defRPr>
+            </a:pPr>
+            <a:r>
+              <a:t>Zaman aşımı aynı ödemenin iki kez alınmasına yol açabilir mi? Hassas kart verisi loglanıyor mu? İade/iptal doğru işlemle ilişkilendiriliyor mu? Tutar ve para birimi tutarlı mı?</a:t>
+            </a:r>
+          </a:p>
+        </p:txBody>
+      </p:sp>
+      <p:sp>
+        <p:nvSpPr>
+          <p:cNvPr id="24" name="TextBox 23"/>
+          <p:cNvSpPr txBox="1"/>
+          <p:nvPr/>
+        </p:nvSpPr>
+        <p:spPr>
+          <a:xfrm>
+            <a:off x="713232" y="5285232"/>
+            <a:ext cx="10698480" cy="411480"/>
+          </a:xfrm>
+          <a:prstGeom prst="rect">
+            <a:avLst/>
+          </a:prstGeom>
+          <a:noFill/>
+        </p:spPr>
+        <p:txBody>
+          <a:bodyPr wrap="square" lIns="73152" rIns="73152" tIns="36576" bIns="27432" anchor="ctr">
+            <a:spAutoFit/>
+          </a:bodyPr>
+          <a:lstStyle/>
+          <a:p>
+            <a:pPr>
+              <a:defRPr sz="1000" b="0">
+                <a:solidFill>
+                  <a:srgbClr val="637389"/>
+                </a:solidFill>
+                <a:latin typeface="Aptos"/>
+              </a:defRPr>
+            </a:pPr>
+            <a:r>
+              <a:t>Sorular inceleme rehberidir; PCI/şema uyumu veya hukuki uygunluk iddiası değildir. Uzman doğrulaması ve kullanıcı onayı gerekir.</a:t>
             </a:r>
           </a:p>
         </p:txBody>
       </p:sp>
       <p:pic>
         <p:nvPicPr>
-          <p:cNvPr id="5" name="Picture 4" descr="sentetik_test_deposu.png"/>
+          <p:cNvPr id="25" name="Picture 24" descr="softtech-logo-light-background.png"/>
           <p:cNvPicPr>
             <a:picLocks noChangeAspect="1"/>
           </p:cNvPicPr>
@@ -20248,66 +21989,6 @@
         </p:nvPicPr>
         <p:blipFill>
           <a:blip r:embed="rId2"/>
-          <a:stretch>
-            <a:fillRect/>
-          </a:stretch>
-        </p:blipFill>
-        <p:spPr>
-          <a:xfrm>
-            <a:off x="621792" y="1664208"/>
-            <a:ext cx="10972800" cy="4315968"/>
-          </a:xfrm>
-          <a:prstGeom prst="rect">
-            <a:avLst/>
-          </a:prstGeom>
-        </p:spPr>
-      </p:pic>
-      <p:sp>
-        <p:nvSpPr>
-          <p:cNvPr id="6" name="TextBox 5"/>
-          <p:cNvSpPr txBox="1"/>
-          <p:nvPr/>
-        </p:nvSpPr>
-        <p:spPr>
-          <a:xfrm>
-            <a:off x="685800" y="6071616"/>
-            <a:ext cx="9235440" cy="402336"/>
-          </a:xfrm>
-          <a:prstGeom prst="rect">
-            <a:avLst/>
-          </a:prstGeom>
-          <a:noFill/>
-        </p:spPr>
-        <p:txBody>
-          <a:bodyPr wrap="square" lIns="73152" rIns="73152" tIns="36576" bIns="27432" anchor="ctr">
-            <a:spAutoFit/>
-          </a:bodyPr>
-          <a:lstStyle/>
-          <a:p>
-            <a:pPr>
-              <a:defRPr sz="900" b="0">
-                <a:solidFill>
-                  <a:srgbClr val="637389"/>
-                </a:solidFill>
-                <a:latin typeface="Aptos"/>
-              </a:defRPr>
-            </a:pPr>
-            <a:r>
-              <a:t>Sentetik fixture; gerçek sistem veya gerçek mevzuat bulgusu değildir.</a:t>
-            </a:r>
-          </a:p>
-        </p:txBody>
-      </p:sp>
-      <p:pic>
-        <p:nvPicPr>
-          <p:cNvPr id="7" name="Picture 6" descr="softtech-logo-light-background.png"/>
-          <p:cNvPicPr>
-            <a:picLocks noChangeAspect="1"/>
-          </p:cNvPicPr>
-          <p:nvPr/>
-        </p:nvPicPr>
-        <p:blipFill>
-          <a:blip r:embed="rId3"/>
           <a:stretch>
             <a:fillRect/>
           </a:stretch>
@@ -20379,7 +22060,7 @@
               </a:defRPr>
             </a:pPr>
             <a:r>
-              <a:t>REMEDIATION · DIFF + TEST</a:t>
+              <a:t>KURULUM · AŞAMA GÖRSELİ</a:t>
             </a:r>
           </a:p>
         </p:txBody>
@@ -20415,7 +22096,7 @@
               </a:defRPr>
             </a:pPr>
             <a:r>
-              <a:t>Önce / sonra farkı ve kabul testi</a:t>
+              <a:t>Kurulum aşamaları ve açık onay kapıları</a:t>
             </a:r>
           </a:p>
         </p:txBody>
@@ -20451,14 +22132,14 @@
               </a:defRPr>
             </a:pPr>
             <a:r>
-              <a:t>Görsel, izole remediation worktree raporundaki iki örnek değişikliği ve test raporunu gösterir.</a:t>
+              <a:t>install.sh kaynak kodundan sıralandı; bu makinede yapılmış bir kurulum kaydı olarak sunulmaz.</a:t>
             </a:r>
           </a:p>
         </p:txBody>
       </p:sp>
       <p:pic>
         <p:nvPicPr>
-          <p:cNvPr id="5" name="Picture 4" descr="remediation_diff_ve_test.png"/>
+          <p:cNvPr id="5" name="Picture 4" descr="kurulum_asamalari.png"/>
           <p:cNvPicPr>
             <a:picLocks noChangeAspect="1"/>
           </p:cNvPicPr>
@@ -20511,7 +22192,7 @@
               </a:defRPr>
             </a:pPr>
             <a:r>
-              <a:t>Test raporunda 2 sentetik kabul testi geçti; hukuki uyumluluk doğrulaması değildir.</a:t>
+              <a:t>Görsel belge akışını anlatır; Ollama, model, mevzuat indirme ve klonlama adımları ayrıca onay ister.</a:t>
             </a:r>
           </a:p>
         </p:txBody>
@@ -20597,7 +22278,7 @@
               </a:defRPr>
             </a:pPr>
             <a:r>
-              <a:t>PR · YEREL ENTEGRASYON PROVASI</a:t>
+              <a:t>TEST REPOSU · GERÇEK DOSYA YAPISI</a:t>
             </a:r>
           </a:p>
         </p:txBody>
@@ -20633,7 +22314,7 @@
               </a:defRPr>
             </a:pPr>
             <a:r>
-              <a:t>Push/PR hattı güvenli test ortamında denendi</a:t>
+              <a:t>İki sentetik demo, on test bulgusu</a:t>
             </a:r>
           </a:p>
         </p:txBody>
@@ -20669,14 +22350,14 @@
               </a:defRPr>
             </a:pPr>
             <a:r>
-              <a:t>Yerel bare Git remote ve fake gh kullanıldı; gerçek GitHub PR açılmadı.</a:t>
+              <a:t>Depo ağacı mevcut test fixture Git deposundan; içerik yalnızca test için hazırlanmıştır.</a:t>
             </a:r>
           </a:p>
         </p:txBody>
       </p:sp>
       <p:pic>
         <p:nvPicPr>
-          <p:cNvPr id="5" name="Picture 4" descr="pr_akisi_yerel_prova.png"/>
+          <p:cNvPr id="5" name="Picture 4" descr="sentetik_test_deposu.png"/>
           <p:cNvPicPr>
             <a:picLocks noChangeAspect="1"/>
           </p:cNvPicPr>
@@ -20729,7 +22410,7 @@
               </a:defRPr>
             </a:pPr>
             <a:r>
-              <a:t>Gerçek PR ekran görüntüsü mevcut değildir; bu görsel yerel mock provayı açıkça etiketler.</a:t>
+              <a:t>Sentetik fixture; gerçek sistem veya gerçek mevzuat bulgusu değildir.</a:t>
             </a:r>
           </a:p>
         </p:txBody>
@@ -20758,16 +22439,42 @@
           </a:prstGeom>
         </p:spPr>
       </p:pic>
-      <p:sp>
-        <p:nvSpPr>
-          <p:cNvPr id="8" name="TextBox 7"/>
+    </p:spTree>
+  </p:cSld>
+  <p:clrMapOvr>
+    <a:masterClrMapping/>
+  </p:clrMapOvr>
+</p:sld>
+</file>
+
+<file path=ppt/slides/slide27.xml><?xml version="1.0" encoding="utf-8"?>
+<p:sld xmlns:a="http://schemas.openxmlformats.org/drawingml/2006/main" xmlns:p="http://schemas.openxmlformats.org/presentationml/2006/main" xmlns:r="http://schemas.openxmlformats.org/officeDocument/2006/relationships">
+  <p:cSld>
+    <p:bg>
+      <p:bgPr>
+        <a:solidFill>
+          <a:srgbClr val="F7F9FC"/>
+        </a:solidFill>
+        <a:effectLst/>
+      </p:bgPr>
+    </p:bg>
+    <p:spTree>
+      <p:nvGrpSpPr>
+        <p:cNvPr id="1" name=""/>
+        <p:cNvGrpSpPr/>
+        <p:nvPr/>
+      </p:nvGrpSpPr>
+      <p:grpSpPr/>
+      <p:sp>
+        <p:nvSpPr>
+          <p:cNvPr id="2" name="TextBox 1"/>
           <p:cNvSpPr txBox="1"/>
           <p:nvPr/>
         </p:nvSpPr>
         <p:spPr>
           <a:xfrm>
-            <a:off x="685800" y="5742432"/>
-            <a:ext cx="9052560" cy="274320"/>
+            <a:off x="594360" y="274320"/>
+            <a:ext cx="10972800" cy="228600"/>
           </a:xfrm>
           <a:prstGeom prst="rect">
             <a:avLst/>
@@ -20781,19 +22488,1560 @@
           <a:lstStyle/>
           <a:p>
             <a:pPr>
-              <a:defRPr sz="900" b="0">
-                <a:solidFill>
-                  <a:srgbClr val="637389"/>
+              <a:defRPr sz="1000" b="1">
+                <a:solidFill>
+                  <a:srgbClr val="00AFA0"/>
                 </a:solidFill>
                 <a:latin typeface="Aptos"/>
               </a:defRPr>
             </a:pPr>
             <a:r>
-              <a:t>Softtech logosu görsel amaçlıdır; kurumsal onay veya iş birliği beyanı değildir.</a:t>
-            </a:r>
-          </a:p>
-        </p:txBody>
-      </p:sp>
+              <a:t>REMEDIATION · DIFF + TEST</a:t>
+            </a:r>
+          </a:p>
+        </p:txBody>
+      </p:sp>
+      <p:sp>
+        <p:nvSpPr>
+          <p:cNvPr id="3" name="TextBox 2"/>
+          <p:cNvSpPr txBox="1"/>
+          <p:nvPr/>
+        </p:nvSpPr>
+        <p:spPr>
+          <a:xfrm>
+            <a:off x="594360" y="594360"/>
+            <a:ext cx="10972800" cy="502920"/>
+          </a:xfrm>
+          <a:prstGeom prst="rect">
+            <a:avLst/>
+          </a:prstGeom>
+          <a:noFill/>
+        </p:spPr>
+        <p:txBody>
+          <a:bodyPr wrap="square" lIns="73152" rIns="73152" tIns="36576" bIns="27432" anchor="ctr">
+            <a:spAutoFit/>
+          </a:bodyPr>
+          <a:lstStyle/>
+          <a:p>
+            <a:pPr>
+              <a:defRPr sz="2400" b="1">
+                <a:solidFill>
+                  <a:srgbClr val="112240"/>
+                </a:solidFill>
+                <a:latin typeface="Aptos"/>
+              </a:defRPr>
+            </a:pPr>
+            <a:r>
+              <a:t>Önce / sonra farkı ve kabul testi</a:t>
+            </a:r>
+          </a:p>
+        </p:txBody>
+      </p:sp>
+      <p:sp>
+        <p:nvSpPr>
+          <p:cNvPr id="4" name="TextBox 3"/>
+          <p:cNvSpPr txBox="1"/>
+          <p:nvPr/>
+        </p:nvSpPr>
+        <p:spPr>
+          <a:xfrm>
+            <a:off x="621792" y="1115568"/>
+            <a:ext cx="10972800" cy="384048"/>
+          </a:xfrm>
+          <a:prstGeom prst="rect">
+            <a:avLst/>
+          </a:prstGeom>
+          <a:noFill/>
+        </p:spPr>
+        <p:txBody>
+          <a:bodyPr wrap="square" lIns="73152" rIns="73152" tIns="36576" bIns="27432" anchor="ctr">
+            <a:spAutoFit/>
+          </a:bodyPr>
+          <a:lstStyle/>
+          <a:p>
+            <a:pPr>
+              <a:defRPr sz="1100" b="0">
+                <a:solidFill>
+                  <a:srgbClr val="637389"/>
+                </a:solidFill>
+                <a:latin typeface="Aptos"/>
+              </a:defRPr>
+            </a:pPr>
+            <a:r>
+              <a:t>Görsel, izole remediation worktree raporundaki iki örnek değişikliği ve test raporunu gösterir.</a:t>
+            </a:r>
+          </a:p>
+        </p:txBody>
+      </p:sp>
+      <p:pic>
+        <p:nvPicPr>
+          <p:cNvPr id="5" name="Picture 4" descr="remediation_diff_ve_test.png"/>
+          <p:cNvPicPr>
+            <a:picLocks noChangeAspect="1"/>
+          </p:cNvPicPr>
+          <p:nvPr/>
+        </p:nvPicPr>
+        <p:blipFill>
+          <a:blip r:embed="rId2"/>
+          <a:stretch>
+            <a:fillRect/>
+          </a:stretch>
+        </p:blipFill>
+        <p:spPr>
+          <a:xfrm>
+            <a:off x="621792" y="1664208"/>
+            <a:ext cx="10972800" cy="4315968"/>
+          </a:xfrm>
+          <a:prstGeom prst="rect">
+            <a:avLst/>
+          </a:prstGeom>
+        </p:spPr>
+      </p:pic>
+      <p:sp>
+        <p:nvSpPr>
+          <p:cNvPr id="6" name="TextBox 5"/>
+          <p:cNvSpPr txBox="1"/>
+          <p:nvPr/>
+        </p:nvSpPr>
+        <p:spPr>
+          <a:xfrm>
+            <a:off x="685800" y="6071616"/>
+            <a:ext cx="9235440" cy="402336"/>
+          </a:xfrm>
+          <a:prstGeom prst="rect">
+            <a:avLst/>
+          </a:prstGeom>
+          <a:noFill/>
+        </p:spPr>
+        <p:txBody>
+          <a:bodyPr wrap="square" lIns="73152" rIns="73152" tIns="36576" bIns="27432" anchor="ctr">
+            <a:spAutoFit/>
+          </a:bodyPr>
+          <a:lstStyle/>
+          <a:p>
+            <a:pPr>
+              <a:defRPr sz="900" b="0">
+                <a:solidFill>
+                  <a:srgbClr val="637389"/>
+                </a:solidFill>
+                <a:latin typeface="Aptos"/>
+              </a:defRPr>
+            </a:pPr>
+            <a:r>
+              <a:t>Test raporunda 2 sentetik kabul testi geçti; hukuki uyumluluk doğrulaması değildir.</a:t>
+            </a:r>
+          </a:p>
+        </p:txBody>
+      </p:sp>
+      <p:pic>
+        <p:nvPicPr>
+          <p:cNvPr id="7" name="Picture 6" descr="softtech-logo-light-background.png"/>
+          <p:cNvPicPr>
+            <a:picLocks noChangeAspect="1"/>
+          </p:cNvPicPr>
+          <p:nvPr/>
+        </p:nvPicPr>
+        <p:blipFill>
+          <a:blip r:embed="rId3"/>
+          <a:stretch>
+            <a:fillRect/>
+          </a:stretch>
+        </p:blipFill>
+        <p:spPr>
+          <a:xfrm>
+            <a:off x="9985248" y="6382512"/>
+            <a:ext cx="960120" cy="416755"/>
+          </a:xfrm>
+          <a:prstGeom prst="rect">
+            <a:avLst/>
+          </a:prstGeom>
+        </p:spPr>
+      </p:pic>
+    </p:spTree>
+  </p:cSld>
+  <p:clrMapOvr>
+    <a:masterClrMapping/>
+  </p:clrMapOvr>
+</p:sld>
+</file>
+
+<file path=ppt/slides/slide28.xml><?xml version="1.0" encoding="utf-8"?>
+<p:sld xmlns:a="http://schemas.openxmlformats.org/drawingml/2006/main" xmlns:p="http://schemas.openxmlformats.org/presentationml/2006/main" xmlns:r="http://schemas.openxmlformats.org/officeDocument/2006/relationships">
+  <p:cSld>
+    <p:bg>
+      <p:bgPr>
+        <a:solidFill>
+          <a:srgbClr val="F7F9FC"/>
+        </a:solidFill>
+        <a:effectLst/>
+      </p:bgPr>
+    </p:bg>
+    <p:spTree>
+      <p:nvGrpSpPr>
+        <p:cNvPr id="1" name=""/>
+        <p:cNvGrpSpPr/>
+        <p:nvPr/>
+      </p:nvGrpSpPr>
+      <p:grpSpPr/>
+      <p:sp>
+        <p:nvSpPr>
+          <p:cNvPr id="2" name="TextBox 1"/>
+          <p:cNvSpPr txBox="1"/>
+          <p:nvPr/>
+        </p:nvSpPr>
+        <p:spPr>
+          <a:xfrm>
+            <a:off x="594360" y="274320"/>
+            <a:ext cx="10972800" cy="228600"/>
+          </a:xfrm>
+          <a:prstGeom prst="rect">
+            <a:avLst/>
+          </a:prstGeom>
+          <a:noFill/>
+        </p:spPr>
+        <p:txBody>
+          <a:bodyPr wrap="square" lIns="73152" rIns="73152" tIns="36576" bIns="27432" anchor="ctr">
+            <a:spAutoFit/>
+          </a:bodyPr>
+          <a:lstStyle/>
+          <a:p>
+            <a:pPr>
+              <a:defRPr sz="1000" b="1">
+                <a:solidFill>
+                  <a:srgbClr val="00AFA0"/>
+                </a:solidFill>
+                <a:latin typeface="Aptos"/>
+              </a:defRPr>
+            </a:pPr>
+            <a:r>
+              <a:t>PR · YEREL ENTEGRASYON PROVASI</a:t>
+            </a:r>
+          </a:p>
+        </p:txBody>
+      </p:sp>
+      <p:sp>
+        <p:nvSpPr>
+          <p:cNvPr id="3" name="TextBox 2"/>
+          <p:cNvSpPr txBox="1"/>
+          <p:nvPr/>
+        </p:nvSpPr>
+        <p:spPr>
+          <a:xfrm>
+            <a:off x="594360" y="594360"/>
+            <a:ext cx="10972800" cy="502920"/>
+          </a:xfrm>
+          <a:prstGeom prst="rect">
+            <a:avLst/>
+          </a:prstGeom>
+          <a:noFill/>
+        </p:spPr>
+        <p:txBody>
+          <a:bodyPr wrap="square" lIns="73152" rIns="73152" tIns="36576" bIns="27432" anchor="ctr">
+            <a:spAutoFit/>
+          </a:bodyPr>
+          <a:lstStyle/>
+          <a:p>
+            <a:pPr>
+              <a:defRPr sz="2400" b="1">
+                <a:solidFill>
+                  <a:srgbClr val="112240"/>
+                </a:solidFill>
+                <a:latin typeface="Aptos"/>
+              </a:defRPr>
+            </a:pPr>
+            <a:r>
+              <a:t>Push/PR hattı güvenli test ortamında denendi</a:t>
+            </a:r>
+          </a:p>
+        </p:txBody>
+      </p:sp>
+      <p:sp>
+        <p:nvSpPr>
+          <p:cNvPr id="4" name="TextBox 3"/>
+          <p:cNvSpPr txBox="1"/>
+          <p:nvPr/>
+        </p:nvSpPr>
+        <p:spPr>
+          <a:xfrm>
+            <a:off x="621792" y="1115568"/>
+            <a:ext cx="10972800" cy="384048"/>
+          </a:xfrm>
+          <a:prstGeom prst="rect">
+            <a:avLst/>
+          </a:prstGeom>
+          <a:noFill/>
+        </p:spPr>
+        <p:txBody>
+          <a:bodyPr wrap="square" lIns="73152" rIns="73152" tIns="36576" bIns="27432" anchor="ctr">
+            <a:spAutoFit/>
+          </a:bodyPr>
+          <a:lstStyle/>
+          <a:p>
+            <a:pPr>
+              <a:defRPr sz="1100" b="0">
+                <a:solidFill>
+                  <a:srgbClr val="637389"/>
+                </a:solidFill>
+                <a:latin typeface="Aptos"/>
+              </a:defRPr>
+            </a:pPr>
+            <a:r>
+              <a:t>Yerel bare Git remote ve fake gh kullanıldı; gerçek GitHub PR açılmadı.</a:t>
+            </a:r>
+          </a:p>
+        </p:txBody>
+      </p:sp>
+      <p:pic>
+        <p:nvPicPr>
+          <p:cNvPr id="5" name="Picture 4" descr="pr_akisi_yerel_prova.png"/>
+          <p:cNvPicPr>
+            <a:picLocks noChangeAspect="1"/>
+          </p:cNvPicPr>
+          <p:nvPr/>
+        </p:nvPicPr>
+        <p:blipFill>
+          <a:blip r:embed="rId2"/>
+          <a:stretch>
+            <a:fillRect/>
+          </a:stretch>
+        </p:blipFill>
+        <p:spPr>
+          <a:xfrm>
+            <a:off x="621792" y="1664208"/>
+            <a:ext cx="10972800" cy="4315968"/>
+          </a:xfrm>
+          <a:prstGeom prst="rect">
+            <a:avLst/>
+          </a:prstGeom>
+        </p:spPr>
+      </p:pic>
+      <p:sp>
+        <p:nvSpPr>
+          <p:cNvPr id="6" name="TextBox 5"/>
+          <p:cNvSpPr txBox="1"/>
+          <p:nvPr/>
+        </p:nvSpPr>
+        <p:spPr>
+          <a:xfrm>
+            <a:off x="685800" y="6071616"/>
+            <a:ext cx="9235440" cy="402336"/>
+          </a:xfrm>
+          <a:prstGeom prst="rect">
+            <a:avLst/>
+          </a:prstGeom>
+          <a:noFill/>
+        </p:spPr>
+        <p:txBody>
+          <a:bodyPr wrap="square" lIns="73152" rIns="73152" tIns="36576" bIns="27432" anchor="ctr">
+            <a:spAutoFit/>
+          </a:bodyPr>
+          <a:lstStyle/>
+          <a:p>
+            <a:pPr>
+              <a:defRPr sz="900" b="0">
+                <a:solidFill>
+                  <a:srgbClr val="637389"/>
+                </a:solidFill>
+                <a:latin typeface="Aptos"/>
+              </a:defRPr>
+            </a:pPr>
+            <a:r>
+              <a:t>Gerçek PR ekran görüntüsü mevcut değildir; bu görsel yerel mock provayı açıkça etiketler.</a:t>
+            </a:r>
+          </a:p>
+        </p:txBody>
+      </p:sp>
+      <p:pic>
+        <p:nvPicPr>
+          <p:cNvPr id="7" name="Picture 6" descr="softtech-logo-light-background.png"/>
+          <p:cNvPicPr>
+            <a:picLocks noChangeAspect="1"/>
+          </p:cNvPicPr>
+          <p:nvPr/>
+        </p:nvPicPr>
+        <p:blipFill>
+          <a:blip r:embed="rId3"/>
+          <a:stretch>
+            <a:fillRect/>
+          </a:stretch>
+        </p:blipFill>
+        <p:spPr>
+          <a:xfrm>
+            <a:off x="9985248" y="6382512"/>
+            <a:ext cx="960120" cy="416755"/>
+          </a:xfrm>
+          <a:prstGeom prst="rect">
+            <a:avLst/>
+          </a:prstGeom>
+        </p:spPr>
+      </p:pic>
+    </p:spTree>
+  </p:cSld>
+  <p:clrMapOvr>
+    <a:masterClrMapping/>
+  </p:clrMapOvr>
+</p:sld>
+</file>
+
+<file path=ppt/slides/slide29.xml><?xml version="1.0" encoding="utf-8"?>
+<p:sld xmlns:a="http://schemas.openxmlformats.org/drawingml/2006/main" xmlns:p="http://schemas.openxmlformats.org/presentationml/2006/main" xmlns:r="http://schemas.openxmlformats.org/officeDocument/2006/relationships">
+  <p:cSld>
+    <p:bg>
+      <p:bgPr>
+        <a:solidFill>
+          <a:srgbClr val="F7F9FC"/>
+        </a:solidFill>
+        <a:effectLst/>
+      </p:bgPr>
+    </p:bg>
+    <p:spTree>
+      <p:nvGrpSpPr>
+        <p:cNvPr id="1" name=""/>
+        <p:cNvGrpSpPr/>
+        <p:nvPr/>
+      </p:nvGrpSpPr>
+      <p:grpSpPr/>
+      <p:sp>
+        <p:nvSpPr>
+          <p:cNvPr id="2" name="TextBox 1"/>
+          <p:cNvSpPr txBox="1"/>
+          <p:nvPr/>
+        </p:nvSpPr>
+        <p:spPr>
+          <a:xfrm>
+            <a:off x="594360" y="274320"/>
+            <a:ext cx="10972800" cy="228600"/>
+          </a:xfrm>
+          <a:prstGeom prst="rect">
+            <a:avLst/>
+          </a:prstGeom>
+          <a:noFill/>
+        </p:spPr>
+        <p:txBody>
+          <a:bodyPr wrap="square" lIns="73152" rIns="73152" tIns="36576" bIns="27432" anchor="ctr">
+            <a:spAutoFit/>
+          </a:bodyPr>
+          <a:lstStyle/>
+          <a:p>
+            <a:pPr>
+              <a:defRPr sz="1000" b="1">
+                <a:solidFill>
+                  <a:srgbClr val="00AFA0"/>
+                </a:solidFill>
+                <a:latin typeface="Aptos"/>
+              </a:defRPr>
+            </a:pPr>
+            <a:r>
+              <a:t>ÖRNEK ÇIKTI · HTML TARAMA RAPORU</a:t>
+            </a:r>
+          </a:p>
+        </p:txBody>
+      </p:sp>
+      <p:sp>
+        <p:nvSpPr>
+          <p:cNvPr id="3" name="TextBox 2"/>
+          <p:cNvSpPr txBox="1"/>
+          <p:nvPr/>
+        </p:nvSpPr>
+        <p:spPr>
+          <a:xfrm>
+            <a:off x="594360" y="594360"/>
+            <a:ext cx="10972800" cy="502920"/>
+          </a:xfrm>
+          <a:prstGeom prst="rect">
+            <a:avLst/>
+          </a:prstGeom>
+          <a:noFill/>
+        </p:spPr>
+        <p:txBody>
+          <a:bodyPr wrap="square" lIns="73152" rIns="73152" tIns="36576" bIns="27432" anchor="ctr">
+            <a:spAutoFit/>
+          </a:bodyPr>
+          <a:lstStyle/>
+          <a:p>
+            <a:pPr>
+              <a:defRPr sz="2400" b="1">
+                <a:solidFill>
+                  <a:srgbClr val="112240"/>
+                </a:solidFill>
+                <a:latin typeface="Aptos"/>
+              </a:defRPr>
+            </a:pPr>
+            <a:r>
+              <a:t>Bulgu; dosya, satır, kod kanıtı ve öneriyle sunulur</a:t>
+            </a:r>
+          </a:p>
+        </p:txBody>
+      </p:sp>
+      <p:sp>
+        <p:nvSpPr>
+          <p:cNvPr id="4" name="TextBox 3"/>
+          <p:cNvSpPr txBox="1"/>
+          <p:nvPr/>
+        </p:nvSpPr>
+        <p:spPr>
+          <a:xfrm>
+            <a:off x="621792" y="1115568"/>
+            <a:ext cx="10972800" cy="384048"/>
+          </a:xfrm>
+          <a:prstGeom prst="rect">
+            <a:avLst/>
+          </a:prstGeom>
+          <a:noFill/>
+        </p:spPr>
+        <p:txBody>
+          <a:bodyPr wrap="square" lIns="73152" rIns="73152" tIns="36576" bIns="27432" anchor="ctr">
+            <a:spAutoFit/>
+          </a:bodyPr>
+          <a:lstStyle/>
+          <a:p>
+            <a:pPr>
+              <a:defRPr sz="1100" b="0">
+                <a:solidFill>
+                  <a:srgbClr val="637389"/>
+                </a:solidFill>
+                <a:latin typeface="Aptos"/>
+              </a:defRPr>
+            </a:pPr>
+            <a:r>
+              <a:t>Aşağıdaki kartlar docs/examples/ornek_tarama_raporu.html içindeki sentetik örnek raporun özetidir.</a:t>
+            </a:r>
+          </a:p>
+        </p:txBody>
+      </p:sp>
+      <p:sp>
+        <p:nvSpPr>
+          <p:cNvPr id="5" name="Rectangle 4"/>
+          <p:cNvSpPr/>
+          <p:nvPr/>
+        </p:nvSpPr>
+        <p:spPr>
+          <a:xfrm>
+            <a:off x="621792" y="1737360"/>
+            <a:ext cx="2615184" cy="841248"/>
+          </a:xfrm>
+          <a:prstGeom prst="rect">
+            <a:avLst/>
+          </a:prstGeom>
+          <a:solidFill>
+            <a:srgbClr val="FFFFFF"/>
+          </a:solidFill>
+          <a:ln>
+            <a:noFill/>
+          </a:ln>
+        </p:spPr>
+        <p:style>
+          <a:lnRef idx="1">
+            <a:schemeClr val="accent1"/>
+          </a:lnRef>
+          <a:fillRef idx="3">
+            <a:schemeClr val="accent1"/>
+          </a:fillRef>
+          <a:effectRef idx="2">
+            <a:schemeClr val="accent1"/>
+          </a:effectRef>
+          <a:fontRef idx="minor">
+            <a:schemeClr val="lt1"/>
+          </a:fontRef>
+        </p:style>
+        <p:txBody>
+          <a:bodyPr rtlCol="0" anchor="ctr"/>
+          <a:lstStyle/>
+          <a:p>
+            <a:pPr algn="ctr"/>
+          </a:p>
+        </p:txBody>
+      </p:sp>
+      <p:sp>
+        <p:nvSpPr>
+          <p:cNvPr id="6" name="Rectangle 5"/>
+          <p:cNvSpPr/>
+          <p:nvPr/>
+        </p:nvSpPr>
+        <p:spPr>
+          <a:xfrm>
+            <a:off x="621792" y="1737360"/>
+            <a:ext cx="73152" cy="841248"/>
+          </a:xfrm>
+          <a:prstGeom prst="rect">
+            <a:avLst/>
+          </a:prstGeom>
+          <a:solidFill>
+            <a:srgbClr val="00AFA0"/>
+          </a:solidFill>
+          <a:ln>
+            <a:noFill/>
+          </a:ln>
+        </p:spPr>
+        <p:style>
+          <a:lnRef idx="1">
+            <a:schemeClr val="accent1"/>
+          </a:lnRef>
+          <a:fillRef idx="3">
+            <a:schemeClr val="accent1"/>
+          </a:fillRef>
+          <a:effectRef idx="2">
+            <a:schemeClr val="accent1"/>
+          </a:effectRef>
+          <a:fontRef idx="minor">
+            <a:schemeClr val="lt1"/>
+          </a:fontRef>
+        </p:style>
+        <p:txBody>
+          <a:bodyPr rtlCol="0" anchor="ctr"/>
+          <a:lstStyle/>
+          <a:p>
+            <a:pPr algn="ctr"/>
+          </a:p>
+        </p:txBody>
+      </p:sp>
+      <p:sp>
+        <p:nvSpPr>
+          <p:cNvPr id="7" name="TextBox 6"/>
+          <p:cNvSpPr txBox="1"/>
+          <p:nvPr/>
+        </p:nvSpPr>
+        <p:spPr>
+          <a:xfrm>
+            <a:off x="786384" y="1847088"/>
+            <a:ext cx="2304288" cy="338328"/>
+          </a:xfrm>
+          <a:prstGeom prst="rect">
+            <a:avLst/>
+          </a:prstGeom>
+          <a:noFill/>
+        </p:spPr>
+        <p:txBody>
+          <a:bodyPr wrap="square" lIns="73152" rIns="73152" tIns="36576" bIns="27432" anchor="ctr">
+            <a:spAutoFit/>
+          </a:bodyPr>
+          <a:lstStyle/>
+          <a:p>
+            <a:pPr>
+              <a:defRPr sz="1900" b="1">
+                <a:solidFill>
+                  <a:srgbClr val="112240"/>
+                </a:solidFill>
+                <a:latin typeface="Aptos"/>
+              </a:defRPr>
+            </a:pPr>
+            <a:r>
+              <a:t>2</a:t>
+            </a:r>
+          </a:p>
+        </p:txBody>
+      </p:sp>
+      <p:sp>
+        <p:nvSpPr>
+          <p:cNvPr id="8" name="TextBox 7"/>
+          <p:cNvSpPr txBox="1"/>
+          <p:nvPr/>
+        </p:nvSpPr>
+        <p:spPr>
+          <a:xfrm>
+            <a:off x="786384" y="2221992"/>
+            <a:ext cx="2304288" cy="201168"/>
+          </a:xfrm>
+          <a:prstGeom prst="rect">
+            <a:avLst/>
+          </a:prstGeom>
+          <a:noFill/>
+        </p:spPr>
+        <p:txBody>
+          <a:bodyPr wrap="square" lIns="73152" rIns="73152" tIns="36576" bIns="27432" anchor="ctr">
+            <a:spAutoFit/>
+          </a:bodyPr>
+          <a:lstStyle/>
+          <a:p>
+            <a:pPr>
+              <a:defRPr sz="900" b="0">
+                <a:solidFill>
+                  <a:srgbClr val="637389"/>
+                </a:solidFill>
+                <a:latin typeface="Aptos"/>
+              </a:defRPr>
+            </a:pPr>
+            <a:r>
+              <a:t>örnek bulgu</a:t>
+            </a:r>
+          </a:p>
+        </p:txBody>
+      </p:sp>
+      <p:sp>
+        <p:nvSpPr>
+          <p:cNvPr id="9" name="Rectangle 8"/>
+          <p:cNvSpPr/>
+          <p:nvPr/>
+        </p:nvSpPr>
+        <p:spPr>
+          <a:xfrm>
+            <a:off x="3474720" y="1737360"/>
+            <a:ext cx="2615184" cy="841248"/>
+          </a:xfrm>
+          <a:prstGeom prst="rect">
+            <a:avLst/>
+          </a:prstGeom>
+          <a:solidFill>
+            <a:srgbClr val="FFFFFF"/>
+          </a:solidFill>
+          <a:ln>
+            <a:noFill/>
+          </a:ln>
+        </p:spPr>
+        <p:style>
+          <a:lnRef idx="1">
+            <a:schemeClr val="accent1"/>
+          </a:lnRef>
+          <a:fillRef idx="3">
+            <a:schemeClr val="accent1"/>
+          </a:fillRef>
+          <a:effectRef idx="2">
+            <a:schemeClr val="accent1"/>
+          </a:effectRef>
+          <a:fontRef idx="minor">
+            <a:schemeClr val="lt1"/>
+          </a:fontRef>
+        </p:style>
+        <p:txBody>
+          <a:bodyPr rtlCol="0" anchor="ctr"/>
+          <a:lstStyle/>
+          <a:p>
+            <a:pPr algn="ctr"/>
+          </a:p>
+        </p:txBody>
+      </p:sp>
+      <p:sp>
+        <p:nvSpPr>
+          <p:cNvPr id="10" name="Rectangle 9"/>
+          <p:cNvSpPr/>
+          <p:nvPr/>
+        </p:nvSpPr>
+        <p:spPr>
+          <a:xfrm>
+            <a:off x="3474720" y="1737360"/>
+            <a:ext cx="73152" cy="841248"/>
+          </a:xfrm>
+          <a:prstGeom prst="rect">
+            <a:avLst/>
+          </a:prstGeom>
+          <a:solidFill>
+            <a:srgbClr val="35BED7"/>
+          </a:solidFill>
+          <a:ln>
+            <a:noFill/>
+          </a:ln>
+        </p:spPr>
+        <p:style>
+          <a:lnRef idx="1">
+            <a:schemeClr val="accent1"/>
+          </a:lnRef>
+          <a:fillRef idx="3">
+            <a:schemeClr val="accent1"/>
+          </a:fillRef>
+          <a:effectRef idx="2">
+            <a:schemeClr val="accent1"/>
+          </a:effectRef>
+          <a:fontRef idx="minor">
+            <a:schemeClr val="lt1"/>
+          </a:fontRef>
+        </p:style>
+        <p:txBody>
+          <a:bodyPr rtlCol="0" anchor="ctr"/>
+          <a:lstStyle/>
+          <a:p>
+            <a:pPr algn="ctr"/>
+          </a:p>
+        </p:txBody>
+      </p:sp>
+      <p:sp>
+        <p:nvSpPr>
+          <p:cNvPr id="11" name="TextBox 10"/>
+          <p:cNvSpPr txBox="1"/>
+          <p:nvPr/>
+        </p:nvSpPr>
+        <p:spPr>
+          <a:xfrm>
+            <a:off x="3639312" y="1847088"/>
+            <a:ext cx="2304288" cy="338328"/>
+          </a:xfrm>
+          <a:prstGeom prst="rect">
+            <a:avLst/>
+          </a:prstGeom>
+          <a:noFill/>
+        </p:spPr>
+        <p:txBody>
+          <a:bodyPr wrap="square" lIns="73152" rIns="73152" tIns="36576" bIns="27432" anchor="ctr">
+            <a:spAutoFit/>
+          </a:bodyPr>
+          <a:lstStyle/>
+          <a:p>
+            <a:pPr>
+              <a:defRPr sz="1900" b="1">
+                <a:solidFill>
+                  <a:srgbClr val="112240"/>
+                </a:solidFill>
+                <a:latin typeface="Aptos"/>
+              </a:defRPr>
+            </a:pPr>
+            <a:r>
+              <a:t>1 / 1</a:t>
+            </a:r>
+          </a:p>
+        </p:txBody>
+      </p:sp>
+      <p:sp>
+        <p:nvSpPr>
+          <p:cNvPr id="12" name="TextBox 11"/>
+          <p:cNvSpPr txBox="1"/>
+          <p:nvPr/>
+        </p:nvSpPr>
+        <p:spPr>
+          <a:xfrm>
+            <a:off x="3639312" y="2221992"/>
+            <a:ext cx="2304288" cy="201168"/>
+          </a:xfrm>
+          <a:prstGeom prst="rect">
+            <a:avLst/>
+          </a:prstGeom>
+          <a:noFill/>
+        </p:spPr>
+        <p:txBody>
+          <a:bodyPr wrap="square" lIns="73152" rIns="73152" tIns="36576" bIns="27432" anchor="ctr">
+            <a:spAutoFit/>
+          </a:bodyPr>
+          <a:lstStyle/>
+          <a:p>
+            <a:pPr>
+              <a:defRPr sz="900" b="0">
+                <a:solidFill>
+                  <a:srgbClr val="637389"/>
+                </a:solidFill>
+                <a:latin typeface="Aptos"/>
+              </a:defRPr>
+            </a:pPr>
+            <a:r>
+              <a:t>incelenen dosya</a:t>
+            </a:r>
+          </a:p>
+        </p:txBody>
+      </p:sp>
+      <p:sp>
+        <p:nvSpPr>
+          <p:cNvPr id="13" name="Rectangle 12"/>
+          <p:cNvSpPr/>
+          <p:nvPr/>
+        </p:nvSpPr>
+        <p:spPr>
+          <a:xfrm>
+            <a:off x="6327648" y="1737360"/>
+            <a:ext cx="2615184" cy="841248"/>
+          </a:xfrm>
+          <a:prstGeom prst="rect">
+            <a:avLst/>
+          </a:prstGeom>
+          <a:solidFill>
+            <a:srgbClr val="FFFFFF"/>
+          </a:solidFill>
+          <a:ln>
+            <a:noFill/>
+          </a:ln>
+        </p:spPr>
+        <p:style>
+          <a:lnRef idx="1">
+            <a:schemeClr val="accent1"/>
+          </a:lnRef>
+          <a:fillRef idx="3">
+            <a:schemeClr val="accent1"/>
+          </a:fillRef>
+          <a:effectRef idx="2">
+            <a:schemeClr val="accent1"/>
+          </a:effectRef>
+          <a:fontRef idx="minor">
+            <a:schemeClr val="lt1"/>
+          </a:fontRef>
+        </p:style>
+        <p:txBody>
+          <a:bodyPr rtlCol="0" anchor="ctr"/>
+          <a:lstStyle/>
+          <a:p>
+            <a:pPr algn="ctr"/>
+          </a:p>
+        </p:txBody>
+      </p:sp>
+      <p:sp>
+        <p:nvSpPr>
+          <p:cNvPr id="14" name="Rectangle 13"/>
+          <p:cNvSpPr/>
+          <p:nvPr/>
+        </p:nvSpPr>
+        <p:spPr>
+          <a:xfrm>
+            <a:off x="6327648" y="1737360"/>
+            <a:ext cx="73152" cy="841248"/>
+          </a:xfrm>
+          <a:prstGeom prst="rect">
+            <a:avLst/>
+          </a:prstGeom>
+          <a:solidFill>
+            <a:srgbClr val="F8BC4A"/>
+          </a:solidFill>
+          <a:ln>
+            <a:noFill/>
+          </a:ln>
+        </p:spPr>
+        <p:style>
+          <a:lnRef idx="1">
+            <a:schemeClr val="accent1"/>
+          </a:lnRef>
+          <a:fillRef idx="3">
+            <a:schemeClr val="accent1"/>
+          </a:fillRef>
+          <a:effectRef idx="2">
+            <a:schemeClr val="accent1"/>
+          </a:effectRef>
+          <a:fontRef idx="minor">
+            <a:schemeClr val="lt1"/>
+          </a:fontRef>
+        </p:style>
+        <p:txBody>
+          <a:bodyPr rtlCol="0" anchor="ctr"/>
+          <a:lstStyle/>
+          <a:p>
+            <a:pPr algn="ctr"/>
+          </a:p>
+        </p:txBody>
+      </p:sp>
+      <p:sp>
+        <p:nvSpPr>
+          <p:cNvPr id="15" name="TextBox 14"/>
+          <p:cNvSpPr txBox="1"/>
+          <p:nvPr/>
+        </p:nvSpPr>
+        <p:spPr>
+          <a:xfrm>
+            <a:off x="6492240" y="1847088"/>
+            <a:ext cx="2304288" cy="338328"/>
+          </a:xfrm>
+          <a:prstGeom prst="rect">
+            <a:avLst/>
+          </a:prstGeom>
+          <a:noFill/>
+        </p:spPr>
+        <p:txBody>
+          <a:bodyPr wrap="square" lIns="73152" rIns="73152" tIns="36576" bIns="27432" anchor="ctr">
+            <a:spAutoFit/>
+          </a:bodyPr>
+          <a:lstStyle/>
+          <a:p>
+            <a:pPr>
+              <a:defRPr sz="1900" b="1">
+                <a:solidFill>
+                  <a:srgbClr val="112240"/>
+                </a:solidFill>
+                <a:latin typeface="Aptos"/>
+              </a:defRPr>
+            </a:pPr>
+            <a:r>
+              <a:t>fixture</a:t>
+            </a:r>
+          </a:p>
+        </p:txBody>
+      </p:sp>
+      <p:sp>
+        <p:nvSpPr>
+          <p:cNvPr id="16" name="TextBox 15"/>
+          <p:cNvSpPr txBox="1"/>
+          <p:nvPr/>
+        </p:nvSpPr>
+        <p:spPr>
+          <a:xfrm>
+            <a:off x="6492240" y="2221992"/>
+            <a:ext cx="2304288" cy="201168"/>
+          </a:xfrm>
+          <a:prstGeom prst="rect">
+            <a:avLst/>
+          </a:prstGeom>
+          <a:noFill/>
+        </p:spPr>
+        <p:txBody>
+          <a:bodyPr wrap="square" lIns="73152" rIns="73152" tIns="36576" bIns="27432" anchor="ctr">
+            <a:spAutoFit/>
+          </a:bodyPr>
+          <a:lstStyle/>
+          <a:p>
+            <a:pPr>
+              <a:defRPr sz="900" b="0">
+                <a:solidFill>
+                  <a:srgbClr val="637389"/>
+                </a:solidFill>
+                <a:latin typeface="Aptos"/>
+              </a:defRPr>
+            </a:pPr>
+            <a:r>
+              <a:t>model / kaynak</a:t>
+            </a:r>
+          </a:p>
+        </p:txBody>
+      </p:sp>
+      <p:sp>
+        <p:nvSpPr>
+          <p:cNvPr id="17" name="Rectangle 16"/>
+          <p:cNvSpPr/>
+          <p:nvPr/>
+        </p:nvSpPr>
+        <p:spPr>
+          <a:xfrm>
+            <a:off x="9180576" y="1737360"/>
+            <a:ext cx="2615184" cy="841248"/>
+          </a:xfrm>
+          <a:prstGeom prst="rect">
+            <a:avLst/>
+          </a:prstGeom>
+          <a:solidFill>
+            <a:srgbClr val="FFFFFF"/>
+          </a:solidFill>
+          <a:ln>
+            <a:noFill/>
+          </a:ln>
+        </p:spPr>
+        <p:style>
+          <a:lnRef idx="1">
+            <a:schemeClr val="accent1"/>
+          </a:lnRef>
+          <a:fillRef idx="3">
+            <a:schemeClr val="accent1"/>
+          </a:fillRef>
+          <a:effectRef idx="2">
+            <a:schemeClr val="accent1"/>
+          </a:effectRef>
+          <a:fontRef idx="minor">
+            <a:schemeClr val="lt1"/>
+          </a:fontRef>
+        </p:style>
+        <p:txBody>
+          <a:bodyPr rtlCol="0" anchor="ctr"/>
+          <a:lstStyle/>
+          <a:p>
+            <a:pPr algn="ctr"/>
+          </a:p>
+        </p:txBody>
+      </p:sp>
+      <p:sp>
+        <p:nvSpPr>
+          <p:cNvPr id="18" name="Rectangle 17"/>
+          <p:cNvSpPr/>
+          <p:nvPr/>
+        </p:nvSpPr>
+        <p:spPr>
+          <a:xfrm>
+            <a:off x="9180576" y="1737360"/>
+            <a:ext cx="73152" cy="841248"/>
+          </a:xfrm>
+          <a:prstGeom prst="rect">
+            <a:avLst/>
+          </a:prstGeom>
+          <a:solidFill>
+            <a:srgbClr val="D6575E"/>
+          </a:solidFill>
+          <a:ln>
+            <a:noFill/>
+          </a:ln>
+        </p:spPr>
+        <p:style>
+          <a:lnRef idx="1">
+            <a:schemeClr val="accent1"/>
+          </a:lnRef>
+          <a:fillRef idx="3">
+            <a:schemeClr val="accent1"/>
+          </a:fillRef>
+          <a:effectRef idx="2">
+            <a:schemeClr val="accent1"/>
+          </a:effectRef>
+          <a:fontRef idx="minor">
+            <a:schemeClr val="lt1"/>
+          </a:fontRef>
+        </p:style>
+        <p:txBody>
+          <a:bodyPr rtlCol="0" anchor="ctr"/>
+          <a:lstStyle/>
+          <a:p>
+            <a:pPr algn="ctr"/>
+          </a:p>
+        </p:txBody>
+      </p:sp>
+      <p:sp>
+        <p:nvSpPr>
+          <p:cNvPr id="19" name="TextBox 18"/>
+          <p:cNvSpPr txBox="1"/>
+          <p:nvPr/>
+        </p:nvSpPr>
+        <p:spPr>
+          <a:xfrm>
+            <a:off x="9345167" y="1847088"/>
+            <a:ext cx="2304288" cy="338328"/>
+          </a:xfrm>
+          <a:prstGeom prst="rect">
+            <a:avLst/>
+          </a:prstGeom>
+          <a:noFill/>
+        </p:spPr>
+        <p:txBody>
+          <a:bodyPr wrap="square" lIns="73152" rIns="73152" tIns="36576" bIns="27432" anchor="ctr">
+            <a:spAutoFit/>
+          </a:bodyPr>
+          <a:lstStyle/>
+          <a:p>
+            <a:pPr>
+              <a:defRPr sz="1900" b="1">
+                <a:solidFill>
+                  <a:srgbClr val="112240"/>
+                </a:solidFill>
+                <a:latin typeface="Aptos"/>
+              </a:defRPr>
+            </a:pPr>
+            <a:r>
+              <a:t>TEST ONLY</a:t>
+            </a:r>
+          </a:p>
+        </p:txBody>
+      </p:sp>
+      <p:sp>
+        <p:nvSpPr>
+          <p:cNvPr id="20" name="TextBox 19"/>
+          <p:cNvSpPr txBox="1"/>
+          <p:nvPr/>
+        </p:nvSpPr>
+        <p:spPr>
+          <a:xfrm>
+            <a:off x="9345167" y="2221992"/>
+            <a:ext cx="2304288" cy="201168"/>
+          </a:xfrm>
+          <a:prstGeom prst="rect">
+            <a:avLst/>
+          </a:prstGeom>
+          <a:noFill/>
+        </p:spPr>
+        <p:txBody>
+          <a:bodyPr wrap="square" lIns="73152" rIns="73152" tIns="36576" bIns="27432" anchor="ctr">
+            <a:spAutoFit/>
+          </a:bodyPr>
+          <a:lstStyle/>
+          <a:p>
+            <a:pPr>
+              <a:defRPr sz="900" b="0">
+                <a:solidFill>
+                  <a:srgbClr val="637389"/>
+                </a:solidFill>
+                <a:latin typeface="Aptos"/>
+              </a:defRPr>
+            </a:pPr>
+            <a:r>
+              <a:t>hukuki tespit değil</a:t>
+            </a:r>
+          </a:p>
+        </p:txBody>
+      </p:sp>
+      <p:sp>
+        <p:nvSpPr>
+          <p:cNvPr id="21" name="Rectangle 20"/>
+          <p:cNvSpPr/>
+          <p:nvPr/>
+        </p:nvSpPr>
+        <p:spPr>
+          <a:xfrm>
+            <a:off x="621792" y="2880360"/>
+            <a:ext cx="10972800" cy="941832"/>
+          </a:xfrm>
+          <a:prstGeom prst="rect">
+            <a:avLst/>
+          </a:prstGeom>
+          <a:solidFill>
+            <a:srgbClr val="FFF6DF"/>
+          </a:solidFill>
+          <a:ln>
+            <a:noFill/>
+          </a:ln>
+        </p:spPr>
+        <p:style>
+          <a:lnRef idx="1">
+            <a:schemeClr val="accent1"/>
+          </a:lnRef>
+          <a:fillRef idx="3">
+            <a:schemeClr val="accent1"/>
+          </a:fillRef>
+          <a:effectRef idx="2">
+            <a:schemeClr val="accent1"/>
+          </a:effectRef>
+          <a:fontRef idx="minor">
+            <a:schemeClr val="lt1"/>
+          </a:fontRef>
+        </p:style>
+        <p:txBody>
+          <a:bodyPr rtlCol="0" anchor="ctr"/>
+          <a:lstStyle/>
+          <a:p>
+            <a:pPr algn="ctr"/>
+          </a:p>
+        </p:txBody>
+      </p:sp>
+      <p:sp>
+        <p:nvSpPr>
+          <p:cNvPr id="22" name="TextBox 21"/>
+          <p:cNvSpPr txBox="1"/>
+          <p:nvPr/>
+        </p:nvSpPr>
+        <p:spPr>
+          <a:xfrm>
+            <a:off x="841248" y="2990088"/>
+            <a:ext cx="10332720" cy="256032"/>
+          </a:xfrm>
+          <a:prstGeom prst="rect">
+            <a:avLst/>
+          </a:prstGeom>
+          <a:noFill/>
+        </p:spPr>
+        <p:txBody>
+          <a:bodyPr wrap="square" lIns="73152" rIns="73152" tIns="36576" bIns="27432" anchor="ctr">
+            <a:spAutoFit/>
+          </a:bodyPr>
+          <a:lstStyle/>
+          <a:p>
+            <a:pPr>
+              <a:defRPr sz="1400" b="1">
+                <a:solidFill>
+                  <a:srgbClr val="112240"/>
+                </a:solidFill>
+                <a:latin typeface="Aptos"/>
+              </a:defRPr>
+            </a:pPr>
+            <a:r>
+              <a:t>HIGH · Ödeme referansı maskelenmiyor</a:t>
+            </a:r>
+          </a:p>
+        </p:txBody>
+      </p:sp>
+      <p:sp>
+        <p:nvSpPr>
+          <p:cNvPr id="23" name="TextBox 22"/>
+          <p:cNvSpPr txBox="1"/>
+          <p:nvPr/>
+        </p:nvSpPr>
+        <p:spPr>
+          <a:xfrm>
+            <a:off x="841248" y="3282696"/>
+            <a:ext cx="5120640" cy="237744"/>
+          </a:xfrm>
+          <a:prstGeom prst="rect">
+            <a:avLst/>
+          </a:prstGeom>
+          <a:noFill/>
+        </p:spPr>
+        <p:txBody>
+          <a:bodyPr wrap="square" lIns="73152" rIns="73152" tIns="36576" bIns="27432" anchor="ctr">
+            <a:spAutoFit/>
+          </a:bodyPr>
+          <a:lstStyle/>
+          <a:p>
+            <a:pPr>
+              <a:defRPr sz="1000" b="0">
+                <a:solidFill>
+                  <a:srgbClr val="223045"/>
+                </a:solidFill>
+                <a:latin typeface="Aptos"/>
+              </a:defRPr>
+            </a:pPr>
+            <a:r>
+              <a:t>payment_flow.py:6  ·  Kanıt: return value</a:t>
+            </a:r>
+          </a:p>
+        </p:txBody>
+      </p:sp>
+      <p:sp>
+        <p:nvSpPr>
+          <p:cNvPr id="24" name="TextBox 23"/>
+          <p:cNvSpPr txBox="1"/>
+          <p:nvPr/>
+        </p:nvSpPr>
+        <p:spPr>
+          <a:xfrm>
+            <a:off x="6080760" y="3282696"/>
+            <a:ext cx="5212080" cy="320040"/>
+          </a:xfrm>
+          <a:prstGeom prst="rect">
+            <a:avLst/>
+          </a:prstGeom>
+          <a:noFill/>
+        </p:spPr>
+        <p:txBody>
+          <a:bodyPr wrap="square" lIns="73152" rIns="73152" tIns="36576" bIns="27432" anchor="ctr">
+            <a:spAutoFit/>
+          </a:bodyPr>
+          <a:lstStyle/>
+          <a:p>
+            <a:pPr>
+              <a:defRPr sz="1000" b="0">
+                <a:solidFill>
+                  <a:srgbClr val="223045"/>
+                </a:solidFill>
+                <a:latin typeface="Aptos"/>
+              </a:defRPr>
+            </a:pPr>
+            <a:r>
+              <a:t>Öneri: yalnız gerekli kısmı göster; hassas değeri loglama.</a:t>
+            </a:r>
+          </a:p>
+        </p:txBody>
+      </p:sp>
+      <p:sp>
+        <p:nvSpPr>
+          <p:cNvPr id="25" name="Rectangle 24"/>
+          <p:cNvSpPr/>
+          <p:nvPr/>
+        </p:nvSpPr>
+        <p:spPr>
+          <a:xfrm>
+            <a:off x="621792" y="4023360"/>
+            <a:ext cx="10972800" cy="941832"/>
+          </a:xfrm>
+          <a:prstGeom prst="rect">
+            <a:avLst/>
+          </a:prstGeom>
+          <a:solidFill>
+            <a:srgbClr val="E7F0FA"/>
+          </a:solidFill>
+          <a:ln>
+            <a:noFill/>
+          </a:ln>
+        </p:spPr>
+        <p:style>
+          <a:lnRef idx="1">
+            <a:schemeClr val="accent1"/>
+          </a:lnRef>
+          <a:fillRef idx="3">
+            <a:schemeClr val="accent1"/>
+          </a:fillRef>
+          <a:effectRef idx="2">
+            <a:schemeClr val="accent1"/>
+          </a:effectRef>
+          <a:fontRef idx="minor">
+            <a:schemeClr val="lt1"/>
+          </a:fontRef>
+        </p:style>
+        <p:txBody>
+          <a:bodyPr rtlCol="0" anchor="ctr"/>
+          <a:lstStyle/>
+          <a:p>
+            <a:pPr algn="ctr"/>
+          </a:p>
+        </p:txBody>
+      </p:sp>
+      <p:sp>
+        <p:nvSpPr>
+          <p:cNvPr id="26" name="TextBox 25"/>
+          <p:cNvSpPr txBox="1"/>
+          <p:nvPr/>
+        </p:nvSpPr>
+        <p:spPr>
+          <a:xfrm>
+            <a:off x="841248" y="4133088"/>
+            <a:ext cx="10332720" cy="256032"/>
+          </a:xfrm>
+          <a:prstGeom prst="rect">
+            <a:avLst/>
+          </a:prstGeom>
+          <a:noFill/>
+        </p:spPr>
+        <p:txBody>
+          <a:bodyPr wrap="square" lIns="73152" rIns="73152" tIns="36576" bIns="27432" anchor="ctr">
+            <a:spAutoFit/>
+          </a:bodyPr>
+          <a:lstStyle/>
+          <a:p>
+            <a:pPr>
+              <a:defRPr sz="1400" b="1">
+                <a:solidFill>
+                  <a:srgbClr val="112240"/>
+                </a:solidFill>
+                <a:latin typeface="Aptos"/>
+              </a:defRPr>
+            </a:pPr>
+            <a:r>
+              <a:t>MEDIUM · Sıfır tutar geçerli sayılıyor</a:t>
+            </a:r>
+          </a:p>
+        </p:txBody>
+      </p:sp>
+      <p:sp>
+        <p:nvSpPr>
+          <p:cNvPr id="27" name="TextBox 26"/>
+          <p:cNvSpPr txBox="1"/>
+          <p:nvPr/>
+        </p:nvSpPr>
+        <p:spPr>
+          <a:xfrm>
+            <a:off x="841248" y="4425696"/>
+            <a:ext cx="5120640" cy="237744"/>
+          </a:xfrm>
+          <a:prstGeom prst="rect">
+            <a:avLst/>
+          </a:prstGeom>
+          <a:noFill/>
+        </p:spPr>
+        <p:txBody>
+          <a:bodyPr wrap="square" lIns="73152" rIns="73152" tIns="36576" bIns="27432" anchor="ctr">
+            <a:spAutoFit/>
+          </a:bodyPr>
+          <a:lstStyle/>
+          <a:p>
+            <a:pPr>
+              <a:defRPr sz="1000" b="0">
+                <a:solidFill>
+                  <a:srgbClr val="223045"/>
+                </a:solidFill>
+                <a:latin typeface="Aptos"/>
+              </a:defRPr>
+            </a:pPr>
+            <a:r>
+              <a:t>payment_flow.py:11  ·  Kanıt: return amount &gt;= 0</a:t>
+            </a:r>
+          </a:p>
+        </p:txBody>
+      </p:sp>
+      <p:sp>
+        <p:nvSpPr>
+          <p:cNvPr id="28" name="TextBox 27"/>
+          <p:cNvSpPr txBox="1"/>
+          <p:nvPr/>
+        </p:nvSpPr>
+        <p:spPr>
+          <a:xfrm>
+            <a:off x="6080760" y="4425696"/>
+            <a:ext cx="5212080" cy="320040"/>
+          </a:xfrm>
+          <a:prstGeom prst="rect">
+            <a:avLst/>
+          </a:prstGeom>
+          <a:noFill/>
+        </p:spPr>
+        <p:txBody>
+          <a:bodyPr wrap="square" lIns="73152" rIns="73152" tIns="36576" bIns="27432" anchor="ctr">
+            <a:spAutoFit/>
+          </a:bodyPr>
+          <a:lstStyle/>
+          <a:p>
+            <a:pPr>
+              <a:defRPr sz="1000" b="0">
+                <a:solidFill>
+                  <a:srgbClr val="223045"/>
+                </a:solidFill>
+                <a:latin typeface="Aptos"/>
+              </a:defRPr>
+            </a:pPr>
+            <a:r>
+              <a:t>Öneri: tutar sınırını iş kuralı ve kaynakla doğrula.</a:t>
+            </a:r>
+          </a:p>
+        </p:txBody>
+      </p:sp>
+      <p:sp>
+        <p:nvSpPr>
+          <p:cNvPr id="29" name="TextBox 28"/>
+          <p:cNvSpPr txBox="1"/>
+          <p:nvPr/>
+        </p:nvSpPr>
+        <p:spPr>
+          <a:xfrm>
+            <a:off x="713232" y="5358384"/>
+            <a:ext cx="8778240" cy="256032"/>
+          </a:xfrm>
+          <a:prstGeom prst="rect">
+            <a:avLst/>
+          </a:prstGeom>
+          <a:noFill/>
+        </p:spPr>
+        <p:txBody>
+          <a:bodyPr wrap="square" lIns="73152" rIns="73152" tIns="36576" bIns="27432" anchor="ctr">
+            <a:spAutoFit/>
+          </a:bodyPr>
+          <a:lstStyle/>
+          <a:p>
+            <a:pPr>
+              <a:defRPr sz="900" b="0">
+                <a:solidFill>
+                  <a:srgbClr val="637389"/>
+                </a:solidFill>
+                <a:latin typeface="Aptos"/>
+              </a:defRPr>
+            </a:pPr>
+            <a:r>
+              <a:t>Mevzuat alanı: TEST_FIXTURE_NOT_LAW · değerler sentetiktir, gerçek bulgu değildir.</a:t>
+            </a:r>
+          </a:p>
+        </p:txBody>
+      </p:sp>
+      <p:sp>
+        <p:nvSpPr>
+          <p:cNvPr id="30" name="TextBox 29"/>
+          <p:cNvSpPr txBox="1"/>
+          <p:nvPr/>
+        </p:nvSpPr>
+        <p:spPr>
+          <a:xfrm>
+            <a:off x="9235440" y="5330952"/>
+            <a:ext cx="2103120" cy="274320"/>
+          </a:xfrm>
+          <a:prstGeom prst="rect">
+            <a:avLst/>
+          </a:prstGeom>
+          <a:noFill/>
+        </p:spPr>
+        <p:txBody>
+          <a:bodyPr wrap="square" lIns="73152" rIns="73152" tIns="36576" bIns="27432" anchor="ctr">
+            <a:spAutoFit/>
+          </a:bodyPr>
+          <a:lstStyle/>
+          <a:p>
+            <a:pPr>
+              <a:defRPr sz="1000" b="1">
+                <a:solidFill>
+                  <a:srgbClr val="00AFA0"/>
+                </a:solidFill>
+                <a:latin typeface="Aptos"/>
+              </a:defRPr>
+            </a:pPr>
+            <a:r>
+              <a:rPr>
+                <a:hlinkClick r:id="rId2"/>
+              </a:rPr>
+              <a:t>HTML raporunu aç</a:t>
+            </a:r>
+          </a:p>
+        </p:txBody>
+      </p:sp>
+      <p:pic>
+        <p:nvPicPr>
+          <p:cNvPr id="31" name="Picture 30" descr="softtech-logo-light-background.png"/>
+          <p:cNvPicPr>
+            <a:picLocks noChangeAspect="1"/>
+          </p:cNvPicPr>
+          <p:nvPr/>
+        </p:nvPicPr>
+        <p:blipFill>
+          <a:blip r:embed="rId3"/>
+          <a:stretch>
+            <a:fillRect/>
+          </a:stretch>
+        </p:blipFill>
+        <p:spPr>
+          <a:xfrm>
+            <a:off x="9985248" y="6382512"/>
+            <a:ext cx="960120" cy="416755"/>
+          </a:xfrm>
+          <a:prstGeom prst="rect">
+            <a:avLst/>
+          </a:prstGeom>
+        </p:spPr>
+      </p:pic>
     </p:spTree>
   </p:cSld>
   <p:clrMapOvr>
@@ -23146,6 +26394,1782 @@
 </p:sld>
 </file>
 
+<file path=ppt/slides/slide30.xml><?xml version="1.0" encoding="utf-8"?>
+<p:sld xmlns:a="http://schemas.openxmlformats.org/drawingml/2006/main" xmlns:p="http://schemas.openxmlformats.org/presentationml/2006/main" xmlns:r="http://schemas.openxmlformats.org/officeDocument/2006/relationships">
+  <p:cSld>
+    <p:bg>
+      <p:bgPr>
+        <a:solidFill>
+          <a:srgbClr val="F7F9FC"/>
+        </a:solidFill>
+        <a:effectLst/>
+      </p:bgPr>
+    </p:bg>
+    <p:spTree>
+      <p:nvGrpSpPr>
+        <p:cNvPr id="1" name=""/>
+        <p:cNvGrpSpPr/>
+        <p:nvPr/>
+      </p:nvGrpSpPr>
+      <p:grpSpPr/>
+      <p:sp>
+        <p:nvSpPr>
+          <p:cNvPr id="2" name="TextBox 1"/>
+          <p:cNvSpPr txBox="1"/>
+          <p:nvPr/>
+        </p:nvSpPr>
+        <p:spPr>
+          <a:xfrm>
+            <a:off x="594360" y="274320"/>
+            <a:ext cx="10972800" cy="228600"/>
+          </a:xfrm>
+          <a:prstGeom prst="rect">
+            <a:avLst/>
+          </a:prstGeom>
+          <a:noFill/>
+        </p:spPr>
+        <p:txBody>
+          <a:bodyPr wrap="square" lIns="73152" rIns="73152" tIns="36576" bIns="27432" anchor="ctr">
+            <a:spAutoFit/>
+          </a:bodyPr>
+          <a:lstStyle/>
+          <a:p>
+            <a:pPr>
+              <a:defRPr sz="1000" b="1">
+                <a:solidFill>
+                  <a:srgbClr val="00AFA0"/>
+                </a:solidFill>
+                <a:latin typeface="Aptos"/>
+              </a:defRPr>
+            </a:pPr>
+            <a:r>
+              <a:t>ÖRNEK ÇIKTI · HTML REMEDIATION RAPORU</a:t>
+            </a:r>
+          </a:p>
+        </p:txBody>
+      </p:sp>
+      <p:sp>
+        <p:nvSpPr>
+          <p:cNvPr id="3" name="TextBox 2"/>
+          <p:cNvSpPr txBox="1"/>
+          <p:nvPr/>
+        </p:nvSpPr>
+        <p:spPr>
+          <a:xfrm>
+            <a:off x="594360" y="594360"/>
+            <a:ext cx="10972800" cy="502920"/>
+          </a:xfrm>
+          <a:prstGeom prst="rect">
+            <a:avLst/>
+          </a:prstGeom>
+          <a:noFill/>
+        </p:spPr>
+        <p:txBody>
+          <a:bodyPr wrap="square" lIns="73152" rIns="73152" tIns="36576" bIns="27432" anchor="ctr">
+            <a:spAutoFit/>
+          </a:bodyPr>
+          <a:lstStyle/>
+          <a:p>
+            <a:pPr>
+              <a:defRPr sz="2400" b="1">
+                <a:solidFill>
+                  <a:srgbClr val="112240"/>
+                </a:solidFill>
+                <a:latin typeface="Aptos"/>
+              </a:defRPr>
+            </a:pPr>
+            <a:r>
+              <a:t>Onaylı düzeltme ayrı dalda; değişiklikler görünür diff olarak</a:t>
+            </a:r>
+          </a:p>
+        </p:txBody>
+      </p:sp>
+      <p:sp>
+        <p:nvSpPr>
+          <p:cNvPr id="4" name="TextBox 3"/>
+          <p:cNvSpPr txBox="1"/>
+          <p:nvPr/>
+        </p:nvSpPr>
+        <p:spPr>
+          <a:xfrm>
+            <a:off x="621792" y="1115568"/>
+            <a:ext cx="10972800" cy="384048"/>
+          </a:xfrm>
+          <a:prstGeom prst="rect">
+            <a:avLst/>
+          </a:prstGeom>
+          <a:noFill/>
+        </p:spPr>
+        <p:txBody>
+          <a:bodyPr wrap="square" lIns="73152" rIns="73152" tIns="36576" bIns="27432" anchor="ctr">
+            <a:spAutoFit/>
+          </a:bodyPr>
+          <a:lstStyle/>
+          <a:p>
+            <a:pPr>
+              <a:defRPr sz="1100" b="0">
+                <a:solidFill>
+                  <a:srgbClr val="637389"/>
+                </a:solidFill>
+                <a:latin typeface="Aptos"/>
+              </a:defRPr>
+            </a:pPr>
+            <a:r>
+              <a:t>docs/examples/ornek_remediation_raporu.html uygulamanın gerçek remediation rapor şablonunu kullanır.</a:t>
+            </a:r>
+          </a:p>
+        </p:txBody>
+      </p:sp>
+      <p:sp>
+        <p:nvSpPr>
+          <p:cNvPr id="5" name="Rectangle 4"/>
+          <p:cNvSpPr/>
+          <p:nvPr/>
+        </p:nvSpPr>
+        <p:spPr>
+          <a:xfrm>
+            <a:off x="621792" y="1719072"/>
+            <a:ext cx="10972800" cy="822960"/>
+          </a:xfrm>
+          <a:prstGeom prst="rect">
+            <a:avLst/>
+          </a:prstGeom>
+          <a:solidFill>
+            <a:srgbClr val="FFF6DF"/>
+          </a:solidFill>
+          <a:ln>
+            <a:noFill/>
+          </a:ln>
+        </p:spPr>
+        <p:style>
+          <a:lnRef idx="1">
+            <a:schemeClr val="accent1"/>
+          </a:lnRef>
+          <a:fillRef idx="3">
+            <a:schemeClr val="accent1"/>
+          </a:fillRef>
+          <a:effectRef idx="2">
+            <a:schemeClr val="accent1"/>
+          </a:effectRef>
+          <a:fontRef idx="minor">
+            <a:schemeClr val="lt1"/>
+          </a:fontRef>
+        </p:style>
+        <p:txBody>
+          <a:bodyPr rtlCol="0" anchor="ctr"/>
+          <a:lstStyle/>
+          <a:p>
+            <a:pPr algn="ctr"/>
+          </a:p>
+        </p:txBody>
+      </p:sp>
+      <p:sp>
+        <p:nvSpPr>
+          <p:cNvPr id="6" name="TextBox 5"/>
+          <p:cNvSpPr txBox="1"/>
+          <p:nvPr/>
+        </p:nvSpPr>
+        <p:spPr>
+          <a:xfrm>
+            <a:off x="841248" y="1938528"/>
+            <a:ext cx="10469880" cy="310896"/>
+          </a:xfrm>
+          <a:prstGeom prst="rect">
+            <a:avLst/>
+          </a:prstGeom>
+          <a:noFill/>
+        </p:spPr>
+        <p:txBody>
+          <a:bodyPr wrap="square" lIns="73152" rIns="73152" tIns="36576" bIns="27432" anchor="ctr">
+            <a:spAutoFit/>
+          </a:bodyPr>
+          <a:lstStyle/>
+          <a:p>
+            <a:pPr>
+              <a:defRPr sz="1200" b="1">
+                <a:solidFill>
+                  <a:srgbClr val="112240"/>
+                </a:solidFill>
+                <a:latin typeface="Aptos"/>
+              </a:defRPr>
+            </a:pPr>
+            <a:r>
+              <a:t>YALNIZCA SENTETİK TEST ÖRNEĞİ · Hukuki uygunluk, canlı sistem davranışı veya PR sonucu göstermez.</a:t>
+            </a:r>
+          </a:p>
+        </p:txBody>
+      </p:sp>
+      <p:sp>
+        <p:nvSpPr>
+          <p:cNvPr id="7" name="TextBox 6"/>
+          <p:cNvSpPr txBox="1"/>
+          <p:nvPr/>
+        </p:nvSpPr>
+        <p:spPr>
+          <a:xfrm>
+            <a:off x="841248" y="2834640"/>
+            <a:ext cx="4937760" cy="292608"/>
+          </a:xfrm>
+          <a:prstGeom prst="rect">
+            <a:avLst/>
+          </a:prstGeom>
+          <a:noFill/>
+        </p:spPr>
+        <p:txBody>
+          <a:bodyPr wrap="square" lIns="73152" rIns="73152" tIns="36576" bIns="27432" anchor="ctr">
+            <a:spAutoFit/>
+          </a:bodyPr>
+          <a:lstStyle/>
+          <a:p>
+            <a:pPr>
+              <a:defRPr sz="1400" b="1">
+                <a:solidFill>
+                  <a:srgbClr val="112240"/>
+                </a:solidFill>
+                <a:latin typeface="Aptos"/>
+              </a:defRPr>
+            </a:pPr>
+            <a:r>
+              <a:t>payment_flow.py</a:t>
+            </a:r>
+          </a:p>
+        </p:txBody>
+      </p:sp>
+      <p:sp>
+        <p:nvSpPr>
+          <p:cNvPr id="8" name="Rectangle 7"/>
+          <p:cNvSpPr/>
+          <p:nvPr/>
+        </p:nvSpPr>
+        <p:spPr>
+          <a:xfrm>
+            <a:off x="621792" y="3227832"/>
+            <a:ext cx="5257800" cy="1536192"/>
+          </a:xfrm>
+          <a:prstGeom prst="rect">
+            <a:avLst/>
+          </a:prstGeom>
+          <a:solidFill>
+            <a:srgbClr val="FFFFFF"/>
+          </a:solidFill>
+          <a:ln>
+            <a:noFill/>
+          </a:ln>
+        </p:spPr>
+        <p:style>
+          <a:lnRef idx="1">
+            <a:schemeClr val="accent1"/>
+          </a:lnRef>
+          <a:fillRef idx="3">
+            <a:schemeClr val="accent1"/>
+          </a:fillRef>
+          <a:effectRef idx="2">
+            <a:schemeClr val="accent1"/>
+          </a:effectRef>
+          <a:fontRef idx="minor">
+            <a:schemeClr val="lt1"/>
+          </a:fontRef>
+        </p:style>
+        <p:txBody>
+          <a:bodyPr rtlCol="0" anchor="ctr"/>
+          <a:lstStyle/>
+          <a:p>
+            <a:pPr algn="ctr"/>
+          </a:p>
+        </p:txBody>
+      </p:sp>
+      <p:sp>
+        <p:nvSpPr>
+          <p:cNvPr id="9" name="TextBox 8"/>
+          <p:cNvSpPr txBox="1"/>
+          <p:nvPr/>
+        </p:nvSpPr>
+        <p:spPr>
+          <a:xfrm>
+            <a:off x="841248" y="3401568"/>
+            <a:ext cx="4800600" cy="1143000"/>
+          </a:xfrm>
+          <a:prstGeom prst="rect">
+            <a:avLst/>
+          </a:prstGeom>
+          <a:noFill/>
+        </p:spPr>
+        <p:txBody>
+          <a:bodyPr wrap="square" lIns="73152" rIns="73152" tIns="36576" bIns="27432" anchor="ctr">
+            <a:spAutoFit/>
+          </a:bodyPr>
+          <a:lstStyle/>
+          <a:p>
+            <a:pPr>
+              <a:defRPr sz="1100" b="0">
+                <a:solidFill>
+                  <a:srgbClr val="223045"/>
+                </a:solidFill>
+                <a:latin typeface="Aptos"/>
+              </a:defRPr>
+            </a:pPr>
+            <a:r>
+              <a:t>- return value</a:t>
+            </a:r>
+          </a:p>
+          <a:p>
+            <a:pPr>
+              <a:defRPr sz="1100" b="0">
+                <a:solidFill>
+                  <a:srgbClr val="223045"/>
+                </a:solidFill>
+                <a:latin typeface="Aptos"/>
+              </a:defRPr>
+            </a:pPr>
+            <a:r>
+              <a:t>+ return "*" * max(0, len(value) - visible) + value[-visible:]</a:t>
+            </a:r>
+          </a:p>
+          <a:p>
+            <a:pPr>
+              <a:defRPr sz="1100" b="0">
+                <a:solidFill>
+                  <a:srgbClr val="223045"/>
+                </a:solidFill>
+                <a:latin typeface="Aptos"/>
+              </a:defRPr>
+            </a:pPr>
+          </a:p>
+          <a:p>
+            <a:pPr>
+              <a:defRPr sz="1100" b="0">
+                <a:solidFill>
+                  <a:srgbClr val="223045"/>
+                </a:solidFill>
+                <a:latin typeface="Aptos"/>
+              </a:defRPr>
+            </a:pPr>
+            <a:r>
+              <a:t>- return amount &gt;= 0</a:t>
+            </a:r>
+          </a:p>
+          <a:p>
+            <a:pPr>
+              <a:defRPr sz="1100" b="0">
+                <a:solidFill>
+                  <a:srgbClr val="223045"/>
+                </a:solidFill>
+                <a:latin typeface="Aptos"/>
+              </a:defRPr>
+            </a:pPr>
+            <a:r>
+              <a:t>+ return amount &gt; 0</a:t>
+            </a:r>
+          </a:p>
+        </p:txBody>
+      </p:sp>
+      <p:sp>
+        <p:nvSpPr>
+          <p:cNvPr id="10" name="Rectangle 9"/>
+          <p:cNvSpPr/>
+          <p:nvPr/>
+        </p:nvSpPr>
+        <p:spPr>
+          <a:xfrm>
+            <a:off x="6108192" y="2834640"/>
+            <a:ext cx="5486400" cy="1929384"/>
+          </a:xfrm>
+          <a:prstGeom prst="rect">
+            <a:avLst/>
+          </a:prstGeom>
+          <a:solidFill>
+            <a:srgbClr val="E7F0FA"/>
+          </a:solidFill>
+          <a:ln>
+            <a:noFill/>
+          </a:ln>
+        </p:spPr>
+        <p:style>
+          <a:lnRef idx="1">
+            <a:schemeClr val="accent1"/>
+          </a:lnRef>
+          <a:fillRef idx="3">
+            <a:schemeClr val="accent1"/>
+          </a:fillRef>
+          <a:effectRef idx="2">
+            <a:schemeClr val="accent1"/>
+          </a:effectRef>
+          <a:fontRef idx="minor">
+            <a:schemeClr val="lt1"/>
+          </a:fontRef>
+        </p:style>
+        <p:txBody>
+          <a:bodyPr rtlCol="0" anchor="ctr"/>
+          <a:lstStyle/>
+          <a:p>
+            <a:pPr algn="ctr"/>
+          </a:p>
+        </p:txBody>
+      </p:sp>
+      <p:sp>
+        <p:nvSpPr>
+          <p:cNvPr id="11" name="TextBox 10"/>
+          <p:cNvSpPr txBox="1"/>
+          <p:nvPr/>
+        </p:nvSpPr>
+        <p:spPr>
+          <a:xfrm>
+            <a:off x="6345936" y="3026664"/>
+            <a:ext cx="4983480" cy="310896"/>
+          </a:xfrm>
+          <a:prstGeom prst="rect">
+            <a:avLst/>
+          </a:prstGeom>
+          <a:noFill/>
+        </p:spPr>
+        <p:txBody>
+          <a:bodyPr wrap="square" lIns="73152" rIns="73152" tIns="36576" bIns="27432" anchor="ctr">
+            <a:spAutoFit/>
+          </a:bodyPr>
+          <a:lstStyle/>
+          <a:p>
+            <a:pPr>
+              <a:defRPr sz="1400" b="1">
+                <a:solidFill>
+                  <a:srgbClr val="112240"/>
+                </a:solidFill>
+                <a:latin typeface="Aptos"/>
+              </a:defRPr>
+            </a:pPr>
+            <a:r>
+              <a:t>Raporda görülenler</a:t>
+            </a:r>
+          </a:p>
+        </p:txBody>
+      </p:sp>
+      <p:sp>
+        <p:nvSpPr>
+          <p:cNvPr id="12" name="TextBox 11"/>
+          <p:cNvSpPr txBox="1"/>
+          <p:nvPr/>
+        </p:nvSpPr>
+        <p:spPr>
+          <a:xfrm>
+            <a:off x="6345936" y="3465576"/>
+            <a:ext cx="4937760" cy="1115568"/>
+          </a:xfrm>
+          <a:prstGeom prst="rect">
+            <a:avLst/>
+          </a:prstGeom>
+          <a:noFill/>
+        </p:spPr>
+        <p:txBody>
+          <a:bodyPr wrap="square" lIns="73152" rIns="73152" tIns="36576" bIns="27432" anchor="ctr">
+            <a:spAutoFit/>
+          </a:bodyPr>
+          <a:lstStyle/>
+          <a:p>
+            <a:pPr>
+              <a:defRPr sz="1100" b="0">
+                <a:solidFill>
+                  <a:srgbClr val="223045"/>
+                </a:solidFill>
+                <a:latin typeface="Aptos"/>
+              </a:defRPr>
+            </a:pPr>
+            <a:r>
+              <a:t>Kaynak depo ve izole worktree\nRemediation dalı\nÖnce/sonra kod farkı\nSentetik fixture uyarısı\n</a:t>
+            </a:r>
+          </a:p>
+          <a:p>
+            <a:pPr>
+              <a:defRPr sz="1100" b="0">
+                <a:solidFill>
+                  <a:srgbClr val="223045"/>
+                </a:solidFill>
+                <a:latin typeface="Aptos"/>
+              </a:defRPr>
+            </a:pPr>
+            <a:r>
+              <a:t>Test ve PR ayrı onaylı adımlardır.</a:t>
+            </a:r>
+          </a:p>
+        </p:txBody>
+      </p:sp>
+      <p:sp>
+        <p:nvSpPr>
+          <p:cNvPr id="13" name="TextBox 12"/>
+          <p:cNvSpPr txBox="1"/>
+          <p:nvPr/>
+        </p:nvSpPr>
+        <p:spPr>
+          <a:xfrm>
+            <a:off x="841248" y="5230368"/>
+            <a:ext cx="3749039" cy="274320"/>
+          </a:xfrm>
+          <a:prstGeom prst="rect">
+            <a:avLst/>
+          </a:prstGeom>
+          <a:noFill/>
+        </p:spPr>
+        <p:txBody>
+          <a:bodyPr wrap="square" lIns="73152" rIns="73152" tIns="36576" bIns="27432" anchor="ctr">
+            <a:spAutoFit/>
+          </a:bodyPr>
+          <a:lstStyle/>
+          <a:p>
+            <a:pPr>
+              <a:defRPr sz="1000" b="1">
+                <a:solidFill>
+                  <a:srgbClr val="00AFA0"/>
+                </a:solidFill>
+                <a:latin typeface="Aptos"/>
+              </a:defRPr>
+            </a:pPr>
+            <a:r>
+              <a:rPr>
+                <a:hlinkClick r:id="rId2"/>
+              </a:rPr>
+              <a:t>HTML remediation raporunu aç</a:t>
+            </a:r>
+          </a:p>
+        </p:txBody>
+      </p:sp>
+      <p:sp>
+        <p:nvSpPr>
+          <p:cNvPr id="14" name="TextBox 13"/>
+          <p:cNvSpPr txBox="1"/>
+          <p:nvPr/>
+        </p:nvSpPr>
+        <p:spPr>
+          <a:xfrm>
+            <a:off x="841248" y="5532120"/>
+            <a:ext cx="8686800" cy="256032"/>
+          </a:xfrm>
+          <a:prstGeom prst="rect">
+            <a:avLst/>
+          </a:prstGeom>
+          <a:noFill/>
+        </p:spPr>
+        <p:txBody>
+          <a:bodyPr wrap="square" lIns="73152" rIns="73152" tIns="36576" bIns="27432" anchor="ctr">
+            <a:spAutoFit/>
+          </a:bodyPr>
+          <a:lstStyle/>
+          <a:p>
+            <a:pPr>
+              <a:defRPr sz="900" b="0">
+                <a:solidFill>
+                  <a:srgbClr val="637389"/>
+                </a:solidFill>
+                <a:latin typeface="Aptos"/>
+              </a:defRPr>
+            </a:pPr>
+            <a:r>
+              <a:t>Uygulama diff'i tek başına test başarısı veya mevzuata uygunluk kanıtı saymaz.</a:t>
+            </a:r>
+          </a:p>
+        </p:txBody>
+      </p:sp>
+      <p:pic>
+        <p:nvPicPr>
+          <p:cNvPr id="15" name="Picture 14" descr="softtech-logo-light-background.png"/>
+          <p:cNvPicPr>
+            <a:picLocks noChangeAspect="1"/>
+          </p:cNvPicPr>
+          <p:nvPr/>
+        </p:nvPicPr>
+        <p:blipFill>
+          <a:blip r:embed="rId3"/>
+          <a:stretch>
+            <a:fillRect/>
+          </a:stretch>
+        </p:blipFill>
+        <p:spPr>
+          <a:xfrm>
+            <a:off x="9985248" y="6382512"/>
+            <a:ext cx="960120" cy="416755"/>
+          </a:xfrm>
+          <a:prstGeom prst="rect">
+            <a:avLst/>
+          </a:prstGeom>
+        </p:spPr>
+      </p:pic>
+    </p:spTree>
+  </p:cSld>
+  <p:clrMapOvr>
+    <a:masterClrMapping/>
+  </p:clrMapOvr>
+</p:sld>
+</file>
+
+<file path=ppt/slides/slide31.xml><?xml version="1.0" encoding="utf-8"?>
+<p:sld xmlns:a="http://schemas.openxmlformats.org/drawingml/2006/main" xmlns:p="http://schemas.openxmlformats.org/presentationml/2006/main" xmlns:r="http://schemas.openxmlformats.org/officeDocument/2006/relationships">
+  <p:cSld>
+    <p:bg>
+      <p:bgPr>
+        <a:solidFill>
+          <a:srgbClr val="F7F9FC"/>
+        </a:solidFill>
+        <a:effectLst/>
+      </p:bgPr>
+    </p:bg>
+    <p:spTree>
+      <p:nvGrpSpPr>
+        <p:cNvPr id="1" name=""/>
+        <p:cNvGrpSpPr/>
+        <p:nvPr/>
+      </p:nvGrpSpPr>
+      <p:grpSpPr/>
+      <p:sp>
+        <p:nvSpPr>
+          <p:cNvPr id="2" name="TextBox 1"/>
+          <p:cNvSpPr txBox="1"/>
+          <p:nvPr/>
+        </p:nvSpPr>
+        <p:spPr>
+          <a:xfrm>
+            <a:off x="594360" y="274320"/>
+            <a:ext cx="10972800" cy="228600"/>
+          </a:xfrm>
+          <a:prstGeom prst="rect">
+            <a:avLst/>
+          </a:prstGeom>
+          <a:noFill/>
+        </p:spPr>
+        <p:txBody>
+          <a:bodyPr wrap="square" lIns="73152" rIns="73152" tIns="36576" bIns="27432" anchor="ctr">
+            <a:spAutoFit/>
+          </a:bodyPr>
+          <a:lstStyle/>
+          <a:p>
+            <a:pPr>
+              <a:defRPr sz="1000" b="1">
+                <a:solidFill>
+                  <a:srgbClr val="00AFA0"/>
+                </a:solidFill>
+                <a:latin typeface="Aptos"/>
+              </a:defRPr>
+            </a:pPr>
+            <a:r>
+              <a:t>UÇTAN UCA · YEREL E2E TESTİ</a:t>
+            </a:r>
+          </a:p>
+        </p:txBody>
+      </p:sp>
+      <p:sp>
+        <p:nvSpPr>
+          <p:cNvPr id="3" name="TextBox 2"/>
+          <p:cNvSpPr txBox="1"/>
+          <p:nvPr/>
+        </p:nvSpPr>
+        <p:spPr>
+          <a:xfrm>
+            <a:off x="594360" y="594360"/>
+            <a:ext cx="10972800" cy="502920"/>
+          </a:xfrm>
+          <a:prstGeom prst="rect">
+            <a:avLst/>
+          </a:prstGeom>
+          <a:noFill/>
+        </p:spPr>
+        <p:txBody>
+          <a:bodyPr wrap="square" lIns="73152" rIns="73152" tIns="36576" bIns="27432" anchor="ctr">
+            <a:spAutoFit/>
+          </a:bodyPr>
+          <a:lstStyle/>
+          <a:p>
+            <a:pPr>
+              <a:defRPr sz="2400" b="1">
+                <a:solidFill>
+                  <a:srgbClr val="112240"/>
+                </a:solidFill>
+                <a:latin typeface="Aptos"/>
+              </a:defRPr>
+            </a:pPr>
+            <a:r>
+              <a:t>RAG'den yerel PR provasına kadar her aşama çalıştırıldı</a:t>
+            </a:r>
+          </a:p>
+        </p:txBody>
+      </p:sp>
+      <p:sp>
+        <p:nvSpPr>
+          <p:cNvPr id="4" name="TextBox 3"/>
+          <p:cNvSpPr txBox="1"/>
+          <p:nvPr/>
+        </p:nvSpPr>
+        <p:spPr>
+          <a:xfrm>
+            <a:off x="621792" y="1115568"/>
+            <a:ext cx="10972800" cy="384048"/>
+          </a:xfrm>
+          <a:prstGeom prst="rect">
+            <a:avLst/>
+          </a:prstGeom>
+          <a:noFill/>
+        </p:spPr>
+        <p:txBody>
+          <a:bodyPr wrap="square" lIns="73152" rIns="73152" tIns="36576" bIns="27432" anchor="ctr">
+            <a:spAutoFit/>
+          </a:bodyPr>
+          <a:lstStyle/>
+          <a:p>
+            <a:pPr>
+              <a:defRPr sz="1100" b="0">
+                <a:solidFill>
+                  <a:srgbClr val="637389"/>
+                </a:solidFill>
+                <a:latin typeface="Aptos"/>
+              </a:defRPr>
+            </a:pPr>
+            <a:r>
+              <a:t>Deterministik test: tarama için mock Ollama ve sentetik fixture; gerçek GitHub PR oluşturulmadı.</a:t>
+            </a:r>
+          </a:p>
+        </p:txBody>
+      </p:sp>
+      <p:sp>
+        <p:nvSpPr>
+          <p:cNvPr id="5" name="Rectangle 4"/>
+          <p:cNvSpPr/>
+          <p:nvPr/>
+        </p:nvSpPr>
+        <p:spPr>
+          <a:xfrm>
+            <a:off x="621792" y="1737360"/>
+            <a:ext cx="2615184" cy="841248"/>
+          </a:xfrm>
+          <a:prstGeom prst="rect">
+            <a:avLst/>
+          </a:prstGeom>
+          <a:solidFill>
+            <a:srgbClr val="FFFFFF"/>
+          </a:solidFill>
+          <a:ln>
+            <a:noFill/>
+          </a:ln>
+        </p:spPr>
+        <p:style>
+          <a:lnRef idx="1">
+            <a:schemeClr val="accent1"/>
+          </a:lnRef>
+          <a:fillRef idx="3">
+            <a:schemeClr val="accent1"/>
+          </a:fillRef>
+          <a:effectRef idx="2">
+            <a:schemeClr val="accent1"/>
+          </a:effectRef>
+          <a:fontRef idx="minor">
+            <a:schemeClr val="lt1"/>
+          </a:fontRef>
+        </p:style>
+        <p:txBody>
+          <a:bodyPr rtlCol="0" anchor="ctr"/>
+          <a:lstStyle/>
+          <a:p>
+            <a:pPr algn="ctr"/>
+          </a:p>
+        </p:txBody>
+      </p:sp>
+      <p:sp>
+        <p:nvSpPr>
+          <p:cNvPr id="6" name="Rectangle 5"/>
+          <p:cNvSpPr/>
+          <p:nvPr/>
+        </p:nvSpPr>
+        <p:spPr>
+          <a:xfrm>
+            <a:off x="621792" y="1737360"/>
+            <a:ext cx="73152" cy="841248"/>
+          </a:xfrm>
+          <a:prstGeom prst="rect">
+            <a:avLst/>
+          </a:prstGeom>
+          <a:solidFill>
+            <a:srgbClr val="00AFA0"/>
+          </a:solidFill>
+          <a:ln>
+            <a:noFill/>
+          </a:ln>
+        </p:spPr>
+        <p:style>
+          <a:lnRef idx="1">
+            <a:schemeClr val="accent1"/>
+          </a:lnRef>
+          <a:fillRef idx="3">
+            <a:schemeClr val="accent1"/>
+          </a:fillRef>
+          <a:effectRef idx="2">
+            <a:schemeClr val="accent1"/>
+          </a:effectRef>
+          <a:fontRef idx="minor">
+            <a:schemeClr val="lt1"/>
+          </a:fontRef>
+        </p:style>
+        <p:txBody>
+          <a:bodyPr rtlCol="0" anchor="ctr"/>
+          <a:lstStyle/>
+          <a:p>
+            <a:pPr algn="ctr"/>
+          </a:p>
+        </p:txBody>
+      </p:sp>
+      <p:sp>
+        <p:nvSpPr>
+          <p:cNvPr id="7" name="TextBox 6"/>
+          <p:cNvSpPr txBox="1"/>
+          <p:nvPr/>
+        </p:nvSpPr>
+        <p:spPr>
+          <a:xfrm>
+            <a:off x="786384" y="1847088"/>
+            <a:ext cx="2304288" cy="338328"/>
+          </a:xfrm>
+          <a:prstGeom prst="rect">
+            <a:avLst/>
+          </a:prstGeom>
+          <a:noFill/>
+        </p:spPr>
+        <p:txBody>
+          <a:bodyPr wrap="square" lIns="73152" rIns="73152" tIns="36576" bIns="27432" anchor="ctr">
+            <a:spAutoFit/>
+          </a:bodyPr>
+          <a:lstStyle/>
+          <a:p>
+            <a:pPr>
+              <a:defRPr sz="1900" b="1">
+                <a:solidFill>
+                  <a:srgbClr val="112240"/>
+                </a:solidFill>
+                <a:latin typeface="Aptos"/>
+              </a:defRPr>
+            </a:pPr>
+            <a:r>
+              <a:t>2 PDF</a:t>
+            </a:r>
+          </a:p>
+        </p:txBody>
+      </p:sp>
+      <p:sp>
+        <p:nvSpPr>
+          <p:cNvPr id="8" name="TextBox 7"/>
+          <p:cNvSpPr txBox="1"/>
+          <p:nvPr/>
+        </p:nvSpPr>
+        <p:spPr>
+          <a:xfrm>
+            <a:off x="786384" y="2221992"/>
+            <a:ext cx="2304288" cy="201168"/>
+          </a:xfrm>
+          <a:prstGeom prst="rect">
+            <a:avLst/>
+          </a:prstGeom>
+          <a:noFill/>
+        </p:spPr>
+        <p:txBody>
+          <a:bodyPr wrap="square" lIns="73152" rIns="73152" tIns="36576" bIns="27432" anchor="ctr">
+            <a:spAutoFit/>
+          </a:bodyPr>
+          <a:lstStyle/>
+          <a:p>
+            <a:pPr>
+              <a:defRPr sz="900" b="0">
+                <a:solidFill>
+                  <a:srgbClr val="637389"/>
+                </a:solidFill>
+                <a:latin typeface="Aptos"/>
+              </a:defRPr>
+            </a:pPr>
+            <a:r>
+              <a:t>146 mevzuat chunk</a:t>
+            </a:r>
+          </a:p>
+        </p:txBody>
+      </p:sp>
+      <p:sp>
+        <p:nvSpPr>
+          <p:cNvPr id="9" name="Rectangle 8"/>
+          <p:cNvSpPr/>
+          <p:nvPr/>
+        </p:nvSpPr>
+        <p:spPr>
+          <a:xfrm>
+            <a:off x="3474720" y="1737360"/>
+            <a:ext cx="2615184" cy="841248"/>
+          </a:xfrm>
+          <a:prstGeom prst="rect">
+            <a:avLst/>
+          </a:prstGeom>
+          <a:solidFill>
+            <a:srgbClr val="FFFFFF"/>
+          </a:solidFill>
+          <a:ln>
+            <a:noFill/>
+          </a:ln>
+        </p:spPr>
+        <p:style>
+          <a:lnRef idx="1">
+            <a:schemeClr val="accent1"/>
+          </a:lnRef>
+          <a:fillRef idx="3">
+            <a:schemeClr val="accent1"/>
+          </a:fillRef>
+          <a:effectRef idx="2">
+            <a:schemeClr val="accent1"/>
+          </a:effectRef>
+          <a:fontRef idx="minor">
+            <a:schemeClr val="lt1"/>
+          </a:fontRef>
+        </p:style>
+        <p:txBody>
+          <a:bodyPr rtlCol="0" anchor="ctr"/>
+          <a:lstStyle/>
+          <a:p>
+            <a:pPr algn="ctr"/>
+          </a:p>
+        </p:txBody>
+      </p:sp>
+      <p:sp>
+        <p:nvSpPr>
+          <p:cNvPr id="10" name="Rectangle 9"/>
+          <p:cNvSpPr/>
+          <p:nvPr/>
+        </p:nvSpPr>
+        <p:spPr>
+          <a:xfrm>
+            <a:off x="3474720" y="1737360"/>
+            <a:ext cx="73152" cy="841248"/>
+          </a:xfrm>
+          <a:prstGeom prst="rect">
+            <a:avLst/>
+          </a:prstGeom>
+          <a:solidFill>
+            <a:srgbClr val="35BED7"/>
+          </a:solidFill>
+          <a:ln>
+            <a:noFill/>
+          </a:ln>
+        </p:spPr>
+        <p:style>
+          <a:lnRef idx="1">
+            <a:schemeClr val="accent1"/>
+          </a:lnRef>
+          <a:fillRef idx="3">
+            <a:schemeClr val="accent1"/>
+          </a:fillRef>
+          <a:effectRef idx="2">
+            <a:schemeClr val="accent1"/>
+          </a:effectRef>
+          <a:fontRef idx="minor">
+            <a:schemeClr val="lt1"/>
+          </a:fontRef>
+        </p:style>
+        <p:txBody>
+          <a:bodyPr rtlCol="0" anchor="ctr"/>
+          <a:lstStyle/>
+          <a:p>
+            <a:pPr algn="ctr"/>
+          </a:p>
+        </p:txBody>
+      </p:sp>
+      <p:sp>
+        <p:nvSpPr>
+          <p:cNvPr id="11" name="TextBox 10"/>
+          <p:cNvSpPr txBox="1"/>
+          <p:nvPr/>
+        </p:nvSpPr>
+        <p:spPr>
+          <a:xfrm>
+            <a:off x="3639312" y="1847088"/>
+            <a:ext cx="2304288" cy="338328"/>
+          </a:xfrm>
+          <a:prstGeom prst="rect">
+            <a:avLst/>
+          </a:prstGeom>
+          <a:noFill/>
+        </p:spPr>
+        <p:txBody>
+          <a:bodyPr wrap="square" lIns="73152" rIns="73152" tIns="36576" bIns="27432" anchor="ctr">
+            <a:spAutoFit/>
+          </a:bodyPr>
+          <a:lstStyle/>
+          <a:p>
+            <a:pPr>
+              <a:defRPr sz="1900" b="1">
+                <a:solidFill>
+                  <a:srgbClr val="112240"/>
+                </a:solidFill>
+                <a:latin typeface="Aptos"/>
+              </a:defRPr>
+            </a:pPr>
+            <a:r>
+              <a:t>1 dosya</a:t>
+            </a:r>
+          </a:p>
+        </p:txBody>
+      </p:sp>
+      <p:sp>
+        <p:nvSpPr>
+          <p:cNvPr id="12" name="TextBox 11"/>
+          <p:cNvSpPr txBox="1"/>
+          <p:nvPr/>
+        </p:nvSpPr>
+        <p:spPr>
+          <a:xfrm>
+            <a:off x="3639312" y="2221992"/>
+            <a:ext cx="2304288" cy="201168"/>
+          </a:xfrm>
+          <a:prstGeom prst="rect">
+            <a:avLst/>
+          </a:prstGeom>
+          <a:noFill/>
+        </p:spPr>
+        <p:txBody>
+          <a:bodyPr wrap="square" lIns="73152" rIns="73152" tIns="36576" bIns="27432" anchor="ctr">
+            <a:spAutoFit/>
+          </a:bodyPr>
+          <a:lstStyle/>
+          <a:p>
+            <a:pPr>
+              <a:defRPr sz="900" b="0">
+                <a:solidFill>
+                  <a:srgbClr val="637389"/>
+                </a:solidFill>
+                <a:latin typeface="Aptos"/>
+              </a:defRPr>
+            </a:pPr>
+            <a:r>
+              <a:t>tahmin ve tarama</a:t>
+            </a:r>
+          </a:p>
+        </p:txBody>
+      </p:sp>
+      <p:sp>
+        <p:nvSpPr>
+          <p:cNvPr id="13" name="Rectangle 12"/>
+          <p:cNvSpPr/>
+          <p:nvPr/>
+        </p:nvSpPr>
+        <p:spPr>
+          <a:xfrm>
+            <a:off x="6327648" y="1737360"/>
+            <a:ext cx="2615184" cy="841248"/>
+          </a:xfrm>
+          <a:prstGeom prst="rect">
+            <a:avLst/>
+          </a:prstGeom>
+          <a:solidFill>
+            <a:srgbClr val="FFFFFF"/>
+          </a:solidFill>
+          <a:ln>
+            <a:noFill/>
+          </a:ln>
+        </p:spPr>
+        <p:style>
+          <a:lnRef idx="1">
+            <a:schemeClr val="accent1"/>
+          </a:lnRef>
+          <a:fillRef idx="3">
+            <a:schemeClr val="accent1"/>
+          </a:fillRef>
+          <a:effectRef idx="2">
+            <a:schemeClr val="accent1"/>
+          </a:effectRef>
+          <a:fontRef idx="minor">
+            <a:schemeClr val="lt1"/>
+          </a:fontRef>
+        </p:style>
+        <p:txBody>
+          <a:bodyPr rtlCol="0" anchor="ctr"/>
+          <a:lstStyle/>
+          <a:p>
+            <a:pPr algn="ctr"/>
+          </a:p>
+        </p:txBody>
+      </p:sp>
+      <p:sp>
+        <p:nvSpPr>
+          <p:cNvPr id="14" name="Rectangle 13"/>
+          <p:cNvSpPr/>
+          <p:nvPr/>
+        </p:nvSpPr>
+        <p:spPr>
+          <a:xfrm>
+            <a:off x="6327648" y="1737360"/>
+            <a:ext cx="73152" cy="841248"/>
+          </a:xfrm>
+          <a:prstGeom prst="rect">
+            <a:avLst/>
+          </a:prstGeom>
+          <a:solidFill>
+            <a:srgbClr val="F8BC4A"/>
+          </a:solidFill>
+          <a:ln>
+            <a:noFill/>
+          </a:ln>
+        </p:spPr>
+        <p:style>
+          <a:lnRef idx="1">
+            <a:schemeClr val="accent1"/>
+          </a:lnRef>
+          <a:fillRef idx="3">
+            <a:schemeClr val="accent1"/>
+          </a:fillRef>
+          <a:effectRef idx="2">
+            <a:schemeClr val="accent1"/>
+          </a:effectRef>
+          <a:fontRef idx="minor">
+            <a:schemeClr val="lt1"/>
+          </a:fontRef>
+        </p:style>
+        <p:txBody>
+          <a:bodyPr rtlCol="0" anchor="ctr"/>
+          <a:lstStyle/>
+          <a:p>
+            <a:pPr algn="ctr"/>
+          </a:p>
+        </p:txBody>
+      </p:sp>
+      <p:sp>
+        <p:nvSpPr>
+          <p:cNvPr id="15" name="TextBox 14"/>
+          <p:cNvSpPr txBox="1"/>
+          <p:nvPr/>
+        </p:nvSpPr>
+        <p:spPr>
+          <a:xfrm>
+            <a:off x="6492240" y="1847088"/>
+            <a:ext cx="2304288" cy="338328"/>
+          </a:xfrm>
+          <a:prstGeom prst="rect">
+            <a:avLst/>
+          </a:prstGeom>
+          <a:noFill/>
+        </p:spPr>
+        <p:txBody>
+          <a:bodyPr wrap="square" lIns="73152" rIns="73152" tIns="36576" bIns="27432" anchor="ctr">
+            <a:spAutoFit/>
+          </a:bodyPr>
+          <a:lstStyle/>
+          <a:p>
+            <a:pPr>
+              <a:defRPr sz="1900" b="1">
+                <a:solidFill>
+                  <a:srgbClr val="112240"/>
+                </a:solidFill>
+                <a:latin typeface="Aptos"/>
+              </a:defRPr>
+            </a:pPr>
+            <a:r>
+              <a:t>2 bulgu</a:t>
+            </a:r>
+          </a:p>
+        </p:txBody>
+      </p:sp>
+      <p:sp>
+        <p:nvSpPr>
+          <p:cNvPr id="16" name="TextBox 15"/>
+          <p:cNvSpPr txBox="1"/>
+          <p:nvPr/>
+        </p:nvSpPr>
+        <p:spPr>
+          <a:xfrm>
+            <a:off x="6492240" y="2221992"/>
+            <a:ext cx="2304288" cy="201168"/>
+          </a:xfrm>
+          <a:prstGeom prst="rect">
+            <a:avLst/>
+          </a:prstGeom>
+          <a:noFill/>
+        </p:spPr>
+        <p:txBody>
+          <a:bodyPr wrap="square" lIns="73152" rIns="73152" tIns="36576" bIns="27432" anchor="ctr">
+            <a:spAutoFit/>
+          </a:bodyPr>
+          <a:lstStyle/>
+          <a:p>
+            <a:pPr>
+              <a:defRPr sz="900" b="0">
+                <a:solidFill>
+                  <a:srgbClr val="637389"/>
+                </a:solidFill>
+                <a:latin typeface="Aptos"/>
+              </a:defRPr>
+            </a:pPr>
+            <a:r>
+              <a:t>sentetik / doğrulanmış</a:t>
+            </a:r>
+          </a:p>
+        </p:txBody>
+      </p:sp>
+      <p:sp>
+        <p:nvSpPr>
+          <p:cNvPr id="17" name="Rectangle 16"/>
+          <p:cNvSpPr/>
+          <p:nvPr/>
+        </p:nvSpPr>
+        <p:spPr>
+          <a:xfrm>
+            <a:off x="9180576" y="1737360"/>
+            <a:ext cx="2615184" cy="841248"/>
+          </a:xfrm>
+          <a:prstGeom prst="rect">
+            <a:avLst/>
+          </a:prstGeom>
+          <a:solidFill>
+            <a:srgbClr val="FFFFFF"/>
+          </a:solidFill>
+          <a:ln>
+            <a:noFill/>
+          </a:ln>
+        </p:spPr>
+        <p:style>
+          <a:lnRef idx="1">
+            <a:schemeClr val="accent1"/>
+          </a:lnRef>
+          <a:fillRef idx="3">
+            <a:schemeClr val="accent1"/>
+          </a:fillRef>
+          <a:effectRef idx="2">
+            <a:schemeClr val="accent1"/>
+          </a:effectRef>
+          <a:fontRef idx="minor">
+            <a:schemeClr val="lt1"/>
+          </a:fontRef>
+        </p:style>
+        <p:txBody>
+          <a:bodyPr rtlCol="0" anchor="ctr"/>
+          <a:lstStyle/>
+          <a:p>
+            <a:pPr algn="ctr"/>
+          </a:p>
+        </p:txBody>
+      </p:sp>
+      <p:sp>
+        <p:nvSpPr>
+          <p:cNvPr id="18" name="Rectangle 17"/>
+          <p:cNvSpPr/>
+          <p:nvPr/>
+        </p:nvSpPr>
+        <p:spPr>
+          <a:xfrm>
+            <a:off x="9180576" y="1737360"/>
+            <a:ext cx="73152" cy="841248"/>
+          </a:xfrm>
+          <a:prstGeom prst="rect">
+            <a:avLst/>
+          </a:prstGeom>
+          <a:solidFill>
+            <a:srgbClr val="D6575E"/>
+          </a:solidFill>
+          <a:ln>
+            <a:noFill/>
+          </a:ln>
+        </p:spPr>
+        <p:style>
+          <a:lnRef idx="1">
+            <a:schemeClr val="accent1"/>
+          </a:lnRef>
+          <a:fillRef idx="3">
+            <a:schemeClr val="accent1"/>
+          </a:fillRef>
+          <a:effectRef idx="2">
+            <a:schemeClr val="accent1"/>
+          </a:effectRef>
+          <a:fontRef idx="minor">
+            <a:schemeClr val="lt1"/>
+          </a:fontRef>
+        </p:style>
+        <p:txBody>
+          <a:bodyPr rtlCol="0" anchor="ctr"/>
+          <a:lstStyle/>
+          <a:p>
+            <a:pPr algn="ctr"/>
+          </a:p>
+        </p:txBody>
+      </p:sp>
+      <p:sp>
+        <p:nvSpPr>
+          <p:cNvPr id="19" name="TextBox 18"/>
+          <p:cNvSpPr txBox="1"/>
+          <p:nvPr/>
+        </p:nvSpPr>
+        <p:spPr>
+          <a:xfrm>
+            <a:off x="9345167" y="1847088"/>
+            <a:ext cx="2304288" cy="338328"/>
+          </a:xfrm>
+          <a:prstGeom prst="rect">
+            <a:avLst/>
+          </a:prstGeom>
+          <a:noFill/>
+        </p:spPr>
+        <p:txBody>
+          <a:bodyPr wrap="square" lIns="73152" rIns="73152" tIns="36576" bIns="27432" anchor="ctr">
+            <a:spAutoFit/>
+          </a:bodyPr>
+          <a:lstStyle/>
+          <a:p>
+            <a:pPr>
+              <a:defRPr sz="1900" b="1">
+                <a:solidFill>
+                  <a:srgbClr val="112240"/>
+                </a:solidFill>
+                <a:latin typeface="Aptos"/>
+              </a:defRPr>
+            </a:pPr>
+            <a:r>
+              <a:t>2 / 2</a:t>
+            </a:r>
+          </a:p>
+        </p:txBody>
+      </p:sp>
+      <p:sp>
+        <p:nvSpPr>
+          <p:cNvPr id="20" name="TextBox 19"/>
+          <p:cNvSpPr txBox="1"/>
+          <p:nvPr/>
+        </p:nvSpPr>
+        <p:spPr>
+          <a:xfrm>
+            <a:off x="9345167" y="2221992"/>
+            <a:ext cx="2304288" cy="201168"/>
+          </a:xfrm>
+          <a:prstGeom prst="rect">
+            <a:avLst/>
+          </a:prstGeom>
+          <a:noFill/>
+        </p:spPr>
+        <p:txBody>
+          <a:bodyPr wrap="square" lIns="73152" rIns="73152" tIns="36576" bIns="27432" anchor="ctr">
+            <a:spAutoFit/>
+          </a:bodyPr>
+          <a:lstStyle/>
+          <a:p>
+            <a:pPr>
+              <a:defRPr sz="900" b="0">
+                <a:solidFill>
+                  <a:srgbClr val="637389"/>
+                </a:solidFill>
+                <a:latin typeface="Aptos"/>
+              </a:defRPr>
+            </a:pPr>
+            <a:r>
+              <a:t>remediation testi geçti</a:t>
+            </a:r>
+          </a:p>
+        </p:txBody>
+      </p:sp>
+      <p:sp>
+        <p:nvSpPr>
+          <p:cNvPr id="21" name="Rectangle 20"/>
+          <p:cNvSpPr/>
+          <p:nvPr/>
+        </p:nvSpPr>
+        <p:spPr>
+          <a:xfrm>
+            <a:off x="621792" y="2852928"/>
+            <a:ext cx="10972800" cy="2103120"/>
+          </a:xfrm>
+          <a:prstGeom prst="rect">
+            <a:avLst/>
+          </a:prstGeom>
+          <a:solidFill>
+            <a:srgbClr val="E7F0FA"/>
+          </a:solidFill>
+          <a:ln>
+            <a:noFill/>
+          </a:ln>
+        </p:spPr>
+        <p:style>
+          <a:lnRef idx="1">
+            <a:schemeClr val="accent1"/>
+          </a:lnRef>
+          <a:fillRef idx="3">
+            <a:schemeClr val="accent1"/>
+          </a:fillRef>
+          <a:effectRef idx="2">
+            <a:schemeClr val="accent1"/>
+          </a:effectRef>
+          <a:fontRef idx="minor">
+            <a:schemeClr val="lt1"/>
+          </a:fontRef>
+        </p:style>
+        <p:txBody>
+          <a:bodyPr rtlCol="0" anchor="ctr"/>
+          <a:lstStyle/>
+          <a:p>
+            <a:pPr algn="ctr"/>
+          </a:p>
+        </p:txBody>
+      </p:sp>
+      <p:sp>
+        <p:nvSpPr>
+          <p:cNvPr id="22" name="TextBox 21"/>
+          <p:cNvSpPr txBox="1"/>
+          <p:nvPr/>
+        </p:nvSpPr>
+        <p:spPr>
+          <a:xfrm>
+            <a:off x="859536" y="3035808"/>
+            <a:ext cx="4754880" cy="310896"/>
+          </a:xfrm>
+          <a:prstGeom prst="rect">
+            <a:avLst/>
+          </a:prstGeom>
+          <a:noFill/>
+        </p:spPr>
+        <p:txBody>
+          <a:bodyPr wrap="square" lIns="73152" rIns="73152" tIns="36576" bIns="27432" anchor="ctr">
+            <a:spAutoFit/>
+          </a:bodyPr>
+          <a:lstStyle/>
+          <a:p>
+            <a:pPr>
+              <a:defRPr sz="1400" b="1">
+                <a:solidFill>
+                  <a:srgbClr val="112240"/>
+                </a:solidFill>
+                <a:latin typeface="Aptos"/>
+              </a:defRPr>
+            </a:pPr>
+            <a:r>
+              <a:t>Akış sonucu</a:t>
+            </a:r>
+          </a:p>
+        </p:txBody>
+      </p:sp>
+      <p:sp>
+        <p:nvSpPr>
+          <p:cNvPr id="23" name="TextBox 22"/>
+          <p:cNvSpPr txBox="1"/>
+          <p:nvPr/>
+        </p:nvSpPr>
+        <p:spPr>
+          <a:xfrm>
+            <a:off x="859536" y="3493008"/>
+            <a:ext cx="10378440" cy="1234440"/>
+          </a:xfrm>
+          <a:prstGeom prst="rect">
+            <a:avLst/>
+          </a:prstGeom>
+          <a:noFill/>
+        </p:spPr>
+        <p:txBody>
+          <a:bodyPr wrap="square" lIns="73152" rIns="73152" tIns="36576" bIns="27432" anchor="ctr">
+            <a:spAutoFit/>
+          </a:bodyPr>
+          <a:lstStyle/>
+          <a:p>
+            <a:pPr>
+              <a:defRPr sz="1100" b="0">
+                <a:solidFill>
+                  <a:srgbClr val="223045"/>
+                </a:solidFill>
+                <a:latin typeface="Aptos"/>
+              </a:defRPr>
+            </a:pPr>
+            <a:r>
+              <a:t>PDF → 146 chunk · Tahmin/onay → 2 mock model · Tarama → 1 dosya / 2 sentetik bulgu</a:t>
+            </a:r>
+          </a:p>
+          <a:p>
+            <a:pPr>
+              <a:defRPr sz="1100" b="0">
+                <a:solidFill>
+                  <a:srgbClr val="223045"/>
+                </a:solidFill>
+                <a:latin typeface="Aptos"/>
+              </a:defRPr>
+            </a:pPr>
+            <a:r>
+              <a:t>Remediation → 2 bulgu ayrı worktree'de düzeltildi · pytest → 2 passed</a:t>
+            </a:r>
+          </a:p>
+          <a:p>
+            <a:pPr>
+              <a:defRPr sz="1100" b="0">
+                <a:solidFill>
+                  <a:srgbClr val="223045"/>
+                </a:solidFill>
+                <a:latin typeface="Aptos"/>
+              </a:defRPr>
+            </a:pPr>
+            <a:r>
+              <a:t>PR provası → dal yerel bare remote'a gönderildi; GitHub CLI yanıtı mock</a:t>
+            </a:r>
+          </a:p>
+          <a:p>
+            <a:pPr>
+              <a:defRPr sz="1100" b="0">
+                <a:solidFill>
+                  <a:srgbClr val="223045"/>
+                </a:solidFill>
+                <a:latin typeface="Aptos"/>
+              </a:defRPr>
+            </a:pPr>
+            <a:r>
+              <a:t>Canlı llama3.2:1b denemesi → 0 dosya; model yanıtı geçersiz JSON</a:t>
+            </a:r>
+          </a:p>
+        </p:txBody>
+      </p:sp>
+      <p:sp>
+        <p:nvSpPr>
+          <p:cNvPr id="24" name="TextBox 23"/>
+          <p:cNvSpPr txBox="1"/>
+          <p:nvPr/>
+        </p:nvSpPr>
+        <p:spPr>
+          <a:xfrm>
+            <a:off x="822960" y="5138928"/>
+            <a:ext cx="2560320" cy="292608"/>
+          </a:xfrm>
+          <a:prstGeom prst="rect">
+            <a:avLst/>
+          </a:prstGeom>
+          <a:noFill/>
+        </p:spPr>
+        <p:txBody>
+          <a:bodyPr wrap="square" lIns="73152" rIns="73152" tIns="36576" bIns="27432" anchor="ctr">
+            <a:spAutoFit/>
+          </a:bodyPr>
+          <a:lstStyle/>
+          <a:p>
+            <a:pPr>
+              <a:defRPr sz="1000" b="1">
+                <a:solidFill>
+                  <a:srgbClr val="00AFA0"/>
+                </a:solidFill>
+                <a:latin typeface="Aptos"/>
+              </a:defRPr>
+            </a:pPr>
+            <a:r>
+              <a:rPr>
+                <a:hlinkClick r:id="rId2"/>
+              </a:rPr>
+              <a:t>E2E özeti</a:t>
+            </a:r>
+          </a:p>
+        </p:txBody>
+      </p:sp>
+      <p:sp>
+        <p:nvSpPr>
+          <p:cNvPr id="25" name="TextBox 24"/>
+          <p:cNvSpPr txBox="1"/>
+          <p:nvPr/>
+        </p:nvSpPr>
+        <p:spPr>
+          <a:xfrm>
+            <a:off x="3611879" y="5138928"/>
+            <a:ext cx="2560320" cy="292608"/>
+          </a:xfrm>
+          <a:prstGeom prst="rect">
+            <a:avLst/>
+          </a:prstGeom>
+          <a:noFill/>
+        </p:spPr>
+        <p:txBody>
+          <a:bodyPr wrap="square" lIns="73152" rIns="73152" tIns="36576" bIns="27432" anchor="ctr">
+            <a:spAutoFit/>
+          </a:bodyPr>
+          <a:lstStyle/>
+          <a:p>
+            <a:pPr>
+              <a:defRPr sz="1000" b="1">
+                <a:solidFill>
+                  <a:srgbClr val="00AFA0"/>
+                </a:solidFill>
+                <a:latin typeface="Aptos"/>
+              </a:defRPr>
+            </a:pPr>
+            <a:r>
+              <a:rPr>
+                <a:hlinkClick r:id="rId3"/>
+              </a:rPr>
+              <a:t>Tarama raporu</a:t>
+            </a:r>
+          </a:p>
+        </p:txBody>
+      </p:sp>
+      <p:sp>
+        <p:nvSpPr>
+          <p:cNvPr id="26" name="TextBox 25"/>
+          <p:cNvSpPr txBox="1"/>
+          <p:nvPr/>
+        </p:nvSpPr>
+        <p:spPr>
+          <a:xfrm>
+            <a:off x="6400800" y="5138928"/>
+            <a:ext cx="2560320" cy="292608"/>
+          </a:xfrm>
+          <a:prstGeom prst="rect">
+            <a:avLst/>
+          </a:prstGeom>
+          <a:noFill/>
+        </p:spPr>
+        <p:txBody>
+          <a:bodyPr wrap="square" lIns="73152" rIns="73152" tIns="36576" bIns="27432" anchor="ctr">
+            <a:spAutoFit/>
+          </a:bodyPr>
+          <a:lstStyle/>
+          <a:p>
+            <a:pPr>
+              <a:defRPr sz="1000" b="1">
+                <a:solidFill>
+                  <a:srgbClr val="00AFA0"/>
+                </a:solidFill>
+                <a:latin typeface="Aptos"/>
+              </a:defRPr>
+            </a:pPr>
+            <a:r>
+              <a:rPr>
+                <a:hlinkClick r:id="rId4"/>
+              </a:rPr>
+              <a:t>Remediation diff</a:t>
+            </a:r>
+          </a:p>
+        </p:txBody>
+      </p:sp>
+      <p:sp>
+        <p:nvSpPr>
+          <p:cNvPr id="27" name="TextBox 26"/>
+          <p:cNvSpPr txBox="1"/>
+          <p:nvPr/>
+        </p:nvSpPr>
+        <p:spPr>
+          <a:xfrm>
+            <a:off x="9189719" y="5138928"/>
+            <a:ext cx="2560320" cy="292608"/>
+          </a:xfrm>
+          <a:prstGeom prst="rect">
+            <a:avLst/>
+          </a:prstGeom>
+          <a:noFill/>
+        </p:spPr>
+        <p:txBody>
+          <a:bodyPr wrap="square" lIns="73152" rIns="73152" tIns="36576" bIns="27432" anchor="ctr">
+            <a:spAutoFit/>
+          </a:bodyPr>
+          <a:lstStyle/>
+          <a:p>
+            <a:pPr>
+              <a:defRPr sz="1000" b="1">
+                <a:solidFill>
+                  <a:srgbClr val="00AFA0"/>
+                </a:solidFill>
+                <a:latin typeface="Aptos"/>
+              </a:defRPr>
+            </a:pPr>
+            <a:r>
+              <a:rPr>
+                <a:hlinkClick r:id="rId5"/>
+              </a:rPr>
+              <a:t>Test raporu</a:t>
+            </a:r>
+          </a:p>
+        </p:txBody>
+      </p:sp>
+      <p:sp>
+        <p:nvSpPr>
+          <p:cNvPr id="28" name="TextBox 27"/>
+          <p:cNvSpPr txBox="1"/>
+          <p:nvPr/>
+        </p:nvSpPr>
+        <p:spPr>
+          <a:xfrm>
+            <a:off x="822960" y="5559552"/>
+            <a:ext cx="10241280" cy="310896"/>
+          </a:xfrm>
+          <a:prstGeom prst="rect">
+            <a:avLst/>
+          </a:prstGeom>
+          <a:noFill/>
+        </p:spPr>
+        <p:txBody>
+          <a:bodyPr wrap="square" lIns="73152" rIns="73152" tIns="36576" bIns="27432" anchor="ctr">
+            <a:spAutoFit/>
+          </a:bodyPr>
+          <a:lstStyle/>
+          <a:p>
+            <a:pPr>
+              <a:defRPr sz="900" b="0">
+                <a:solidFill>
+                  <a:srgbClr val="637389"/>
+                </a:solidFill>
+                <a:latin typeface="Aptos"/>
+              </a:defRPr>
+            </a:pPr>
+            <a:r>
+              <a:t>Tam E2E downstream akışı mock modelle doğrulandı; canlı model hatası güvenli biçimde remediation'ı durdurdu.</a:t>
+            </a:r>
+          </a:p>
+        </p:txBody>
+      </p:sp>
+      <p:pic>
+        <p:nvPicPr>
+          <p:cNvPr id="29" name="Picture 28" descr="softtech-logo-light-background.png"/>
+          <p:cNvPicPr>
+            <a:picLocks noChangeAspect="1"/>
+          </p:cNvPicPr>
+          <p:nvPr/>
+        </p:nvPicPr>
+        <p:blipFill>
+          <a:blip r:embed="rId6"/>
+          <a:stretch>
+            <a:fillRect/>
+          </a:stretch>
+        </p:blipFill>
+        <p:spPr>
+          <a:xfrm>
+            <a:off x="9985248" y="6382512"/>
+            <a:ext cx="960120" cy="416755"/>
+          </a:xfrm>
+          <a:prstGeom prst="rect">
+            <a:avLst/>
+          </a:prstGeom>
+        </p:spPr>
+      </p:pic>
+      <p:sp>
+        <p:nvSpPr>
+          <p:cNvPr id="30" name="TextBox 29"/>
+          <p:cNvSpPr txBox="1"/>
+          <p:nvPr/>
+        </p:nvSpPr>
+        <p:spPr>
+          <a:xfrm>
+            <a:off x="685800" y="5742432"/>
+            <a:ext cx="9052560" cy="274320"/>
+          </a:xfrm>
+          <a:prstGeom prst="rect">
+            <a:avLst/>
+          </a:prstGeom>
+          <a:noFill/>
+        </p:spPr>
+        <p:txBody>
+          <a:bodyPr wrap="square" lIns="73152" rIns="73152" tIns="36576" bIns="27432" anchor="ctr">
+            <a:spAutoFit/>
+          </a:bodyPr>
+          <a:lstStyle/>
+          <a:p>
+            <a:pPr>
+              <a:defRPr sz="900" b="0">
+                <a:solidFill>
+                  <a:srgbClr val="637389"/>
+                </a:solidFill>
+                <a:latin typeface="Aptos"/>
+              </a:defRPr>
+            </a:pPr>
+            <a:r>
+              <a:t>Softtech logosu görsel amaçlıdır; kurumsal onay veya iş birliği beyanı değildir.</a:t>
+            </a:r>
+          </a:p>
+        </p:txBody>
+      </p:sp>
+    </p:spTree>
+  </p:cSld>
+  <p:clrMapOvr>
+    <a:masterClrMapping/>
+  </p:clrMapOvr>
+</p:sld>
+</file>
+
 <file path=ppt/slides/slide4.xml><?xml version="1.0" encoding="utf-8"?>
 <p:sld xmlns:a="http://schemas.openxmlformats.org/drawingml/2006/main" xmlns:p="http://schemas.openxmlformats.org/presentationml/2006/main" xmlns:r="http://schemas.openxmlformats.org/officeDocument/2006/relationships">
   <p:cSld>
@@ -23325,7 +28349,7 @@
                 </a:solidFill>
                 <a:latin typeface="Segoe UI"/>
               </a:rPr>
-              <a:t>Tarama başlamadan ajan kapsamı ve maliyeti ölçer; onayınız olmadan tarama başlamaz</a:t>
+              <a:t>Kapsam ve yaklaşık token/süre tahmini tarama öncesi gösterilir; yerel kullanım için parasal maliyet hesaplanmaz.</a:t>
             </a:r>
           </a:p>
         </p:txBody>
@@ -23517,7 +28541,7 @@
                 </a:solidFill>
                 <a:latin typeface="Segoe UI"/>
               </a:rPr>
-              <a:t>Pilot ölçüm — orta boy tek repo</a:t>
+              <a:t>Tahminin girdileri</a:t>
             </a:r>
           </a:p>
         </p:txBody>
@@ -23556,7 +28580,7 @@
                 </a:solidFill>
                 <a:latin typeface="Segoe UI"/>
               </a:rPr>
-              <a:t>Kapsam: 178 dosya · 15.051 satır</a:t>
+              <a:t>Git'te izlenen kaynak dosyaları ve kullanıcı dosya sınırı</a:t>
             </a:r>
           </a:p>
           <a:p>
@@ -23572,7 +28596,7 @@
                 </a:solidFill>
                 <a:latin typeface="Segoe UI"/>
               </a:rPr>
-              <a:t>Uygulanacak tarama: 66 bilinen desen</a:t>
+              <a:t>Kod sorgusuyla BM25 RAG'den bulunan mevzuat parçaları</a:t>
             </a:r>
           </a:p>
           <a:p>
@@ -23588,7 +28612,7 @@
                 </a:solidFill>
                 <a:latin typeface="Segoe UI"/>
               </a:rPr>
-              <a:t>Otomatik tarama süresi: yaklaşık 1 saniye</a:t>
+              <a:t>Yaklaşık giriş tokenı + dosya başına çıktı varsayımı</a:t>
             </a:r>
           </a:p>
           <a:p>
@@ -23604,7 +28628,7 @@
                 </a:solidFill>
                 <a:latin typeface="Segoe UI"/>
               </a:rPr>
-              <a:t>Analiz ve rapor: yaklaşık 15-20 dakika</a:t>
+              <a:t>Tahmini toplam token ÷ yerel model hız ölçümü = yaklaşık süre</a:t>
             </a:r>
           </a:p>
           <a:p>
@@ -23620,7 +28644,7 @@
                 </a:solidFill>
                 <a:latin typeface="Segoe UI"/>
               </a:rPr>
-              <a:t>Bağlam maliyeti: düşük (yalnız eşleşen bölümler okunur)</a:t>
+              <a:t>Yerel Ollama için parasal maliyet üretilmez</a:t>
             </a:r>
           </a:p>
         </p:txBody>
@@ -23749,7 +28773,7 @@
                 </a:solidFill>
                 <a:latin typeface="Segoe UI"/>
               </a:rPr>
-              <a:t>Tam kapsam — 36 repolık tarama</a:t>
+              <a:t>Model ölçümü ve tahmin sınırları</a:t>
             </a:r>
           </a:p>
         </p:txBody>
@@ -23788,7 +28812,7 @@
                 </a:solidFill>
                 <a:latin typeface="Segoe UI"/>
               </a:rPr>
-              <a:t>Kapsam: 5.277 dosya · 1 milyonun üzerinde satır</a:t>
+              <a:t>Kurulu modeller kısa bir Ollama throughput benchmark'ından geçer</a:t>
             </a:r>
           </a:p>
           <a:p>
@@ -23804,7 +28828,7 @@
                 </a:solidFill>
                 <a:latin typeface="Segoe UI"/>
               </a:rPr>
-              <a:t>Uygulanacak tarama: 66 desen × repo + mevzuat hükümleri</a:t>
+              <a:t>Benchmark hızı ölçer; yanıt kalitesini veya mevzuat doğruluğunu ölçmez</a:t>
             </a:r>
           </a:p>
           <a:p>
@@ -23820,7 +28844,7 @@
                 </a:solidFill>
                 <a:latin typeface="Segoe UI"/>
               </a:rPr>
-              <a:t>Otomatik tarama süresi: yaklaşık 1 dakika</a:t>
+              <a:t>Token hesabı yaklaşık karakter/token varsayımına dayanır</a:t>
             </a:r>
           </a:p>
           <a:p>
@@ -23836,7 +28860,7 @@
                 </a:solidFill>
                 <a:latin typeface="Segoe UI"/>
               </a:rPr>
-              <a:t>Analiz ve rapor: yaklaşık 20-25 dakika</a:t>
+              <a:t>Kısmi dosya kapsamı ve RAG eşleşmeleri süreyi etkiler</a:t>
             </a:r>
           </a:p>
           <a:p>
@@ -23852,7 +28876,7 @@
                 </a:solidFill>
                 <a:latin typeface="Segoe UI"/>
               </a:rPr>
-              <a:t>Bağlam maliyeti: ölçülür ve önceden bildirilir</a:t>
+              <a:t>Repo, branch/commit, model ve kapsam onayı olmadan tarama başlamaz</a:t>
             </a:r>
           </a:p>
         </p:txBody>
@@ -23937,7 +28961,7 @@
                 </a:solidFill>
                 <a:latin typeface="Segoe UI"/>
               </a:rPr>
-              <a:t>Nasıl çalışır?</a:t>
+              <a:t>Tahmin nasıl sunulur?</a:t>
             </a:r>
           </a:p>
           <a:p>
@@ -23953,7 +28977,7 @@
                 </a:solidFill>
                 <a:latin typeface="Segoe UI"/>
               </a:rPr>
-              <a:t>1) Ajan depoyu ve dokümanı sayar (hangi dosyalar, kaç satır)   →   2) uygulanacak tarama sayısını hesaplar</a:t>
+              <a:t>1) İzlenen repo ve seçilen dosya sınırı belirlenir   →   2) ilgili mevzuat parçaları getirilir</a:t>
             </a:r>
           </a:p>
           <a:p>
@@ -23969,7 +28993,7 @@
                 </a:solidFill>
                 <a:latin typeface="Segoe UI"/>
               </a:rPr>
-              <a:t>3) Süre ve maliyet tahminini tablo olarak sunar   →   4) Sorar: 'Taramaya bu kapsamla başlayayım mı? (evet / daralt / hayır)'</a:t>
+              <a:t>3) Token varsayımı ve model hızıyla yaklaşık süre hesaplanır   →   4) kullanıcı model/kapsamı onaylar</a:t>
             </a:r>
           </a:p>
           <a:p>
@@ -23985,7 +29009,7 @@
                 </a:solidFill>
                 <a:latin typeface="Segoe UI"/>
               </a:rPr>
-              <a:t>Sayılar gerçek ölçümdür; tahmini süre ve maliyet başında '~' ile belirtilir. Kapsam büyük gelirse 'daralt' dersiniz; envanter yeniden hesaplanır ve tablo tekrar sunulur — siz 'evet' deyene kadar.</a:t>
+              <a:t>Tahmin yaklaşık süre ve token miktarıdır; parasal ücret ya da model kalitesi garantisi değildir.</a:t>
             </a:r>
           </a:p>
         </p:txBody>
@@ -25029,7 +30053,7 @@
                 </a:solidFill>
                 <a:latin typeface="Segoe UI"/>
               </a:rPr>
-              <a:t>Kodun güvenlik ve dolandırıcılık durum raporu</a:t>
+              <a:t>Kartlı ödeme kodunda güvenlik, işlem bütünlüğü ve veri riski</a:t>
             </a:r>
           </a:p>
         </p:txBody>
@@ -25221,7 +30245,7 @@
                 </a:solidFill>
                 <a:latin typeface="Segoe UI"/>
               </a:rPr>
-              <a:t>Ne istersiniz / ajan ne yapar</a:t>
+              <a:t>Belgeyi RAG için hazırlama</a:t>
             </a:r>
           </a:p>
         </p:txBody>
@@ -25308,7 +30332,7 @@
                 </a:solidFill>
                 <a:latin typeface="Segoe UI"/>
               </a:rPr>
-              <a:t>Bulgular önem sırasına dizilir; rapor yazılmadan hassas veriler gizlenir.</a:t>
+              <a:t>Bulgular önem sırasına dizilir; hassas veri içeren depolarda taramayı başlatmayın.</a:t>
             </a:r>
           </a:p>
         </p:txBody>
@@ -25556,7 +30580,7 @@
                 </a:solidFill>
                 <a:latin typeface="Segoe UI"/>
               </a:rPr>
-              <a:t>Gerçek ölçek: son 35-repolık taramada 24 kritik · 23 yüksek · 21 orta; uyum oranı %67.</a:t>
+              <a:t>Sağlanan 35-depo raporundaki ölçüm: 24 kritik · 23 yüksek · 21 orta; bu projede yeniden taranmadı.</a:t>
             </a:r>
           </a:p>
         </p:txBody>
@@ -26491,7 +31515,7 @@
                 </a:solidFill>
                 <a:latin typeface="Segoe UI"/>
               </a:rPr>
-              <a:t>2 — Bülten (Doküman) Etki Analizi</a:t>
+              <a:t>2 — Mevzuat RAG ve belge hazırlığı</a:t>
             </a:r>
           </a:p>
         </p:txBody>
@@ -26530,7 +31554,7 @@
                 </a:solidFill>
                 <a:latin typeface="Segoe UI"/>
               </a:rPr>
-              <a:t>Yeni duyurunun kod üzerindeki etkisi, madde madde</a:t>
+              <a:t>PDF mevzuatından kaynak ve sayfa bilgili yerel arama indeksi</a:t>
             </a:r>
           </a:p>
         </p:txBody>
@@ -26722,7 +31746,7 @@
                 </a:solidFill>
                 <a:latin typeface="Segoe UI"/>
               </a:rPr>
-              <a:t>Ne istersiniz / ajan ne yapar</a:t>
+              <a:t>Belgeyi RAG için hazırlama</a:t>
             </a:r>
           </a:p>
         </p:txBody>
@@ -26761,7 +31785,7 @@
                 </a:solidFill>
                 <a:latin typeface="Segoe UI"/>
               </a:rPr>
-              <a:t>İstek: doküman dosyası + isterseniz ilgili repo.</a:t>
+              <a:t>Kaynak: kullanıcı tarafından sağlanan `mevzuat_link.json` PDF bağlantıları.</a:t>
             </a:r>
           </a:p>
           <a:p>
@@ -26777,7 +31801,7 @@
                 </a:solidFill>
                 <a:latin typeface="Segoe UI"/>
               </a:rPr>
-              <a:t>Ajan dokümanı doğal yapısından maddelere ayırır (M-01, M-02...).</a:t>
+              <a:t>PDF sayfalarındaki metin çıkarılır; kaynak ve sayfa bilgisi saklanır.</a:t>
             </a:r>
           </a:p>
           <a:p>
@@ -26793,7 +31817,7 @@
                 </a:solidFill>
                 <a:latin typeface="Segoe UI"/>
               </a:rPr>
-              <a:t>Repo verdiyseniz her maddeyi kodda arar: bugünkü durum ne, doküman ne istiyor, fark nerede?</a:t>
+              <a:t>Metin yaklaşık 1.200 karakterlik, örtüşmeli parçalara bölünür.</a:t>
             </a:r>
           </a:p>
           <a:p>
@@ -26809,7 +31833,7 @@
                 </a:solidFill>
                 <a:latin typeface="Segoe UI"/>
               </a:rPr>
-              <a:t>Madde listesi ve etki tablosunu önce size sunar; onayınız olmadan rapora geçmez.</a:t>
+              <a:t>`chunks.jsonl` ve `manifest.json` yerel RAG çıktılarıdır.</a:t>
             </a:r>
           </a:p>
         </p:txBody>
@@ -26938,7 +31962,7 @@
                 </a:solidFill>
                 <a:latin typeface="Segoe UI"/>
               </a:rPr>
-              <a:t>Her madde için ne raporlanır</a:t>
+              <a:t>Tarama sırasında retrieval</a:t>
             </a:r>
           </a:p>
         </p:txBody>
@@ -26977,7 +32001,7 @@
                 </a:solidFill>
                 <a:latin typeface="Segoe UI"/>
               </a:rPr>
-              <a:t>Dokümanın istediği değişiklik: teknik özet + geçerlilik tarihi + aciliyet — tarihler asla atlanmaz.</a:t>
+              <a:t>Dosya adı ve kod metni, ilgili mevzuat parçalarını aramak için kullanılır.</a:t>
             </a:r>
           </a:p>
           <a:p>
@@ -26993,7 +32017,7 @@
                 </a:solidFill>
                 <a:latin typeface="Segoe UI"/>
               </a:rPr>
-              <a:t>Bugünkü durum (dosya/fonksiyon/satır) ve olması gereken, adım adım.</a:t>
+              <a:t>BM25 anahtar kelime araması eşleşen chunk'ları kaynak/sayfa ile döndürür.</a:t>
             </a:r>
           </a:p>
           <a:p>
@@ -27009,7 +32033,7 @@
                 </a:solidFill>
                 <a:latin typeface="Segoe UI"/>
               </a:rPr>
-              <a:t>Etkilenen bileşenler tablosu: kod / yapılandırma / veri / test × risk × öncelik.</a:t>
+              <a:t>İlgili bağlam ve sınırlı kod içeriği yerel Ollama modeline verilir.</a:t>
             </a:r>
           </a:p>
           <a:p>
@@ -27025,7 +32049,7 @@
                 </a:solidFill>
                 <a:latin typeface="Segoe UI"/>
               </a:rPr>
-              <a:t>Yapılmazsa ne olur: hangi işlem nasıl bozulur?</a:t>
+              <a:t>Eşleşen mevzuat bulunmazsa dosya modele gönderilmez.</a:t>
             </a:r>
           </a:p>
           <a:p>
@@ -27041,7 +32065,7 @@
                 </a:solidFill>
                 <a:latin typeface="Segoe UI"/>
               </a:rPr>
-              <a:t>Test önerileri + efor tahmini (küçük/orta/büyük).</a:t>
+              <a:t>Arama leksikaldir; embedding, OCR ve mevzuat güncellik garantisi yoktur.</a:t>
             </a:r>
           </a:p>
           <a:p>
@@ -27057,7 +32081,7 @@
                 </a:solidFill>
                 <a:latin typeface="Segoe UI"/>
               </a:rPr>
-              <a:t>Rapor sonunda: öncelikli liste + en riskli 3 bileşen + sürüm önerisi + etkilenmeyen alanlar.</a:t>
+              <a:t>Atıf ve hüküm yorumu uzman tarafından doğrulanmalıdır.</a:t>
             </a:r>
           </a:p>
         </p:txBody>
@@ -27161,7 +32185,7 @@
                   <a:srgbClr val="0F2A43"/>
                 </a:solidFill>
               </a:rPr>
-              <a:t>Doküman seç</a:t>
+              <a:t>Kaynak seç</a:t>
             </a:r>
           </a:p>
         </p:txBody>
@@ -27379,7 +32403,7 @@
                   <a:srgbClr val="0F2A43"/>
                 </a:solidFill>
               </a:rPr>
-              <a:t>Repo?</a:t>
+              <a:t>RAG indeks</a:t>
             </a:r>
           </a:p>
         </p:txBody>
@@ -27488,7 +32512,7 @@
                   <a:srgbClr val="0F2A43"/>
                 </a:solidFill>
               </a:rPr>
-              <a:t>Madde analizi</a:t>
+              <a:t>Mevzuat ara</a:t>
             </a:r>
           </a:p>
         </p:txBody>
@@ -27922,7 +32946,7 @@
                 </a:solidFill>
                 <a:latin typeface="Segoe UI"/>
               </a:rPr>
-              <a:t>Hukuki gereklilik kodda ne kadar sağlanmış? Tek tek denetim</a:t>
+              <a:t>Seçilen mevzuat metni ile ödeme kodu arasında kanıt odaklı inceleme</a:t>
             </a:r>
           </a:p>
         </p:txBody>
@@ -28153,7 +33177,7 @@
                 </a:solidFill>
                 <a:latin typeface="Segoe UI"/>
               </a:rPr>
-              <a:t>İstek: kanun/yönetmelik belgesi (dosya, bağlantı veya yapıştırılan metin) + repo.</a:t>
+              <a:t>Girdi: mevzuat PDF'i ve kullanıcı onaylı Git repo; branch, commit ve kapsam belirlenir.</a:t>
             </a:r>
           </a:p>
           <a:p>
@@ -28169,7 +33193,7 @@
                 </a:solidFill>
                 <a:latin typeface="Segoe UI"/>
               </a:rPr>
-              <a:t>Ajan hükümleri numaralar (KANUN-17, YON-21 gibi) ve konu gruplarına ayırır: sözleşme, komisyon/kesinti, fiş, iade, terminasyon...</a:t>
+              <a:t>PDF sayfaları metne çıkarılır; örtüşen parçalar kaynak ve sayfa bilgisiyle yerel RAG indeksine alınır.</a:t>
             </a:r>
           </a:p>
           <a:p>
@@ -28185,7 +33209,7 @@
                 </a:solidFill>
                 <a:latin typeface="Segoe UI"/>
               </a:rPr>
-              <a:t>Her hüküm kodu birden çok yöntemle aranır: alan adları, işleyiş akışı, veritabanı/yapılandırma tanımları.</a:t>
+              <a:t>Kodla ilgili parçalar BM25 ile bulunur ve seçilen kaynak dosyalarıyla yerel modele verilir.</a:t>
             </a:r>
           </a:p>
           <a:p>
@@ -28201,7 +33225,7 @@
                 </a:solidFill>
                 <a:latin typeface="Segoe UI"/>
               </a:rPr>
-              <a:t>Negatif kontroller zorunludur: yasak bir işlem kod ile üretilmeye çalışılabilir mi? (ör. müşteriden ek ücret alınabilir mi?)</a:t>
+              <a:t>Model bulgusu, gerçek kod satırı ve modele sunulmuş mevzuat atfı eşleşmiyorsa reddedilir.</a:t>
             </a:r>
           </a:p>
         </p:txBody>
@@ -28369,7 +33393,7 @@
                 </a:solidFill>
                 <a:latin typeface="Segoe UI"/>
               </a:rPr>
-              <a:t>Her hükme karar: UYUMLU (kanıtıyla) / UYUMSUZ / EKSİK / KODDA YOK (sessizce uyumlu sayılmaz) / PARAMETRİK (kurum kararına bağlı).</a:t>
+              <a:t>Rapor; depo/commit, model, kapsam, tarih, dosya sonuçları ve doğrulanmış bulguları gösterir.</a:t>
             </a:r>
           </a:p>
           <a:p>
@@ -28385,7 +33409,7 @@
                 </a:solidFill>
                 <a:latin typeface="Segoe UI"/>
               </a:rPr>
-              <a:t>En kritik ihlal sınıfı: müşteriye maliyet/ek ücret aktarımı — önce kontrol edilir.</a:t>
+              <a:t>Bulgu; önem, dosya/satır, kod kanıtı, kaynak/sayfa, açıklama ve öneri içerir.</a:t>
             </a:r>
           </a:p>
           <a:p>
@@ -28401,7 +33425,7 @@
                 </a:solidFill>
                 <a:latin typeface="Segoe UI"/>
               </a:rPr>
-              <a:t>Uyum oranı (%), pozitif kontroller ve kapsam dışı hükümler ayrı listelenir.</a:t>
+              <a:t>Kısmi tarama, okunamayan dosya ve kanıt doğrulama hataları sınırlama olarak raporlanır.</a:t>
             </a:r>
           </a:p>
           <a:p>
@@ -28417,7 +33441,7 @@
                 </a:solidFill>
                 <a:latin typeface="Segoe UI"/>
               </a:rPr>
-              <a:t>Her karar; hüküm metni + kod konumu ile dayanır. Kod okunamayan bölüm 'Doğrulanmalı' etiketlenir.</a:t>
+              <a:t>Bulgu bulunmaması mevzuata tam uyum kararı değildir; incelenen kapsam sınırlı olabilir.</a:t>
             </a:r>
           </a:p>
           <a:p>
@@ -28433,7 +33457,7 @@
                 </a:solidFill>
                 <a:latin typeface="Segoe UI"/>
               </a:rPr>
-              <a:t>Rapor sonunda öncelikli düzeltme yol haritası gelir.</a:t>
+              <a:t>Hukuki yorum ve iş kararı, mevzuat uzmanı ve ödeme ürünü sorumlularınca doğrulanmalıdır.</a:t>
             </a:r>
           </a:p>
         </p:txBody>
@@ -28755,7 +33779,7 @@
                   <a:srgbClr val="0F2A43"/>
                 </a:solidFill>
               </a:rPr>
-              <a:t>Repo?</a:t>
+              <a:t>RAG indeks</a:t>
             </a:r>
           </a:p>
         </p:txBody>
@@ -29259,7 +34283,7 @@
                 </a:solidFill>
                 <a:latin typeface="Segoe UI"/>
               </a:rPr>
-              <a:t>4 — İş-Kod-Çözüm Analizi</a:t>
+              <a:t>4 — Kartlı ödeme akışındaki risk alanları</a:t>
             </a:r>
           </a:p>
         </p:txBody>
@@ -29298,7 +34322,7 @@
                 </a:solidFill>
                 <a:latin typeface="Segoe UI"/>
               </a:rPr>
-              <a:t>Olay/Jira/log kaydından kök nedene ve çözüm önerisine</a:t>
+              <a:t>Teknik kontrol noktalarını seçilen mevzuat ve kod kanıtıyla birlikte incele</a:t>
             </a:r>
           </a:p>
         </p:txBody>
@@ -29490,7 +34514,7 @@
                 </a:solidFill>
                 <a:latin typeface="Segoe UI"/>
               </a:rPr>
-              <a:t>İnceleme</a:t>
+              <a:t>Ödeme yaşam döngüsünde örnek kontroller</a:t>
             </a:r>
           </a:p>
         </p:txBody>
@@ -29529,7 +34553,7 @@
                 </a:solidFill>
                 <a:latin typeface="Segoe UI"/>
               </a:rPr>
-              <a:t>İstek: olay kaydı, Jira kaydı, log çıktısı veya iş dokümanı + repo.</a:t>
+              <a:t>Ödeme başlatma ve yetkilendirme: merchant, tutar, para birimi ve kanal doğrulaması.</a:t>
             </a:r>
           </a:p>
           <a:p>
@@ -29545,7 +34569,7 @@
                 </a:solidFill>
                 <a:latin typeface="Segoe UI"/>
               </a:rPr>
-              <a:t>Ajan 'hangi kaydı işleyelim?' diye sorar; onayınızla seçer.</a:t>
+              <a:t>Timeout/tekrar deneme: idempotency, duplicate charge ve reversal davranışı.</a:t>
             </a:r>
           </a:p>
           <a:p>
@@ -29561,7 +34585,7 @@
                 </a:solidFill>
                 <a:latin typeface="Segoe UI"/>
               </a:rPr>
-              <a:t>Log'tan hata kodu tablosu çıkarır: hangi kod kaç kere, hangi zaman aralığında.</a:t>
+              <a:t>Capture, iade ve mutabakat: işlem referanslarının doğru ilişkilendirilmesi.</a:t>
             </a:r>
           </a:p>
           <a:p>
@@ -29577,7 +34601,7 @@
                 </a:solidFill>
                 <a:latin typeface="Segoe UI"/>
               </a:rPr>
-              <a:t>Kodda aynı hata noktalarını arar; olay zamanlarını akışla eşler.</a:t>
+              <a:t>Kart verisi/token/kimlik bilgisi: depolama ve log kullanımının incelenmesi.</a:t>
             </a:r>
           </a:p>
           <a:p>
@@ -29593,7 +34617,7 @@
                 </a:solidFill>
                 <a:latin typeface="Segoe UI"/>
               </a:rPr>
-              <a:t>Varsa veritabanı prosedür tanımları da incelenir (bağlantı yok — yalnız tanım metni).</a:t>
+              <a:t>3DS, gateway, acquirer ve issuer entegrasyonlarında hata/timeout akışları.</a:t>
             </a:r>
           </a:p>
         </p:txBody>
@@ -29722,7 +34746,7 @@
                 </a:solidFill>
                 <a:latin typeface="Segoe UI"/>
               </a:rPr>
-              <a:t>Çözüm ve sınır</a:t>
+              <a:t>Bulguyu raporlama ve doğrulama sınırı</a:t>
             </a:r>
           </a:p>
         </p:txBody>
@@ -29761,7 +34785,7 @@
                 </a:solidFill>
                 <a:latin typeface="Segoe UI"/>
               </a:rPr>
-              <a:t>Kök neden analizi: birincil neden ve katkılar, kanıtla ayrılır.</a:t>
+              <a:t>Bu başlıklar teknik inceleme sorularıdır; kaynak olmadan mevzuat ihlali sayılmaz.</a:t>
             </a:r>
           </a:p>
           <a:p>
@@ -29777,7 +34801,7 @@
                 </a:solidFill>
                 <a:latin typeface="Segoe UI"/>
               </a:rPr>
-              <a:t>Çözüm önerisi kod farkı biçiminde: neyin nereden kaldırılıp/ekleneceği.</a:t>
+              <a:t>Raporlanan bulgu dosya/satır kod kanıtı ve sunulmuş mevzuat kaynağı taşımalıdır.</a:t>
             </a:r>
           </a:p>
           <a:p>
@@ -29793,7 +34817,7 @@
                 </a:solidFill>
                 <a:latin typeface="Segoe UI"/>
               </a:rPr>
-              <a:t>Test önerisi: değişikliği doğrulayacak senaryolar.</a:t>
+              <a:t>Kanıt/atıf doğrulamasından geçmeyen model çıktısı bulgu olarak kabul edilmez.</a:t>
             </a:r>
           </a:p>
           <a:p>
@@ -29809,7 +34833,7 @@
                 </a:solidFill>
                 <a:latin typeface="Segoe UI"/>
               </a:rPr>
-              <a:t>ÖNEMLİ SINIR: ajan kodu değiştirmez — öneriyi üretir, onayınız olmadan uygulamaz.</a:t>
+              <a:t>İş kuralı, runtime konfigürasyonu ve kurum uygulaması ayrıca teyit edilir.</a:t>
             </a:r>
           </a:p>
           <a:p>
@@ -29825,7 +34849,7 @@
                 </a:solidFill>
                 <a:latin typeface="Segoe UI"/>
               </a:rPr>
-              <a:t>Yalnız log verdiyseniz: desen + muhtemel bileşen verilir; 'kod doğrulaması gerekli' notu düşülür.</a:t>
+              <a:t>Gerçek kart sahibi verisiyle tarama yapmayın; otomatik maskeleme garantisi yoktur.</a:t>
             </a:r>
           </a:p>
           <a:p>
@@ -29841,7 +34865,7 @@
                 </a:solidFill>
                 <a:latin typeface="Segoe UI"/>
               </a:rPr>
-              <a:t>Her çıkarım kanıt taşır: hangi log satırı, hangi kod satırı, hangi doküman bölümü.</a:t>
+              <a:t>Düzeltme, test ve PR için birbirinden bağımsız kullanıcı onayı gerekir.</a:t>
             </a:r>
           </a:p>
         </p:txBody>
@@ -29945,7 +34969,7 @@
                   <a:srgbClr val="0F2A43"/>
                 </a:solidFill>
               </a:rPr>
-              <a:t>Kayıt seç</a:t>
+              <a:t>Kod alanı</a:t>
             </a:r>
           </a:p>
         </p:txBody>
@@ -30054,7 +35078,7 @@
                   <a:srgbClr val="0F2A43"/>
                 </a:solidFill>
               </a:rPr>
-              <a:t>Repo?</a:t>
+              <a:t>Mevzuat</a:t>
             </a:r>
           </a:p>
         </p:txBody>
@@ -30163,7 +35187,7 @@
                   <a:srgbClr val="0F2A43"/>
                 </a:solidFill>
               </a:rPr>
-              <a:t>Hata tablosu</a:t>
+              <a:t>Akış analizi</a:t>
             </a:r>
           </a:p>
         </p:txBody>
@@ -30381,7 +35405,7 @@
                   <a:srgbClr val="0F2A43"/>
                 </a:solidFill>
               </a:rPr>
-              <a:t>Kök neden</a:t>
+              <a:t>Kanıt</a:t>
             </a:r>
           </a:p>
         </p:txBody>
